--- a/mausam PPT/SIH26076-Mausam-FINAL.pptx
+++ b/mausam PPT/SIH26076-Mausam-FINAL.pptx
@@ -1351,184 +1351,6 @@
 </p:notes>
 </file>
 
-<file path=ppt/notesSlides/notesSlide6.xml><?xml version="1.0" encoding="utf-8"?>
-<p:notes xmlns:a="http://schemas.openxmlformats.org/drawingml/2006/main" xmlns:r="http://schemas.openxmlformats.org/officeDocument/2006/relationships" xmlns:p="http://schemas.openxmlformats.org/presentationml/2006/main">
-  <p:cSld>
-    <p:spTree>
-      <p:nvGrpSpPr>
-        <p:cNvPr id="1" name=""/>
-        <p:cNvGrpSpPr/>
-        <p:nvPr/>
-      </p:nvGrpSpPr>
-      <p:grpSpPr>
-        <a:xfrm>
-          <a:off x="0" y="0"/>
-          <a:ext cx="0" cy="0"/>
-          <a:chOff x="0" y="0"/>
-          <a:chExt cx="0" cy="0"/>
-        </a:xfrm>
-      </p:grpSpPr>
-      <p:sp>
-        <p:nvSpPr>
-          <p:cNvPr id="18433" name="Slide Image Placeholder 1"/>
-          <p:cNvSpPr>
-            <a:spLocks noGrp="1" noRot="1" noChangeAspect="1"/>
-          </p:cNvSpPr>
-          <p:nvPr>
-            <p:ph type="sldImg"/>
-          </p:nvPr>
-        </p:nvSpPr>
-        <p:spPr bwMode="auto">
-          <a:xfrm>
-            <a:off x="381000" y="685800"/>
-            <a:ext cx="6096000" cy="3429000"/>
-          </a:xfrm>
-          <a:noFill/>
-          <a:ln>
-            <a:solidFill>
-              <a:srgbClr val="000000"/>
-            </a:solidFill>
-            <a:miter lim="800000"/>
-            <a:headEnd/>
-            <a:tailEnd/>
-          </a:ln>
-        </p:spPr>
-      </p:sp>
-      <p:sp>
-        <p:nvSpPr>
-          <p:cNvPr id="18434" name="Notes Placeholder 2"/>
-          <p:cNvSpPr>
-            <a:spLocks noGrp="1"/>
-          </p:cNvSpPr>
-          <p:nvPr>
-            <p:ph type="body" idx="1"/>
-          </p:nvPr>
-        </p:nvSpPr>
-        <p:spPr bwMode="auto">
-          <a:noFill/>
-        </p:spPr>
-        <p:txBody>
-          <a:bodyPr wrap="square" numCol="1" anchor="t" anchorCtr="0" compatLnSpc="1">
-            <a:prstTxWarp prst="textNoShape">
-              <a:avLst/>
-            </a:prstTxWarp>
-          </a:bodyPr>
-          <a:lstStyle/>
-          <a:p>
-            <a:pPr eaLnBrk="1" hangingPunct="1">
-              <a:spcBef>
-                <a:spcPct val="0"/>
-              </a:spcBef>
-            </a:pPr>
-            <a:endParaRPr lang="en-US">
-              <a:ea typeface="ＭＳ Ｐゴシック" pitchFamily="1" charset="-128"/>
-            </a:endParaRPr>
-          </a:p>
-        </p:txBody>
-      </p:sp>
-      <p:sp>
-        <p:nvSpPr>
-          <p:cNvPr id="18435" name="Slide Number Placeholder 3"/>
-          <p:cNvSpPr>
-            <a:spLocks noGrp="1"/>
-          </p:cNvSpPr>
-          <p:nvPr>
-            <p:ph type="sldNum" sz="quarter" idx="5"/>
-          </p:nvPr>
-        </p:nvSpPr>
-        <p:spPr bwMode="auto">
-          <a:noFill/>
-          <a:ln>
-            <a:miter lim="800000"/>
-            <a:headEnd/>
-            <a:tailEnd/>
-          </a:ln>
-        </p:spPr>
-        <p:txBody>
-          <a:bodyPr/>
-          <a:lstStyle/>
-          <a:p>
-            <a:pPr marL="0" marR="0" lvl="0" indent="0" algn="r" defTabSz="457200" rtl="0" eaLnBrk="1" fontAlgn="base" latinLnBrk="0" hangingPunct="1">
-              <a:lnSpc>
-                <a:spcPct val="100000"/>
-              </a:lnSpc>
-              <a:spcBef>
-                <a:spcPct val="0"/>
-              </a:spcBef>
-              <a:spcAft>
-                <a:spcPct val="0"/>
-              </a:spcAft>
-              <a:buClrTx/>
-              <a:buSzTx/>
-              <a:buFontTx/>
-              <a:buNone/>
-              <a:tabLst/>
-              <a:defRPr/>
-            </a:pPr>
-            <a:fld id="{0CA7B74D-3791-4AC6-8451-F10DBCCCDD9A}" type="slidenum">
-              <a:rPr kumimoji="0" lang="en-US" sz="1200" b="0" i="0" u="none" strike="noStrike" kern="1200" cap="none" spc="0" normalizeH="0" baseline="0" noProof="0">
-                <a:ln>
-                  <a:noFill/>
-                </a:ln>
-                <a:solidFill>
-                  <a:prstClr val="black"/>
-                </a:solidFill>
-                <a:effectLst/>
-                <a:uLnTx/>
-                <a:uFillTx/>
-                <a:latin typeface="Calibri" pitchFamily="34" charset="0"/>
-                <a:ea typeface="ＭＳ Ｐゴシック" pitchFamily="1" charset="-128"/>
-                <a:cs typeface="+mn-cs"/>
-              </a:rPr>
-              <a:pPr marL="0" marR="0" lvl="0" indent="0" algn="r" defTabSz="457200" rtl="0" eaLnBrk="1" fontAlgn="base" latinLnBrk="0" hangingPunct="1">
-                <a:lnSpc>
-                  <a:spcPct val="100000"/>
-                </a:lnSpc>
-                <a:spcBef>
-                  <a:spcPct val="0"/>
-                </a:spcBef>
-                <a:spcAft>
-                  <a:spcPct val="0"/>
-                </a:spcAft>
-                <a:buClrTx/>
-                <a:buSzTx/>
-                <a:buFontTx/>
-                <a:buNone/>
-                <a:tabLst/>
-                <a:defRPr/>
-              </a:pPr>
-              <a:t>7</a:t>
-            </a:fld>
-            <a:endParaRPr kumimoji="0" lang="en-US" sz="1200" b="0" i="0" u="none" strike="noStrike" kern="1200" cap="none" spc="0" normalizeH="0" baseline="0" noProof="0">
-              <a:ln>
-                <a:noFill/>
-              </a:ln>
-              <a:solidFill>
-                <a:prstClr val="black"/>
-              </a:solidFill>
-              <a:effectLst/>
-              <a:uLnTx/>
-              <a:uFillTx/>
-              <a:latin typeface="Calibri" pitchFamily="34" charset="0"/>
-              <a:ea typeface="ＭＳ Ｐゴシック" pitchFamily="1" charset="-128"/>
-              <a:cs typeface="+mn-cs"/>
-            </a:endParaRPr>
-          </a:p>
-        </p:txBody>
-      </p:sp>
-    </p:spTree>
-    <p:extLst>
-      <p:ext uri="{BB962C8B-B14F-4D97-AF65-F5344CB8AC3E}">
-        <p14:creationId xmlns:p14="http://schemas.microsoft.com/office/powerpoint/2010/main" val="3783576877"/>
-      </p:ext>
-    </p:extLst>
-  </p:cSld>
-  <p:clrMapOvr>
-    <a:masterClrMapping/>
-  </p:clrMapOvr>
-</p:notes>
-</file>
-
 <file path=ppt/slideLayouts/slideLayout1.xml><?xml version="1.0" encoding="utf-8"?>
 <p:sldLayout xmlns:a="http://schemas.openxmlformats.org/drawingml/2006/main" xmlns:r="http://schemas.openxmlformats.org/officeDocument/2006/relationships" xmlns:p="http://schemas.openxmlformats.org/presentationml/2006/main" type="title" preserve="1">
   <p:cSld name="Title Slide">
@@ -4915,40 +4737,19 @@
         </p:nvSpPr>
         <p:spPr>
           <a:xfrm>
-            <a:off x="1245686" y="648614"/>
-            <a:ext cx="8534400" cy="1752600"/>
+            <a:off x="11841480" y="6035040"/>
+            <a:ext cx="100" cy="100"/>
           </a:xfrm>
         </p:spPr>
         <p:txBody>
           <a:bodyPr/>
           <a:lstStyle/>
           <a:p>
-            <a:endParaRPr lang="en-US" b="1" dirty="0">
-              <a:solidFill>
-                <a:schemeClr val="tx1"/>
-              </a:solidFill>
-              <a:latin typeface="Times New Roman" panose="02020603050405020304" pitchFamily="18" charset="0"/>
-              <a:cs typeface="Times New Roman" panose="02020603050405020304" pitchFamily="18" charset="0"/>
-            </a:endParaRPr>
-          </a:p>
-          <a:p>
-            <a:r>
-              <a:rPr lang="en-US" b="1" dirty="0">
-                <a:solidFill>
-                  <a:schemeClr val="tx1"/>
-                </a:solidFill>
-                <a:latin typeface="Times New Roman" panose="02020603050405020304" pitchFamily="18" charset="0"/>
-                <a:cs typeface="Times New Roman" panose="02020603050405020304" pitchFamily="18" charset="0"/>
-              </a:rPr>
-              <a:t>TITLE PAGE</a:t>
-            </a:r>
-            <a:endParaRPr lang="en-IN" b="1" dirty="0">
-              <a:solidFill>
-                <a:schemeClr val="tx1"/>
-              </a:solidFill>
-              <a:latin typeface="Times New Roman" panose="02020603050405020304" pitchFamily="18" charset="0"/>
-              <a:cs typeface="Times New Roman" panose="02020603050405020304" pitchFamily="18" charset="0"/>
-            </a:endParaRPr>
+            <a:pPr>
+              <a:lnSpc>
+                <a:spcPct val="100000"/>
+              </a:lnSpc>
+            </a:pPr>
           </a:p>
         </p:txBody>
       </p:sp>
@@ -4972,30 +4773,11 @@
           <a:bodyPr/>
           <a:lstStyle/>
           <a:p>
-            <a:r>
-              <a:rPr lang="en-US" sz="4000" b="1" dirty="0">
-                <a:solidFill>
-                  <a:schemeClr val="tx2"/>
-                </a:solidFill>
-                <a:latin typeface="Garamond" panose="02020404030301010803" pitchFamily="18" charset="0"/>
-              </a:rPr>
-              <a:t>SMART INDIA HACKATHON </a:t>
-            </a:r>
-            <a:r>
-              <a:rPr lang="en-US" sz="4000" b="1" dirty="0" smtClean="0">
-                <a:solidFill>
-                  <a:schemeClr val="tx2"/>
-                </a:solidFill>
-                <a:latin typeface="Garamond" panose="02020404030301010803" pitchFamily="18" charset="0"/>
-              </a:rPr>
-              <a:t>2026</a:t>
-            </a:r>
-            <a:endParaRPr lang="en-IN" sz="4000" b="1" dirty="0">
-              <a:solidFill>
-                <a:schemeClr val="tx2"/>
-              </a:solidFill>
-              <a:latin typeface="Garamond" panose="02020404030301010803" pitchFamily="18" charset="0"/>
-            </a:endParaRPr>
+            <a:pPr>
+              <a:lnSpc>
+                <a:spcPct val="100000"/>
+              </a:lnSpc>
+            </a:pPr>
           </a:p>
         </p:txBody>
       </p:sp>
@@ -5007,8 +4789,8 @@
         </p:nvSpPr>
         <p:spPr>
           <a:xfrm>
-            <a:off x="331286" y="2076450"/>
-            <a:ext cx="5924550" cy="4703019"/>
+            <a:off x="11841480" y="6035040"/>
+            <a:ext cx="100" cy="100"/>
           </a:xfrm>
           <a:prstGeom prst="rect">
             <a:avLst/>
@@ -5021,143 +4803,11 @@
           </a:bodyPr>
           <a:lstStyle/>
           <a:p>
-            <a:endParaRPr lang="en-US" dirty="0"/>
-          </a:p>
-          <a:p>
-            <a:pPr marL="285750" indent="-285750" algn="l">
-              <a:lnSpc>
-                <a:spcPct val="100000"/>
-              </a:lnSpc>
-              <a:spcBef>
-                <a:spcPts val="0"/>
-              </a:spcBef>
-              <a:spcAft>
-                <a:spcPts val="0"/>
-              </a:spcAft>
-              <a:buFont typeface="Arial" panose="020B0604020202020204" pitchFamily="34" charset="0"/>
-              <a:buChar char="•"/>
-            </a:pPr>
-            <a:r>
-              <a:rPr lang="en-US" sz="1700" b="1" dirty="0">
-                <a:latin typeface="Arial" panose="020B0604020202020204" pitchFamily="34" charset="0"/>
-                <a:cs typeface="Arial" panose="020B0604020202020204" pitchFamily="34" charset="0"/>
-              </a:rPr>
-              <a:t>Problem Statement ID – SIH26076</a:t>
-            </a:r>
-          </a:p>
-          <a:p>
-            <a:pPr marL="285750" indent="-285750" algn="l">
-              <a:lnSpc>
-                <a:spcPct val="100000"/>
-              </a:lnSpc>
-              <a:spcBef>
-                <a:spcPts val="0"/>
-              </a:spcBef>
-              <a:spcAft>
-                <a:spcPts val="0"/>
-              </a:spcAft>
-              <a:buFont typeface="Arial" panose="020B0604020202020204" pitchFamily="34" charset="0"/>
-              <a:buChar char="•"/>
-            </a:pPr>
-            <a:r>
-              <a:rPr lang="en-US" sz="1500" b="1" dirty="0">
-                <a:latin typeface="Arial" panose="020B0604020202020204" pitchFamily="34" charset="0"/>
-                <a:cs typeface="Arial" panose="020B0604020202020204" pitchFamily="34" charset="0"/>
-              </a:rPr>
-              <a:t>Personalised homepage for the Mausam mobile application</a:t>
-            </a:r>
-          </a:p>
-          <a:p>
-            <a:pPr marL="285750" indent="-285750" algn="l">
-              <a:lnSpc>
-                <a:spcPct val="100000"/>
-              </a:lnSpc>
-              <a:spcBef>
-                <a:spcPts val="0"/>
-              </a:spcBef>
-              <a:spcAft>
-                <a:spcPts val="0"/>
-              </a:spcAft>
-              <a:buFont typeface="Arial" panose="020B0604020202020204" pitchFamily="34" charset="0"/>
-              <a:buChar char="•"/>
-            </a:pPr>
-            <a:r>
-              <a:rPr lang="en-US" sz="1700" b="1" dirty="0">
-                <a:latin typeface="Arial" panose="020B0604020202020204" pitchFamily="34" charset="0"/>
-                <a:cs typeface="Arial" panose="020B0604020202020204" pitchFamily="34" charset="0"/>
-              </a:rPr>
-              <a:t>Theme – Smart Automation</a:t>
-            </a:r>
-          </a:p>
-          <a:p>
-            <a:pPr marL="285750" indent="-285750" algn="l">
-              <a:lnSpc>
-                <a:spcPct val="100000"/>
-              </a:lnSpc>
-              <a:spcBef>
-                <a:spcPts val="0"/>
-              </a:spcBef>
-              <a:spcAft>
-                <a:spcPts val="0"/>
-              </a:spcAft>
-              <a:buFont typeface="Arial" panose="020B0604020202020204" pitchFamily="34" charset="0"/>
-              <a:buChar char="•"/>
-            </a:pPr>
-            <a:r>
-              <a:rPr lang="en-US" sz="1700" b="1" dirty="0">
-                <a:latin typeface="Arial" panose="020B0604020202020204" pitchFamily="34" charset="0"/>
-                <a:cs typeface="Arial" panose="020B0604020202020204" pitchFamily="34" charset="0"/>
-              </a:rPr>
-              <a:t>PS Category – Software</a:t>
-            </a:r>
-          </a:p>
-          <a:p>
-            <a:pPr marL="285750" indent="-285750" algn="l">
-              <a:lnSpc>
-                <a:spcPct val="100000"/>
-              </a:lnSpc>
-              <a:spcBef>
-                <a:spcPts val="0"/>
-              </a:spcBef>
-              <a:spcAft>
-                <a:spcPts val="0"/>
-              </a:spcAft>
-              <a:buFont typeface="Arial" panose="020B0604020202020204" pitchFamily="34" charset="0"/>
-              <a:buChar char="•"/>
-            </a:pPr>
-            <a:r>
-              <a:rPr lang="en-US" sz="1700" b="1" dirty="0">
-                <a:latin typeface="Arial" panose="020B0604020202020204" pitchFamily="34" charset="0"/>
-                <a:cs typeface="Arial" panose="020B0604020202020204" pitchFamily="34" charset="0"/>
-              </a:rPr>
-              <a:t>Team ID – 195697</a:t>
-            </a:r>
-          </a:p>
-          <a:p>
-            <a:pPr marL="285750" indent="-285750" algn="l">
-              <a:lnSpc>
-                <a:spcPct val="100000"/>
-              </a:lnSpc>
-              <a:spcBef>
-                <a:spcPts val="0"/>
-              </a:spcBef>
-              <a:spcAft>
-                <a:spcPts val="0"/>
-              </a:spcAft>
-              <a:buFont typeface="Arial" panose="020B0604020202020204" pitchFamily="34" charset="0"/>
-              <a:buChar char="•"/>
-            </a:pPr>
-            <a:r>
-              <a:rPr lang="en-US" sz="1700" b="1" dirty="0">
-                <a:latin typeface="Arial" panose="020B0604020202020204" pitchFamily="34" charset="0"/>
-                <a:cs typeface="Arial" panose="020B0604020202020204" pitchFamily="34" charset="0"/>
-              </a:rPr>
-              <a:t>Team Name – Zencoderss</a:t>
-            </a:r>
-            <a:endParaRPr lang="en-IN" sz="2400" b="1" dirty="0">
-              <a:latin typeface="Arial" panose="020B0604020202020204" pitchFamily="34" charset="0"/>
-              <a:cs typeface="Arial" panose="020B0604020202020204" pitchFamily="34" charset="0"/>
-            </a:endParaRPr>
+            <a:pPr>
+              <a:lnSpc>
+                <a:spcPct val="100000"/>
+              </a:lnSpc>
+            </a:pPr>
           </a:p>
         </p:txBody>
       </p:sp>
@@ -5193,7 +4843,7 @@
       </p:pic>
       <p:sp>
         <p:nvSpPr>
-          <p:cNvPr id="39" name="accent"/>
+          <p:cNvPr id="39" name="heading_pill"/>
           <p:cNvSpPr>
             <a:spLocks noChangeAspect="0"/>
           </p:cNvSpPr>
@@ -5201,17 +4851,69 @@
         </p:nvSpPr>
         <p:spPr>
           <a:xfrm>
-            <a:off x="612648" y="4160520"/>
-            <a:ext cx="5120640" cy="82296"/>
-          </a:xfrm>
-          <a:prstGeom prst="rect">
-            <a:avLst/>
-          </a:prstGeom>
-          <a:solidFill>
-            <a:srgbClr val="F79646"/>
+            <a:off x="2666848" y="164592"/>
+            <a:ext cx="6858000" cy="676656"/>
+          </a:xfrm>
+          <a:prstGeom prst="roundRect">
+            <a:avLst>
+              <a:gd name="adj" fmla="val 50000"/>
+            </a:avLst>
+          </a:prstGeom>
+          <a:solidFill>
+            <a:srgbClr val="003366"/>
           </a:solidFill>
           <a:ln>
             <a:noFill/>
+          </a:ln>
+        </p:spPr>
+        <p:txBody>
+          <a:bodyPr anchor="ctr" wrap="square">
+            <a:normAutofit/>
+          </a:bodyPr>
+          <a:lstStyle/>
+          <a:p>
+            <a:pPr algn="ctr">
+              <a:lnSpc>
+                <a:spcPct val="100000"/>
+              </a:lnSpc>
+            </a:pPr>
+            <a:r>
+              <a:rPr lang="en-US" sz="2400" b="1" dirty="0">
+                <a:solidFill>
+                  <a:srgbClr val="FFFFFF"/>
+                </a:solidFill>
+                <a:latin typeface="Arial Black"/>
+                <a:ea typeface="Arial Black"/>
+                <a:cs typeface="Arial Black"/>
+              </a:rPr>
+              <a:t>SMART INDIA HACKATHON 2026</a:t>
+            </a:r>
+          </a:p>
+        </p:txBody>
+      </p:sp>
+      <p:sp>
+        <p:nvSpPr>
+          <p:cNvPr id="40" name="panel"/>
+          <p:cNvSpPr>
+            <a:spLocks noChangeAspect="0"/>
+          </p:cNvSpPr>
+          <p:nvPr/>
+        </p:nvSpPr>
+        <p:spPr>
+          <a:xfrm>
+            <a:off x="603504" y="1965960"/>
+            <a:ext cx="7589520" cy="2286000"/>
+          </a:xfrm>
+          <a:prstGeom prst="roundRect">
+            <a:avLst/>
+          </a:prstGeom>
+          <a:solidFill>
+            <a:srgbClr val="F2F2F2"/>
+          </a:solidFill>
+          <a:ln w="19050">
+            <a:solidFill>
+              <a:srgbClr val="000000"/>
+            </a:solidFill>
           </a:ln>
         </p:spPr>
         <p:txBody>
@@ -5220,6 +4922,239 @@
           </a:bodyPr>
           <a:lstStyle/>
           <a:p>
+            <a:pPr algn="l">
+              <a:lnSpc>
+                <a:spcPct val="100000"/>
+              </a:lnSpc>
+            </a:pPr>
+            <a:r>
+              <a:rPr lang="en-US" sz="1500" b="1" dirty="0">
+                <a:solidFill>
+                  <a:srgbClr val="D92B2B"/>
+                </a:solidFill>
+                <a:latin typeface="Arial"/>
+                <a:ea typeface="Arial"/>
+                <a:cs typeface="Arial"/>
+              </a:rPr>
+              <a:t>Problem Statement ID – </a:t>
+            </a:r>
+            <a:r>
+              <a:rPr lang="en-US" sz="1500" b="1" dirty="0">
+                <a:solidFill>
+                  <a:srgbClr val="003366"/>
+                </a:solidFill>
+                <a:latin typeface="Arial"/>
+                <a:ea typeface="Arial"/>
+                <a:cs typeface="Arial"/>
+              </a:rPr>
+              <a:t>SIH26076</a:t>
+            </a:r>
+          </a:p>
+          <a:p>
+            <a:pPr algn="l">
+              <a:lnSpc>
+                <a:spcPct val="100000"/>
+              </a:lnSpc>
+            </a:pPr>
+            <a:r>
+              <a:rPr lang="en-US" sz="1500" b="1" dirty="0">
+                <a:solidFill>
+                  <a:srgbClr val="D92B2B"/>
+                </a:solidFill>
+                <a:latin typeface="Arial"/>
+                <a:ea typeface="Arial"/>
+                <a:cs typeface="Arial"/>
+              </a:rPr>
+              <a:t>Problem Statement Title – </a:t>
+            </a:r>
+            <a:r>
+              <a:rPr lang="en-US" sz="1500" b="1" dirty="0">
+                <a:solidFill>
+                  <a:srgbClr val="003366"/>
+                </a:solidFill>
+                <a:latin typeface="Arial"/>
+                <a:ea typeface="Arial"/>
+                <a:cs typeface="Arial"/>
+              </a:rPr>
+              <a:t>Personalised homepage for the Mausam mobile application</a:t>
+            </a:r>
+          </a:p>
+          <a:p>
+            <a:pPr algn="l">
+              <a:lnSpc>
+                <a:spcPct val="100000"/>
+              </a:lnSpc>
+            </a:pPr>
+            <a:r>
+              <a:rPr lang="en-US" sz="1500" b="1" dirty="0">
+                <a:solidFill>
+                  <a:srgbClr val="D92B2B"/>
+                </a:solidFill>
+                <a:latin typeface="Arial"/>
+                <a:ea typeface="Arial"/>
+                <a:cs typeface="Arial"/>
+              </a:rPr>
+              <a:t>Theme – </a:t>
+            </a:r>
+            <a:r>
+              <a:rPr lang="en-US" sz="1500" b="1" dirty="0">
+                <a:solidFill>
+                  <a:srgbClr val="003366"/>
+                </a:solidFill>
+                <a:latin typeface="Arial"/>
+                <a:ea typeface="Arial"/>
+                <a:cs typeface="Arial"/>
+              </a:rPr>
+              <a:t>Smart Automation</a:t>
+            </a:r>
+          </a:p>
+          <a:p>
+            <a:pPr algn="l">
+              <a:lnSpc>
+                <a:spcPct val="100000"/>
+              </a:lnSpc>
+            </a:pPr>
+            <a:r>
+              <a:rPr lang="en-US" sz="1500" b="1" dirty="0">
+                <a:solidFill>
+                  <a:srgbClr val="D92B2B"/>
+                </a:solidFill>
+                <a:latin typeface="Arial"/>
+                <a:ea typeface="Arial"/>
+                <a:cs typeface="Arial"/>
+              </a:rPr>
+              <a:t>PS Category – </a:t>
+            </a:r>
+            <a:r>
+              <a:rPr lang="en-US" sz="1500" b="1" dirty="0">
+                <a:solidFill>
+                  <a:srgbClr val="003366"/>
+                </a:solidFill>
+                <a:latin typeface="Arial"/>
+                <a:ea typeface="Arial"/>
+                <a:cs typeface="Arial"/>
+              </a:rPr>
+              <a:t>Software</a:t>
+            </a:r>
+          </a:p>
+          <a:p>
+            <a:pPr algn="l">
+              <a:lnSpc>
+                <a:spcPct val="100000"/>
+              </a:lnSpc>
+            </a:pPr>
+            <a:r>
+              <a:rPr lang="en-US" sz="1500" b="1" dirty="0">
+                <a:solidFill>
+                  <a:srgbClr val="D92B2B"/>
+                </a:solidFill>
+                <a:latin typeface="Arial"/>
+                <a:ea typeface="Arial"/>
+                <a:cs typeface="Arial"/>
+              </a:rPr>
+              <a:t>Team ID – </a:t>
+            </a:r>
+            <a:r>
+              <a:rPr lang="en-US" sz="1500" b="1" dirty="0">
+                <a:solidFill>
+                  <a:srgbClr val="003366"/>
+                </a:solidFill>
+                <a:latin typeface="Arial"/>
+                <a:ea typeface="Arial"/>
+                <a:cs typeface="Arial"/>
+              </a:rPr>
+              <a:t>195697</a:t>
+            </a:r>
+          </a:p>
+          <a:p>
+            <a:pPr algn="l">
+              <a:lnSpc>
+                <a:spcPct val="100000"/>
+              </a:lnSpc>
+            </a:pPr>
+            <a:r>
+              <a:rPr lang="en-US" sz="1500" b="1" dirty="0">
+                <a:solidFill>
+                  <a:srgbClr val="D92B2B"/>
+                </a:solidFill>
+                <a:latin typeface="Arial"/>
+                <a:ea typeface="Arial"/>
+                <a:cs typeface="Arial"/>
+              </a:rPr>
+              <a:t>Team Name – </a:t>
+            </a:r>
+            <a:r>
+              <a:rPr lang="en-US" sz="1500" b="1" dirty="0">
+                <a:solidFill>
+                  <a:srgbClr val="003366"/>
+                </a:solidFill>
+                <a:latin typeface="Arial"/>
+                <a:ea typeface="Arial"/>
+                <a:cs typeface="Arial"/>
+              </a:rPr>
+              <a:t>Zencoderss</a:t>
+            </a:r>
+          </a:p>
+          <a:p>
+            <a:pPr algn="l">
+              <a:lnSpc>
+                <a:spcPct val="100000"/>
+              </a:lnSpc>
+            </a:pPr>
+            <a:r>
+              <a:rPr lang="en-US" sz="1500" b="1" dirty="0">
+                <a:solidFill>
+                  <a:srgbClr val="D92B2B"/>
+                </a:solidFill>
+                <a:latin typeface="Arial"/>
+                <a:ea typeface="Arial"/>
+                <a:cs typeface="Arial"/>
+              </a:rPr>
+              <a:t>Organisation – </a:t>
+            </a:r>
+            <a:r>
+              <a:rPr lang="en-US" sz="1500" b="1" dirty="0">
+                <a:solidFill>
+                  <a:srgbClr val="003366"/>
+                </a:solidFill>
+                <a:latin typeface="Arial"/>
+                <a:ea typeface="Arial"/>
+                <a:cs typeface="Arial"/>
+              </a:rPr>
+              <a:t>Ministry of Earth Sciences (IMD)</a:t>
+            </a:r>
+          </a:p>
+        </p:txBody>
+      </p:sp>
+      <p:sp>
+        <p:nvSpPr>
+          <p:cNvPr id="41" name="accent"/>
+          <p:cNvSpPr>
+            <a:spLocks noChangeAspect="0"/>
+          </p:cNvSpPr>
+          <p:nvPr/>
+        </p:nvSpPr>
+        <p:spPr>
+          <a:xfrm>
+            <a:off x="603504" y="4462272"/>
+            <a:ext cx="7589520" cy="82296"/>
+          </a:xfrm>
+          <a:prstGeom prst="rect">
+            <a:avLst/>
+          </a:prstGeom>
+          <a:solidFill>
+            <a:srgbClr val="F79646"/>
+          </a:solidFill>
+          <a:ln>
+            <a:noFill/>
+          </a:ln>
+        </p:spPr>
+        <p:txBody>
+          <a:bodyPr anchor="t" wrap="square">
+            <a:normAutofit/>
+          </a:bodyPr>
+          <a:lstStyle/>
+          <a:p>
             <a:pPr>
               <a:lnSpc>
                 <a:spcPct val="100000"/>
@@ -5230,7 +5165,7 @@
       </p:sp>
       <p:sp>
         <p:nvSpPr>
-          <p:cNvPr id="40" name="ideatitle"/>
+          <p:cNvPr id="42" name="ideatitle"/>
           <p:cNvSpPr>
             <a:spLocks noChangeAspect="0"/>
           </p:cNvSpPr>
@@ -5238,8 +5173,8 @@
         </p:nvSpPr>
         <p:spPr>
           <a:xfrm>
-            <a:off x="612648" y="4279392"/>
-            <a:ext cx="5120640" cy="502920"/>
+            <a:off x="603504" y="4590288"/>
+            <a:ext cx="7589520" cy="548640"/>
           </a:xfrm>
           <a:prstGeom prst="rect">
             <a:avLst/>
@@ -5255,19 +5190,19 @@
           </a:bodyPr>
           <a:lstStyle/>
           <a:p>
-            <a:pPr algn="l" marL="0">
-              <a:lnSpc>
-                <a:spcPct val="100000"/>
-              </a:lnSpc>
-            </a:pPr>
-            <a:r>
-              <a:rPr lang="en-US" sz="2800" b="1" dirty="0">
+            <a:pPr algn="l">
+              <a:lnSpc>
+                <a:spcPct val="100000"/>
+              </a:lnSpc>
+            </a:pPr>
+            <a:r>
+              <a:rPr lang="en-US" sz="3000" b="1" dirty="0">
                 <a:solidFill>
                   <a:srgbClr val="003366"/>
                 </a:solidFill>
-                <a:latin typeface="Times New Roman"/>
-                <a:ea typeface="Times New Roman"/>
-                <a:cs typeface="Times New Roman"/>
+                <a:latin typeface="Arial Black"/>
+                <a:ea typeface="Arial Black"/>
+                <a:cs typeface="Arial Black"/>
               </a:rPr>
               <a:t>Mausam home: actions with proof</a:t>
             </a:r>
@@ -5276,7 +5211,7 @@
       </p:sp>
       <p:sp>
         <p:nvSpPr>
-          <p:cNvPr id="41" name="tagline"/>
+          <p:cNvPr id="43" name="tagline"/>
           <p:cNvSpPr>
             <a:spLocks noChangeAspect="0"/>
           </p:cNvSpPr>
@@ -5284,8 +5219,8 @@
         </p:nvSpPr>
         <p:spPr>
           <a:xfrm>
-            <a:off x="612648" y="4818888"/>
-            <a:ext cx="5120640" cy="548640"/>
+            <a:off x="603504" y="5175504"/>
+            <a:ext cx="7589520" cy="566928"/>
           </a:xfrm>
           <a:prstGeom prst="rect">
             <a:avLst/>
@@ -5301,13 +5236,13 @@
           </a:bodyPr>
           <a:lstStyle/>
           <a:p>
-            <a:pPr algn="l" marL="0">
-              <a:lnSpc>
-                <a:spcPct val="100000"/>
-              </a:lnSpc>
-            </a:pPr>
-            <a:r>
-              <a:rPr lang="en-US" sz="1200" dirty="0">
+            <a:pPr algn="l">
+              <a:lnSpc>
+                <a:spcPct val="100000"/>
+              </a:lnSpc>
+            </a:pPr>
+            <a:r>
+              <a:rPr lang="en-US" sz="1300" dirty="0">
                 <a:solidFill>
                   <a:srgbClr val="595959"/>
                 </a:solidFill>
@@ -5322,7 +5257,7 @@
       </p:sp>
       <p:pic>
         <p:nvPicPr>
-          <p:cNvPr id="42" name="productshot"/>
+          <p:cNvPr id="44" name="productshot"/>
           <p:cNvPicPr/>
         </p:nvPicPr>
         <p:blipFill>
@@ -5333,8 +5268,85 @@
         </p:blipFill>
         <p:spPr>
           <a:xfrm>
-            <a:off x="8503920" y="502920"/>
-            <a:ext cx="2331720" cy="5074920"/>
+            <a:off x="8595360" y="1143000"/>
+            <a:ext cx="2240280" cy="4846320"/>
+          </a:xfrm>
+          <a:prstGeom prst="roundRect">
+            <a:avLst/>
+          </a:prstGeom>
+          <a:noFill/>
+          <a:ln w="19050">
+            <a:solidFill>
+              <a:srgbClr val="000000"/>
+            </a:solidFill>
+          </a:ln>
+        </p:spPr>
+      </p:pic>
+      <p:sp>
+        <p:nvSpPr>
+          <p:cNvPr id="45" name="chip"/>
+          <p:cNvSpPr>
+            <a:spLocks noChangeAspect="0"/>
+          </p:cNvSpPr>
+          <p:nvPr/>
+        </p:nvSpPr>
+        <p:spPr>
+          <a:xfrm>
+            <a:off x="8366760" y="6035040"/>
+            <a:ext cx="2697480" cy="292608"/>
+          </a:xfrm>
+          <a:prstGeom prst="roundRect">
+            <a:avLst>
+              <a:gd name="adj" fmla="val 50000"/>
+            </a:avLst>
+          </a:prstGeom>
+          <a:solidFill>
+            <a:srgbClr val="F6E43B"/>
+          </a:solidFill>
+          <a:ln>
+            <a:noFill/>
+          </a:ln>
+        </p:spPr>
+        <p:txBody>
+          <a:bodyPr anchor="ctr" wrap="square">
+            <a:normAutofit/>
+          </a:bodyPr>
+          <a:lstStyle/>
+          <a:p>
+            <a:pPr algn="ctr">
+              <a:lnSpc>
+                <a:spcPct val="100000"/>
+              </a:lnSpc>
+            </a:pPr>
+            <a:r>
+              <a:rPr lang="en-US" sz="700" b="1" dirty="0">
+                <a:solidFill>
+                  <a:srgbClr val="000000"/>
+                </a:solidFill>
+                <a:latin typeface="Arial"/>
+                <a:ea typeface="Arial"/>
+                <a:cs typeface="Arial"/>
+              </a:rPr>
+              <a:t>WORKING PROTOTYPE · HOME (ILLUSTRATIVE)</a:t>
+            </a:r>
+          </a:p>
+        </p:txBody>
+      </p:sp>
+      <p:pic>
+        <p:nvPicPr>
+          <p:cNvPr id="46" name="demoqr"/>
+          <p:cNvPicPr/>
+        </p:nvPicPr>
+        <p:blipFill>
+          <a:blip r:embed="rId5"/>
+          <a:stretch>
+            <a:fillRect/>
+          </a:stretch>
+        </p:blipFill>
+        <p:spPr>
+          <a:xfrm>
+            <a:off x="603504" y="5797296"/>
+            <a:ext cx="530352" cy="530352"/>
           </a:xfrm>
           <a:prstGeom prst="roundRect">
             <a:avLst/>
@@ -5347,7 +5359,7 @@
       </p:pic>
       <p:sp>
         <p:nvSpPr>
-          <p:cNvPr id="43" name="shotcap"/>
+          <p:cNvPr id="47" name="demolink"/>
           <p:cNvSpPr>
             <a:spLocks noChangeAspect="0"/>
           </p:cNvSpPr>
@@ -5355,8 +5367,8 @@
         </p:nvSpPr>
         <p:spPr>
           <a:xfrm>
-            <a:off x="8275320" y="5623560"/>
-            <a:ext cx="2788920" cy="502920"/>
+            <a:off x="1261872" y="5797296"/>
+            <a:ext cx="6931152" cy="530352"/>
           </a:xfrm>
           <a:prstGeom prst="rect">
             <a:avLst/>
@@ -5372,13 +5384,42 @@
           </a:bodyPr>
           <a:lstStyle/>
           <a:p>
-            <a:pPr algn="ctr" marL="0">
-              <a:lnSpc>
-                <a:spcPct val="100000"/>
-              </a:lnSpc>
-            </a:pPr>
-            <a:r>
-              <a:rPr lang="en-US" sz="900" dirty="0">
+            <a:pPr algn="l">
+              <a:lnSpc>
+                <a:spcPct val="100000"/>
+              </a:lnSpc>
+            </a:pPr>
+            <a:r>
+              <a:rPr lang="en-US" sz="1000" b="1" dirty="0">
+                <a:solidFill>
+                  <a:srgbClr val="003366"/>
+                </a:solidFill>
+                <a:latin typeface="Arial Black"/>
+                <a:ea typeface="Arial Black"/>
+                <a:cs typeface="Arial Black"/>
+              </a:rPr>
+              <a:t>LIVE DEMO   </a:t>
+            </a:r>
+            <a:r>
+              <a:rPr lang="en-US" sz="900" b="1" u="sng" dirty="0">
+                <a:solidFill>
+                  <a:srgbClr val="1A44E8"/>
+                </a:solidFill>
+                <a:latin typeface="Arial"/>
+                <a:ea typeface="Arial"/>
+                <a:cs typeface="Arial"/>
+              </a:rPr>
+              <a:t>https://mausam-sih26076-devanshdhangar70-7520s-projects.vercel.app/</a:t>
+            </a:r>
+          </a:p>
+          <a:p>
+            <a:pPr algn="l">
+              <a:lnSpc>
+                <a:spcPct val="100000"/>
+              </a:lnSpc>
+            </a:pPr>
+            <a:r>
+              <a:rPr lang="en-US" sz="850" dirty="0">
                 <a:solidFill>
                   <a:srgbClr val="595959"/>
                 </a:solidFill>
@@ -5386,7 +5427,7 @@
                 <a:ea typeface="Arial"/>
                 <a:cs typeface="Arial"/>
               </a:rPr>
-              <a:t>Working prototype home (illustrative screenshot). Map + action cards with IMD provenance on every number.</a:t>
+              <a:t>Guest-first PWA · works offline · English and Hindi</a:t>
             </a:r>
           </a:p>
         </p:txBody>
@@ -5486,38 +5527,19 @@
         </p:nvSpPr>
         <p:spPr>
           <a:xfrm>
-            <a:off x="182998" y="0"/>
-            <a:ext cx="10972800" cy="1143000"/>
+            <a:off x="11841480" y="6035040"/>
+            <a:ext cx="100" cy="100"/>
           </a:xfrm>
         </p:spPr>
         <p:txBody>
           <a:bodyPr/>
           <a:lstStyle/>
           <a:p>
-            <a:pPr eaLnBrk="1" hangingPunct="1"/>
-            <a:r>
-              <a:rPr lang="en-US" sz="3600" b="1" dirty="0">
-                <a:latin typeface="Times New Roman" panose="02020603050405020304" pitchFamily="18" charset="0"/>
-                <a:ea typeface="ＭＳ Ｐゴシック" pitchFamily="1" charset="-128"/>
-                <a:cs typeface="Times New Roman" panose="02020603050405020304" pitchFamily="18" charset="0"/>
-              </a:rPr>
-              <a:t/>
-            </a:r>
-            <a:br>
-              <a:rPr lang="en-US" sz="3600" b="1" dirty="0">
-                <a:latin typeface="Times New Roman" panose="02020603050405020304" pitchFamily="18" charset="0"/>
-                <a:ea typeface="ＭＳ Ｐゴシック" pitchFamily="1" charset="-128"/>
-                <a:cs typeface="Times New Roman" panose="02020603050405020304" pitchFamily="18" charset="0"/>
-              </a:rPr>
-            </a:br>
-            <a:r>
-              <a:rPr lang="en-US" sz="3600" b="1" dirty="0">
-                <a:latin typeface="Times New Roman" panose="02020603050405020304" pitchFamily="18" charset="0"/>
-                <a:ea typeface="ＭＳ Ｐゴシック" pitchFamily="1" charset="-128"/>
-                <a:cs typeface="Times New Roman" panose="02020603050405020304" pitchFamily="18" charset="0"/>
-              </a:rPr>
-              <a:t>IDEA TITLE</a:t>
-            </a:r>
+            <a:pPr>
+              <a:lnSpc>
+                <a:spcPct val="100000"/>
+              </a:lnSpc>
+            </a:pPr>
           </a:p>
         </p:txBody>
       </p:sp>
@@ -5648,7 +5670,7 @@
         <p:spPr>
           <a:xfrm>
             <a:off x="329773" y="252246"/>
-            <a:ext cx="1251857" cy="807334"/>
+            <a:ext cx="1783080" cy="804672"/>
           </a:xfrm>
           <a:prstGeom prst="ellipse">
             <a:avLst/>
@@ -5674,7 +5696,11 @@
           <a:p>
             <a:pPr algn="ctr"/>
             <a:r>
-              <a:rPr lang="en-US" dirty="0"/>
+              <a:rPr lang="en-US" sz="1100" dirty="0">
+                <a:solidFill>
+                  <a:srgbClr val="003366"/>
+                </a:solidFill>
+              </a:rPr>
               <a:t>Zencoderss</a:t>
             </a:r>
             <a:endParaRPr lang="en-IN" dirty="0"/>
@@ -5713,7 +5739,7 @@
       </p:pic>
       <p:sp>
         <p:nvSpPr>
-          <p:cNvPr id="15364" name="ideatitle"/>
+          <p:cNvPr id="15364" name="heading_pill"/>
           <p:cNvSpPr>
             <a:spLocks noChangeAspect="0"/>
           </p:cNvSpPr>
@@ -5721,8 +5747,58 @@
         </p:nvSpPr>
         <p:spPr>
           <a:xfrm>
-            <a:off x="612648" y="1207008"/>
-            <a:ext cx="8778240" cy="310896"/>
+            <a:off x="4495648" y="164592"/>
+            <a:ext cx="3200400" cy="676656"/>
+          </a:xfrm>
+          <a:prstGeom prst="roundRect">
+            <a:avLst>
+              <a:gd name="adj" fmla="val 50000"/>
+            </a:avLst>
+          </a:prstGeom>
+          <a:solidFill>
+            <a:srgbClr val="2E9E4F"/>
+          </a:solidFill>
+          <a:ln>
+            <a:noFill/>
+          </a:ln>
+        </p:spPr>
+        <p:txBody>
+          <a:bodyPr anchor="ctr" wrap="square">
+            <a:normAutofit/>
+          </a:bodyPr>
+          <a:lstStyle/>
+          <a:p>
+            <a:pPr algn="ctr">
+              <a:lnSpc>
+                <a:spcPct val="100000"/>
+              </a:lnSpc>
+            </a:pPr>
+            <a:r>
+              <a:rPr lang="en-US" sz="2400" b="1" dirty="0">
+                <a:solidFill>
+                  <a:srgbClr val="FFFFFF"/>
+                </a:solidFill>
+                <a:latin typeface="Arial Black"/>
+                <a:ea typeface="Arial Black"/>
+                <a:cs typeface="Arial Black"/>
+              </a:rPr>
+              <a:t>IDEA TITLE</a:t>
+            </a:r>
+          </a:p>
+        </p:txBody>
+      </p:sp>
+      <p:sp>
+        <p:nvSpPr>
+          <p:cNvPr id="15365" name="ideatitle"/>
+          <p:cNvSpPr>
+            <a:spLocks noChangeAspect="0"/>
+          </p:cNvSpPr>
+          <p:nvPr/>
+        </p:nvSpPr>
+        <p:spPr>
+          <a:xfrm>
+            <a:off x="612648" y="914400"/>
+            <a:ext cx="10972800" cy="310896"/>
           </a:xfrm>
           <a:prstGeom prst="rect">
             <a:avLst/>
@@ -5738,19 +5814,19 @@
           </a:bodyPr>
           <a:lstStyle/>
           <a:p>
-            <a:pPr algn="l" marL="0">
-              <a:lnSpc>
-                <a:spcPct val="100000"/>
-              </a:lnSpc>
-            </a:pPr>
-            <a:r>
-              <a:rPr lang="en-US" sz="2200" b="1" dirty="0">
+            <a:pPr algn="ctr">
+              <a:lnSpc>
+                <a:spcPct val="100000"/>
+              </a:lnSpc>
+            </a:pPr>
+            <a:r>
+              <a:rPr lang="en-US" sz="1600" b="1" dirty="0">
                 <a:solidFill>
                   <a:srgbClr val="003366"/>
                 </a:solidFill>
-                <a:latin typeface="Times New Roman"/>
-                <a:ea typeface="Times New Roman"/>
-                <a:cs typeface="Times New Roman"/>
+                <a:latin typeface="Arial Black"/>
+                <a:ea typeface="Arial Black"/>
+                <a:cs typeface="Arial Black"/>
               </a:rPr>
               <a:t>Mausam home: actions with proof</a:t>
             </a:r>
@@ -5759,7 +5835,7 @@
       </p:sp>
       <p:sp>
         <p:nvSpPr>
-          <p:cNvPr id="15365" name="ptr"/>
+          <p:cNvPr id="15366" name="chip"/>
           <p:cNvSpPr>
             <a:spLocks noChangeAspect="0"/>
           </p:cNvSpPr>
@@ -5767,15 +5843,69 @@
         </p:nvSpPr>
         <p:spPr>
           <a:xfrm>
-            <a:off x="612648" y="1572768"/>
-            <a:ext cx="3520440" cy="237744"/>
-          </a:xfrm>
-          <a:prstGeom prst="rect">
-            <a:avLst/>
-          </a:prstGeom>
-          <a:noFill/>
+            <a:off x="612648" y="1417320"/>
+            <a:ext cx="3627310" cy="256032"/>
+          </a:xfrm>
+          <a:prstGeom prst="roundRect">
+            <a:avLst>
+              <a:gd name="adj" fmla="val 50000"/>
+            </a:avLst>
+          </a:prstGeom>
+          <a:solidFill>
+            <a:srgbClr val="003366"/>
+          </a:solidFill>
           <a:ln>
             <a:noFill/>
+          </a:ln>
+        </p:spPr>
+        <p:txBody>
+          <a:bodyPr anchor="ctr" wrap="square">
+            <a:normAutofit/>
+          </a:bodyPr>
+          <a:lstStyle/>
+          <a:p>
+            <a:pPr algn="ctr">
+              <a:lnSpc>
+                <a:spcPct val="100000"/>
+              </a:lnSpc>
+            </a:pPr>
+            <a:r>
+              <a:rPr lang="en-US" sz="750" b="1" dirty="0">
+                <a:solidFill>
+                  <a:srgbClr val="FFFFFF"/>
+                </a:solidFill>
+                <a:latin typeface="Arial"/>
+                <a:ea typeface="Arial"/>
+                <a:cs typeface="Arial"/>
+              </a:rPr>
+              <a:t>Proposed Solution (Describe your Idea/Solution/Prototype)</a:t>
+            </a:r>
+          </a:p>
+        </p:txBody>
+      </p:sp>
+      <p:sp>
+        <p:nvSpPr>
+          <p:cNvPr id="15367" name="panel"/>
+          <p:cNvSpPr>
+            <a:spLocks noChangeAspect="0"/>
+          </p:cNvSpPr>
+          <p:nvPr/>
+        </p:nvSpPr>
+        <p:spPr>
+          <a:xfrm>
+            <a:off x="612648" y="1691640"/>
+            <a:ext cx="3886200" cy="621792"/>
+          </a:xfrm>
+          <a:prstGeom prst="roundRect">
+            <a:avLst/>
+          </a:prstGeom>
+          <a:solidFill>
+            <a:srgbClr val="D9EAFB"/>
+          </a:solidFill>
+          <a:ln w="19050">
+            <a:solidFill>
+              <a:srgbClr val="000000"/>
+            </a:solidFill>
           </a:ln>
         </p:spPr>
         <p:txBody>
@@ -5784,28 +5914,28 @@
           </a:bodyPr>
           <a:lstStyle/>
           <a:p>
-            <a:pPr algn="l" marL="0">
-              <a:lnSpc>
-                <a:spcPct val="100000"/>
-              </a:lnSpc>
-            </a:pPr>
-            <a:r>
-              <a:rPr lang="en-US" sz="900" b="1" dirty="0">
-                <a:solidFill>
-                  <a:srgbClr val="003366"/>
-                </a:solidFill>
-                <a:latin typeface="Arial"/>
-                <a:ea typeface="Arial"/>
-                <a:cs typeface="Arial"/>
-              </a:rPr>
-              <a:t>PROPOSED SOLUTION (DESCRIBE YOUR IDEA/SOLUTION/PROTOTYPE)</a:t>
-            </a:r>
-          </a:p>
-        </p:txBody>
-      </p:sp>
-      <p:sp>
-        <p:nvSpPr>
-          <p:cNvPr id="15366" name="fill"/>
+            <a:pPr algn="l">
+              <a:lnSpc>
+                <a:spcPct val="100000"/>
+              </a:lnSpc>
+            </a:pPr>
+            <a:r>
+              <a:rPr lang="en-US" sz="950" dirty="0">
+                <a:solidFill>
+                  <a:srgbClr val="1A1A1A"/>
+                </a:solidFill>
+                <a:latin typeface="Arial"/>
+                <a:ea typeface="Arial"/>
+                <a:cs typeface="Arial"/>
+              </a:rPr>
+              <a:t>A home screen that adapts to you: map on top, action cards below.</a:t>
+            </a:r>
+          </a:p>
+        </p:txBody>
+      </p:sp>
+      <p:sp>
+        <p:nvSpPr>
+          <p:cNvPr id="15368" name="chip"/>
           <p:cNvSpPr>
             <a:spLocks noChangeAspect="0"/>
           </p:cNvSpPr>
@@ -5813,15 +5943,69 @@
         </p:nvSpPr>
         <p:spPr>
           <a:xfrm>
-            <a:off x="612648" y="1810512"/>
-            <a:ext cx="3520440" cy="475488"/>
-          </a:xfrm>
-          <a:prstGeom prst="rect">
-            <a:avLst/>
-          </a:prstGeom>
-          <a:noFill/>
+            <a:off x="612648" y="2441448"/>
+            <a:ext cx="2948368" cy="256032"/>
+          </a:xfrm>
+          <a:prstGeom prst="roundRect">
+            <a:avLst>
+              <a:gd name="adj" fmla="val 50000"/>
+            </a:avLst>
+          </a:prstGeom>
+          <a:solidFill>
+            <a:srgbClr val="003366"/>
+          </a:solidFill>
           <a:ln>
             <a:noFill/>
+          </a:ln>
+        </p:spPr>
+        <p:txBody>
+          <a:bodyPr anchor="ctr" wrap="square">
+            <a:normAutofit/>
+          </a:bodyPr>
+          <a:lstStyle/>
+          <a:p>
+            <a:pPr algn="ctr">
+              <a:lnSpc>
+                <a:spcPct val="100000"/>
+              </a:lnSpc>
+            </a:pPr>
+            <a:r>
+              <a:rPr lang="en-US" sz="750" b="1" dirty="0">
+                <a:solidFill>
+                  <a:srgbClr val="FFFFFF"/>
+                </a:solidFill>
+                <a:latin typeface="Arial"/>
+                <a:ea typeface="Arial"/>
+                <a:cs typeface="Arial"/>
+              </a:rPr>
+              <a:t>Detailed explanation of the proposed solution</a:t>
+            </a:r>
+          </a:p>
+        </p:txBody>
+      </p:sp>
+      <p:sp>
+        <p:nvSpPr>
+          <p:cNvPr id="15369" name="panel"/>
+          <p:cNvSpPr>
+            <a:spLocks noChangeAspect="0"/>
+          </p:cNvSpPr>
+          <p:nvPr/>
+        </p:nvSpPr>
+        <p:spPr>
+          <a:xfrm>
+            <a:off x="612648" y="2715768"/>
+            <a:ext cx="3886200" cy="621792"/>
+          </a:xfrm>
+          <a:prstGeom prst="roundRect">
+            <a:avLst/>
+          </a:prstGeom>
+          <a:solidFill>
+            <a:srgbClr val="D9EAFB"/>
+          </a:solidFill>
+          <a:ln w="19050">
+            <a:solidFill>
+              <a:srgbClr val="000000"/>
+            </a:solidFill>
           </a:ln>
         </p:spPr>
         <p:txBody>
@@ -5830,13 +6014,13 @@
           </a:bodyPr>
           <a:lstStyle/>
           <a:p>
-            <a:pPr algn="l" marL="0">
-              <a:lnSpc>
-                <a:spcPct val="100000"/>
-              </a:lnSpc>
-            </a:pPr>
-            <a:r>
-              <a:rPr lang="en-US" sz="1100" dirty="0">
+            <a:pPr algn="l">
+              <a:lnSpc>
+                <a:spcPct val="100000"/>
+              </a:lnSpc>
+            </a:pPr>
+            <a:r>
+              <a:rPr lang="en-US" sz="950" dirty="0">
                 <a:solidFill>
                   <a:srgbClr val="1A1A1A"/>
                 </a:solidFill>
@@ -5844,14 +6028,14 @@
                 <a:ea typeface="Arial"/>
                 <a:cs typeface="Arial"/>
               </a:rPr>
-              <a:t>A home screen that adapts to you: map on top, action cards below.</a:t>
-            </a:r>
-          </a:p>
-        </p:txBody>
-      </p:sp>
-      <p:sp>
-        <p:nvSpPr>
-          <p:cNvPr id="15367" name="ptr"/>
+              <a:t>Onboarding picks your persona. The home reorders: the farmer sees sowing first, the commuter sees fog first.</a:t>
+            </a:r>
+          </a:p>
+        </p:txBody>
+      </p:sp>
+      <p:sp>
+        <p:nvSpPr>
+          <p:cNvPr id="15370" name="chip"/>
           <p:cNvSpPr>
             <a:spLocks noChangeAspect="0"/>
           </p:cNvSpPr>
@@ -5859,15 +6043,69 @@
         </p:nvSpPr>
         <p:spPr>
           <a:xfrm>
-            <a:off x="612648" y="2377440"/>
-            <a:ext cx="3520440" cy="237744"/>
-          </a:xfrm>
-          <a:prstGeom prst="rect">
-            <a:avLst/>
-          </a:prstGeom>
-          <a:noFill/>
+            <a:off x="612648" y="3465576"/>
+            <a:ext cx="1986534" cy="256032"/>
+          </a:xfrm>
+          <a:prstGeom prst="roundRect">
+            <a:avLst>
+              <a:gd name="adj" fmla="val 50000"/>
+            </a:avLst>
+          </a:prstGeom>
+          <a:solidFill>
+            <a:srgbClr val="003366"/>
+          </a:solidFill>
           <a:ln>
             <a:noFill/>
+          </a:ln>
+        </p:spPr>
+        <p:txBody>
+          <a:bodyPr anchor="ctr" wrap="square">
+            <a:normAutofit/>
+          </a:bodyPr>
+          <a:lstStyle/>
+          <a:p>
+            <a:pPr algn="ctr">
+              <a:lnSpc>
+                <a:spcPct val="100000"/>
+              </a:lnSpc>
+            </a:pPr>
+            <a:r>
+              <a:rPr lang="en-US" sz="750" b="1" dirty="0">
+                <a:solidFill>
+                  <a:srgbClr val="FFFFFF"/>
+                </a:solidFill>
+                <a:latin typeface="Arial"/>
+                <a:ea typeface="Arial"/>
+                <a:cs typeface="Arial"/>
+              </a:rPr>
+              <a:t>How it addresses the problem</a:t>
+            </a:r>
+          </a:p>
+        </p:txBody>
+      </p:sp>
+      <p:sp>
+        <p:nvSpPr>
+          <p:cNvPr id="15371" name="panel"/>
+          <p:cNvSpPr>
+            <a:spLocks noChangeAspect="0"/>
+          </p:cNvSpPr>
+          <p:nvPr/>
+        </p:nvSpPr>
+        <p:spPr>
+          <a:xfrm>
+            <a:off x="612648" y="3739896"/>
+            <a:ext cx="3886200" cy="621792"/>
+          </a:xfrm>
+          <a:prstGeom prst="roundRect">
+            <a:avLst/>
+          </a:prstGeom>
+          <a:solidFill>
+            <a:srgbClr val="D9EAFB"/>
+          </a:solidFill>
+          <a:ln w="19050">
+            <a:solidFill>
+              <a:srgbClr val="000000"/>
+            </a:solidFill>
           </a:ln>
         </p:spPr>
         <p:txBody>
@@ -5876,28 +6114,28 @@
           </a:bodyPr>
           <a:lstStyle/>
           <a:p>
-            <a:pPr algn="l" marL="0">
-              <a:lnSpc>
-                <a:spcPct val="100000"/>
-              </a:lnSpc>
-            </a:pPr>
-            <a:r>
-              <a:rPr lang="en-US" sz="900" b="1" dirty="0">
-                <a:solidFill>
-                  <a:srgbClr val="003366"/>
-                </a:solidFill>
-                <a:latin typeface="Arial"/>
-                <a:ea typeface="Arial"/>
-                <a:cs typeface="Arial"/>
-              </a:rPr>
-              <a:t>DETAILED EXPLANATION OF THE PROPOSED SOLUTION</a:t>
-            </a:r>
-          </a:p>
-        </p:txBody>
-      </p:sp>
-      <p:sp>
-        <p:nvSpPr>
-          <p:cNvPr id="15368" name="fill"/>
+            <a:pPr algn="l">
+              <a:lnSpc>
+                <a:spcPct val="100000"/>
+              </a:lnSpc>
+            </a:pPr>
+            <a:r>
+              <a:rPr lang="en-US" sz="950" dirty="0">
+                <a:solidFill>
+                  <a:srgbClr val="1A1A1A"/>
+                </a:solidFill>
+                <a:latin typeface="Arial"/>
+                <a:ea typeface="Arial"/>
+                <a:cs typeface="Arial"/>
+              </a:rPr>
+              <a:t>Every card says what to do, shows the readings behind it, and names its source, station and age.</a:t>
+            </a:r>
+          </a:p>
+        </p:txBody>
+      </p:sp>
+      <p:sp>
+        <p:nvSpPr>
+          <p:cNvPr id="15372" name="chip"/>
           <p:cNvSpPr>
             <a:spLocks noChangeAspect="0"/>
           </p:cNvSpPr>
@@ -5905,15 +6143,69 @@
         </p:nvSpPr>
         <p:spPr>
           <a:xfrm>
-            <a:off x="612648" y="2615184"/>
-            <a:ext cx="3520440" cy="475488"/>
-          </a:xfrm>
-          <a:prstGeom prst="rect">
-            <a:avLst/>
-          </a:prstGeom>
-          <a:noFill/>
+            <a:off x="612648" y="4489704"/>
+            <a:ext cx="2722054" cy="256032"/>
+          </a:xfrm>
+          <a:prstGeom prst="roundRect">
+            <a:avLst>
+              <a:gd name="adj" fmla="val 50000"/>
+            </a:avLst>
+          </a:prstGeom>
+          <a:solidFill>
+            <a:srgbClr val="003366"/>
+          </a:solidFill>
           <a:ln>
             <a:noFill/>
+          </a:ln>
+        </p:spPr>
+        <p:txBody>
+          <a:bodyPr anchor="ctr" wrap="square">
+            <a:normAutofit/>
+          </a:bodyPr>
+          <a:lstStyle/>
+          <a:p>
+            <a:pPr algn="ctr">
+              <a:lnSpc>
+                <a:spcPct val="100000"/>
+              </a:lnSpc>
+            </a:pPr>
+            <a:r>
+              <a:rPr lang="en-US" sz="750" b="1" dirty="0">
+                <a:solidFill>
+                  <a:srgbClr val="FFFFFF"/>
+                </a:solidFill>
+                <a:latin typeface="Arial"/>
+                <a:ea typeface="Arial"/>
+                <a:cs typeface="Arial"/>
+              </a:rPr>
+              <a:t>Innovation and uniqueness of the solution</a:t>
+            </a:r>
+          </a:p>
+        </p:txBody>
+      </p:sp>
+      <p:sp>
+        <p:nvSpPr>
+          <p:cNvPr id="15373" name="panel"/>
+          <p:cNvSpPr>
+            <a:spLocks noChangeAspect="0"/>
+          </p:cNvSpPr>
+          <p:nvPr/>
+        </p:nvSpPr>
+        <p:spPr>
+          <a:xfrm>
+            <a:off x="612648" y="4764024"/>
+            <a:ext cx="3886200" cy="621792"/>
+          </a:xfrm>
+          <a:prstGeom prst="roundRect">
+            <a:avLst/>
+          </a:prstGeom>
+          <a:solidFill>
+            <a:srgbClr val="D9EAFB"/>
+          </a:solidFill>
+          <a:ln w="19050">
+            <a:solidFill>
+              <a:srgbClr val="000000"/>
+            </a:solidFill>
           </a:ln>
         </p:spPr>
         <p:txBody>
@@ -5922,197 +6214,13 @@
           </a:bodyPr>
           <a:lstStyle/>
           <a:p>
-            <a:pPr algn="l" marL="0">
-              <a:lnSpc>
-                <a:spcPct val="100000"/>
-              </a:lnSpc>
-            </a:pPr>
-            <a:r>
-              <a:rPr lang="en-US" sz="1100" dirty="0">
-                <a:solidFill>
-                  <a:srgbClr val="1A1A1A"/>
-                </a:solidFill>
-                <a:latin typeface="Arial"/>
-                <a:ea typeface="Arial"/>
-                <a:cs typeface="Arial"/>
-              </a:rPr>
-              <a:t>Onboarding picks your persona. The home reorders: the farmer sees sowing first, the commuter sees fog first.</a:t>
-            </a:r>
-          </a:p>
-        </p:txBody>
-      </p:sp>
-      <p:sp>
-        <p:nvSpPr>
-          <p:cNvPr id="15369" name="ptr"/>
-          <p:cNvSpPr>
-            <a:spLocks noChangeAspect="0"/>
-          </p:cNvSpPr>
-          <p:nvPr/>
-        </p:nvSpPr>
-        <p:spPr>
-          <a:xfrm>
-            <a:off x="612648" y="3182112"/>
-            <a:ext cx="3520440" cy="237744"/>
-          </a:xfrm>
-          <a:prstGeom prst="rect">
-            <a:avLst/>
-          </a:prstGeom>
-          <a:noFill/>
-          <a:ln>
-            <a:noFill/>
-          </a:ln>
-        </p:spPr>
-        <p:txBody>
-          <a:bodyPr anchor="t" wrap="square">
-            <a:normAutofit/>
-          </a:bodyPr>
-          <a:lstStyle/>
-          <a:p>
-            <a:pPr algn="l" marL="0">
-              <a:lnSpc>
-                <a:spcPct val="100000"/>
-              </a:lnSpc>
-            </a:pPr>
-            <a:r>
-              <a:rPr lang="en-US" sz="900" b="1" dirty="0">
-                <a:solidFill>
-                  <a:srgbClr val="003366"/>
-                </a:solidFill>
-                <a:latin typeface="Arial"/>
-                <a:ea typeface="Arial"/>
-                <a:cs typeface="Arial"/>
-              </a:rPr>
-              <a:t>HOW IT ADDRESSES THE PROBLEM</a:t>
-            </a:r>
-          </a:p>
-        </p:txBody>
-      </p:sp>
-      <p:sp>
-        <p:nvSpPr>
-          <p:cNvPr id="15370" name="fill"/>
-          <p:cNvSpPr>
-            <a:spLocks noChangeAspect="0"/>
-          </p:cNvSpPr>
-          <p:nvPr/>
-        </p:nvSpPr>
-        <p:spPr>
-          <a:xfrm>
-            <a:off x="612648" y="3419856"/>
-            <a:ext cx="3520440" cy="475488"/>
-          </a:xfrm>
-          <a:prstGeom prst="rect">
-            <a:avLst/>
-          </a:prstGeom>
-          <a:noFill/>
-          <a:ln>
-            <a:noFill/>
-          </a:ln>
-        </p:spPr>
-        <p:txBody>
-          <a:bodyPr anchor="t" wrap="square">
-            <a:normAutofit/>
-          </a:bodyPr>
-          <a:lstStyle/>
-          <a:p>
-            <a:pPr algn="l" marL="0">
-              <a:lnSpc>
-                <a:spcPct val="100000"/>
-              </a:lnSpc>
-            </a:pPr>
-            <a:r>
-              <a:rPr lang="en-US" sz="1100" dirty="0">
-                <a:solidFill>
-                  <a:srgbClr val="1A1A1A"/>
-                </a:solidFill>
-                <a:latin typeface="Arial"/>
-                <a:ea typeface="Arial"/>
-                <a:cs typeface="Arial"/>
-              </a:rPr>
-              <a:t>Every card says what to do, shows the readings behind it, and names its source, station and age.</a:t>
-            </a:r>
-          </a:p>
-        </p:txBody>
-      </p:sp>
-      <p:sp>
-        <p:nvSpPr>
-          <p:cNvPr id="15371" name="ptr"/>
-          <p:cNvSpPr>
-            <a:spLocks noChangeAspect="0"/>
-          </p:cNvSpPr>
-          <p:nvPr/>
-        </p:nvSpPr>
-        <p:spPr>
-          <a:xfrm>
-            <a:off x="612648" y="3986784"/>
-            <a:ext cx="3520440" cy="237744"/>
-          </a:xfrm>
-          <a:prstGeom prst="rect">
-            <a:avLst/>
-          </a:prstGeom>
-          <a:noFill/>
-          <a:ln>
-            <a:noFill/>
-          </a:ln>
-        </p:spPr>
-        <p:txBody>
-          <a:bodyPr anchor="t" wrap="square">
-            <a:normAutofit/>
-          </a:bodyPr>
-          <a:lstStyle/>
-          <a:p>
-            <a:pPr algn="l" marL="0">
-              <a:lnSpc>
-                <a:spcPct val="100000"/>
-              </a:lnSpc>
-            </a:pPr>
-            <a:r>
-              <a:rPr lang="en-US" sz="900" b="1" dirty="0">
-                <a:solidFill>
-                  <a:srgbClr val="003366"/>
-                </a:solidFill>
-                <a:latin typeface="Arial"/>
-                <a:ea typeface="Arial"/>
-                <a:cs typeface="Arial"/>
-              </a:rPr>
-              <a:t>INNOVATION AND UNIQUENESS OF THE SOLUTION</a:t>
-            </a:r>
-          </a:p>
-        </p:txBody>
-      </p:sp>
-      <p:sp>
-        <p:nvSpPr>
-          <p:cNvPr id="15372" name="fill"/>
-          <p:cNvSpPr>
-            <a:spLocks noChangeAspect="0"/>
-          </p:cNvSpPr>
-          <p:nvPr/>
-        </p:nvSpPr>
-        <p:spPr>
-          <a:xfrm>
-            <a:off x="612648" y="4224528"/>
-            <a:ext cx="3520440" cy="475488"/>
-          </a:xfrm>
-          <a:prstGeom prst="rect">
-            <a:avLst/>
-          </a:prstGeom>
-          <a:noFill/>
-          <a:ln>
-            <a:noFill/>
-          </a:ln>
-        </p:spPr>
-        <p:txBody>
-          <a:bodyPr anchor="t" wrap="square">
-            <a:normAutofit/>
-          </a:bodyPr>
-          <a:lstStyle/>
-          <a:p>
-            <a:pPr algn="l" marL="0">
-              <a:lnSpc>
-                <a:spcPct val="100000"/>
-              </a:lnSpc>
-            </a:pPr>
-            <a:r>
-              <a:rPr lang="en-US" sz="1100" dirty="0">
+            <a:pPr algn="l">
+              <a:lnSpc>
+                <a:spcPct val="100000"/>
+              </a:lnSpc>
+            </a:pPr>
+            <a:r>
+              <a:rPr lang="en-US" sz="950" dirty="0">
                 <a:solidFill>
                   <a:srgbClr val="1A1A1A"/>
                 </a:solidFill>
@@ -6127,7 +6235,7 @@
       </p:sp>
       <p:pic>
         <p:nvPicPr>
-          <p:cNvPr id="15373" name="shot-home"/>
+          <p:cNvPr id="15374" name="shot-home"/>
           <p:cNvPicPr/>
         </p:nvPicPr>
         <p:blipFill>
@@ -6138,21 +6246,23 @@
         </p:blipFill>
         <p:spPr>
           <a:xfrm>
-            <a:off x="4343400" y="1572768"/>
-            <a:ext cx="1691640" cy="3520440"/>
+            <a:off x="4709160" y="1417320"/>
+            <a:ext cx="1554480" cy="3364992"/>
           </a:xfrm>
           <a:prstGeom prst="roundRect">
             <a:avLst/>
           </a:prstGeom>
           <a:noFill/>
-          <a:ln>
-            <a:noFill/>
+          <a:ln w="19050">
+            <a:solidFill>
+              <a:srgbClr val="000000"/>
+            </a:solidFill>
           </a:ln>
         </p:spPr>
       </p:pic>
       <p:pic>
         <p:nvPicPr>
-          <p:cNvPr id="15374" name="shot-prov"/>
+          <p:cNvPr id="15375" name="shot-prov"/>
           <p:cNvPicPr/>
         </p:nvPicPr>
         <p:blipFill>
@@ -6163,21 +6273,73 @@
         </p:blipFill>
         <p:spPr>
           <a:xfrm>
-            <a:off x="6217920" y="1572768"/>
-            <a:ext cx="1691640" cy="3520440"/>
+            <a:off x="6446520" y="1417320"/>
+            <a:ext cx="1554480" cy="3364992"/>
           </a:xfrm>
           <a:prstGeom prst="roundRect">
             <a:avLst/>
           </a:prstGeom>
           <a:noFill/>
+          <a:ln w="19050">
+            <a:solidFill>
+              <a:srgbClr val="000000"/>
+            </a:solidFill>
+          </a:ln>
+        </p:spPr>
+      </p:pic>
+      <p:sp>
+        <p:nvSpPr>
+          <p:cNvPr id="15376" name="chip"/>
+          <p:cNvSpPr>
+            <a:spLocks noChangeAspect="0"/>
+          </p:cNvSpPr>
+          <p:nvPr/>
+        </p:nvSpPr>
+        <p:spPr>
+          <a:xfrm>
+            <a:off x="4709160" y="4846320"/>
+            <a:ext cx="1554480" cy="292608"/>
+          </a:xfrm>
+          <a:prstGeom prst="roundRect">
+            <a:avLst>
+              <a:gd name="adj" fmla="val 50000"/>
+            </a:avLst>
+          </a:prstGeom>
+          <a:solidFill>
+            <a:srgbClr val="F6E43B"/>
+          </a:solidFill>
           <a:ln>
             <a:noFill/>
           </a:ln>
         </p:spPr>
-      </p:pic>
-      <p:sp>
-        <p:nvSpPr>
-          <p:cNvPr id="15375" name="shotcap"/>
+        <p:txBody>
+          <a:bodyPr anchor="ctr" wrap="square">
+            <a:normAutofit/>
+          </a:bodyPr>
+          <a:lstStyle/>
+          <a:p>
+            <a:pPr algn="ctr">
+              <a:lnSpc>
+                <a:spcPct val="100000"/>
+              </a:lnSpc>
+            </a:pPr>
+            <a:r>
+              <a:rPr lang="en-US" sz="700" b="1" dirty="0">
+                <a:solidFill>
+                  <a:srgbClr val="000000"/>
+                </a:solidFill>
+                <a:latin typeface="Arial"/>
+                <a:ea typeface="Arial"/>
+                <a:cs typeface="Arial"/>
+              </a:rPr>
+              <a:t>HOME · MAP + ACTIONS</a:t>
+            </a:r>
+          </a:p>
+        </p:txBody>
+      </p:sp>
+      <p:sp>
+        <p:nvSpPr>
+          <p:cNvPr id="15377" name="chip"/>
           <p:cNvSpPr>
             <a:spLocks noChangeAspect="0"/>
           </p:cNvSpPr>
@@ -6185,15 +6347,69 @@
         </p:nvSpPr>
         <p:spPr>
           <a:xfrm>
-            <a:off x="4297680" y="5120640"/>
-            <a:ext cx="3657600" cy="310896"/>
-          </a:xfrm>
-          <a:prstGeom prst="rect">
-            <a:avLst/>
-          </a:prstGeom>
-          <a:noFill/>
+            <a:off x="6446520" y="4846320"/>
+            <a:ext cx="1554480" cy="292608"/>
+          </a:xfrm>
+          <a:prstGeom prst="roundRect">
+            <a:avLst>
+              <a:gd name="adj" fmla="val 50000"/>
+            </a:avLst>
+          </a:prstGeom>
+          <a:solidFill>
+            <a:srgbClr val="F6E43B"/>
+          </a:solidFill>
           <a:ln>
             <a:noFill/>
+          </a:ln>
+        </p:spPr>
+        <p:txBody>
+          <a:bodyPr anchor="ctr" wrap="square">
+            <a:normAutofit/>
+          </a:bodyPr>
+          <a:lstStyle/>
+          <a:p>
+            <a:pPr algn="ctr">
+              <a:lnSpc>
+                <a:spcPct val="100000"/>
+              </a:lnSpc>
+            </a:pPr>
+            <a:r>
+              <a:rPr lang="en-US" sz="700" b="1" dirty="0">
+                <a:solidFill>
+                  <a:srgbClr val="000000"/>
+                </a:solidFill>
+                <a:latin typeface="Arial"/>
+                <a:ea typeface="Arial"/>
+                <a:cs typeface="Arial"/>
+              </a:rPr>
+              <a:t>TAP ⓘ → PROVENANCE</a:t>
+            </a:r>
+          </a:p>
+        </p:txBody>
+      </p:sp>
+      <p:sp>
+        <p:nvSpPr>
+          <p:cNvPr id="15378" name="panel"/>
+          <p:cNvSpPr>
+            <a:spLocks noChangeAspect="0"/>
+          </p:cNvSpPr>
+          <p:nvPr/>
+        </p:nvSpPr>
+        <p:spPr>
+          <a:xfrm>
+            <a:off x="8229600" y="1417320"/>
+            <a:ext cx="3337560" cy="1188720"/>
+          </a:xfrm>
+          <a:prstGeom prst="roundRect">
+            <a:avLst/>
+          </a:prstGeom>
+          <a:solidFill>
+            <a:srgbClr val="003366"/>
+          </a:solidFill>
+          <a:ln w="19050">
+            <a:solidFill>
+              <a:srgbClr val="003366"/>
+            </a:solidFill>
           </a:ln>
         </p:spPr>
         <p:txBody>
@@ -6202,28 +6418,46 @@
           </a:bodyPr>
           <a:lstStyle/>
           <a:p>
-            <a:pPr algn="ctr" marL="0">
-              <a:lnSpc>
-                <a:spcPct val="100000"/>
-              </a:lnSpc>
-            </a:pPr>
-            <a:r>
-              <a:rPr lang="en-US" sz="1000" b="1" dirty="0">
-                <a:solidFill>
-                  <a:srgbClr val="003366"/>
-                </a:solidFill>
-                <a:latin typeface="Arial"/>
-                <a:ea typeface="Arial"/>
-                <a:cs typeface="Arial"/>
-              </a:rPr>
-              <a:t>number on screen → tap ⓘ → source · station · issue time · age</a:t>
-            </a:r>
-          </a:p>
-        </p:txBody>
-      </p:sp>
-      <p:sp>
-        <p:nvSpPr>
-          <p:cNvPr id="15376" name="hero"/>
+            <a:pPr algn="l">
+              <a:lnSpc>
+                <a:spcPct val="100000"/>
+              </a:lnSpc>
+            </a:pPr>
+            <a:r>
+              <a:rPr lang="en-US" sz="1300" b="1" dirty="0">
+                <a:solidFill>
+                  <a:srgbClr val="FFFFFF"/>
+                </a:solidFill>
+                <a:latin typeface="Arial"/>
+                <a:ea typeface="Arial"/>
+                <a:cs typeface="Arial"/>
+              </a:rPr>
+              <a:t>Source on every number</a:t>
+            </a:r>
+          </a:p>
+          <a:p>
+            <a:pPr algn="l">
+              <a:lnSpc>
+                <a:spcPct val="100000"/>
+              </a:lnSpc>
+            </a:pPr>
+            <a:r>
+              <a:rPr lang="en-US" sz="950" dirty="0">
+                <a:solidFill>
+                  <a:srgbClr val="FFFFFF"/>
+                </a:solidFill>
+                <a:latin typeface="Arial"/>
+                <a:ea typeface="Arial"/>
+                <a:cs typeface="Arial"/>
+              </a:rPr>
+              <a:t>station + issue time + age on each reading; tap ⓘ for the full provenance sheet</a:t>
+            </a:r>
+          </a:p>
+        </p:txBody>
+      </p:sp>
+      <p:sp>
+        <p:nvSpPr>
+          <p:cNvPr id="15379" name="panel"/>
           <p:cNvSpPr>
             <a:spLocks noChangeAspect="0"/>
           </p:cNvSpPr>
@@ -6231,18 +6465,18 @@
         </p:nvSpPr>
         <p:spPr>
           <a:xfrm>
-            <a:off x="8229600" y="1572768"/>
-            <a:ext cx="3337560" cy="1143000"/>
+            <a:off x="8229600" y="2761488"/>
+            <a:ext cx="3337560" cy="914400"/>
           </a:xfrm>
           <a:prstGeom prst="roundRect">
             <a:avLst/>
           </a:prstGeom>
           <a:solidFill>
-            <a:srgbClr val="EAF1F8"/>
-          </a:solidFill>
-          <a:ln w="12700">
+            <a:srgbClr val="D9EAFB"/>
+          </a:solidFill>
+          <a:ln w="19050">
             <a:solidFill>
-              <a:srgbClr val="F79646"/>
+              <a:srgbClr val="000000"/>
             </a:solidFill>
           </a:ln>
         </p:spPr>
@@ -6252,31 +6486,31 @@
           </a:bodyPr>
           <a:lstStyle/>
           <a:p>
-            <a:pPr algn="l" marL="0">
-              <a:lnSpc>
-                <a:spcPct val="100000"/>
-              </a:lnSpc>
-            </a:pPr>
-            <a:r>
-              <a:rPr lang="en-US" sz="1300" b="1" dirty="0">
-                <a:solidFill>
-                  <a:srgbClr val="003366"/>
-                </a:solidFill>
-                <a:latin typeface="Arial"/>
-                <a:ea typeface="Arial"/>
-                <a:cs typeface="Arial"/>
-              </a:rPr>
-              <a:t>Source on every number</a:t>
-            </a:r>
-          </a:p>
-          <a:p>
-            <a:pPr algn="l" marL="0">
-              <a:lnSpc>
-                <a:spcPct val="100000"/>
-              </a:lnSpc>
-            </a:pPr>
-            <a:r>
-              <a:rPr lang="en-US" sz="1000" dirty="0">
+            <a:pPr algn="l">
+              <a:lnSpc>
+                <a:spcPct val="100000"/>
+              </a:lnSpc>
+            </a:pPr>
+            <a:r>
+              <a:rPr lang="en-US" sz="1100" b="1" dirty="0">
+                <a:solidFill>
+                  <a:srgbClr val="1A1A1A"/>
+                </a:solidFill>
+                <a:latin typeface="Arial"/>
+                <a:ea typeface="Arial"/>
+                <a:cs typeface="Arial"/>
+              </a:rPr>
+              <a:t>Advice you can replay</a:t>
+            </a:r>
+          </a:p>
+          <a:p>
+            <a:pPr algn="l">
+              <a:lnSpc>
+                <a:spcPct val="100000"/>
+              </a:lnSpc>
+            </a:pPr>
+            <a:r>
+              <a:rPr lang="en-US" sz="950" dirty="0">
                 <a:solidFill>
                   <a:srgbClr val="595959"/>
                 </a:solidFill>
@@ -6284,14 +6518,14 @@
                 <a:ea typeface="Arial"/>
                 <a:cs typeface="Arial"/>
               </a:rPr>
-              <a:t>station + issue time + age on each reading; tap ⓘ for the full provenance sheet</a:t>
-            </a:r>
-          </a:p>
-        </p:txBody>
-      </p:sp>
-      <p:sp>
-        <p:nvSpPr>
-          <p:cNvPr id="15377" name="diff"/>
+              <a:t>same data → same card, byte-identical</a:t>
+            </a:r>
+          </a:p>
+        </p:txBody>
+      </p:sp>
+      <p:sp>
+        <p:nvSpPr>
+          <p:cNvPr id="15380" name="panel"/>
           <p:cNvSpPr>
             <a:spLocks noChangeAspect="0"/>
           </p:cNvSpPr>
@@ -6299,18 +6533,18 @@
         </p:nvSpPr>
         <p:spPr>
           <a:xfrm>
-            <a:off x="8229600" y="2834640"/>
-            <a:ext cx="3337560" cy="868680"/>
+            <a:off x="8229600" y="3803904"/>
+            <a:ext cx="3337560" cy="914400"/>
           </a:xfrm>
           <a:prstGeom prst="roundRect">
             <a:avLst/>
           </a:prstGeom>
           <a:solidFill>
-            <a:srgbClr val="EAF1F8"/>
-          </a:solidFill>
-          <a:ln w="12700">
+            <a:srgbClr val="D9EAFB"/>
+          </a:solidFill>
+          <a:ln w="19050">
             <a:solidFill>
-              <a:srgbClr val="4F81BD"/>
+              <a:srgbClr val="000000"/>
             </a:solidFill>
           </a:ln>
         </p:spPr>
@@ -6320,7 +6554,7 @@
           </a:bodyPr>
           <a:lstStyle/>
           <a:p>
-            <a:pPr algn="l" marL="0">
+            <a:pPr algn="l">
               <a:lnSpc>
                 <a:spcPct val="100000"/>
               </a:lnSpc>
@@ -6334,17 +6568,17 @@
                 <a:ea typeface="Arial"/>
                 <a:cs typeface="Arial"/>
               </a:rPr>
-              <a:t>Advice you can replay</a:t>
-            </a:r>
-          </a:p>
-          <a:p>
-            <a:pPr algn="l" marL="0">
-              <a:lnSpc>
-                <a:spcPct val="100000"/>
-              </a:lnSpc>
-            </a:pPr>
-            <a:r>
-              <a:rPr lang="en-US" sz="1000" dirty="0">
+              <a:t>Honest gaps, no guesses</a:t>
+            </a:r>
+          </a:p>
+          <a:p>
+            <a:pPr algn="l">
+              <a:lnSpc>
+                <a:spcPct val="100000"/>
+              </a:lnSpc>
+            </a:pPr>
+            <a:r>
+              <a:rPr lang="en-US" sz="950" dirty="0">
                 <a:solidFill>
                   <a:srgbClr val="595959"/>
                 </a:solidFill>
@@ -6352,14 +6586,14 @@
                 <a:ea typeface="Arial"/>
                 <a:cs typeface="Arial"/>
               </a:rPr>
-              <a:t>same data → same card, byte-identical</a:t>
-            </a:r>
-          </a:p>
-        </p:txBody>
-      </p:sp>
-      <p:sp>
-        <p:nvSpPr>
-          <p:cNvPr id="15378" name="diff"/>
+              <a:t>no data → a gap card, never a zero</a:t>
+            </a:r>
+          </a:p>
+        </p:txBody>
+      </p:sp>
+      <p:sp>
+        <p:nvSpPr>
+          <p:cNvPr id="15381" name="chip"/>
           <p:cNvSpPr>
             <a:spLocks noChangeAspect="0"/>
           </p:cNvSpPr>
@@ -6367,84 +6601,66 @@
         </p:nvSpPr>
         <p:spPr>
           <a:xfrm>
-            <a:off x="8229600" y="3794760"/>
-            <a:ext cx="3337560" cy="868680"/>
+            <a:off x="8229600" y="4974336"/>
+            <a:ext cx="3337560" cy="310896"/>
+          </a:xfrm>
+          <a:prstGeom prst="roundRect">
+            <a:avLst>
+              <a:gd name="adj" fmla="val 50000"/>
+            </a:avLst>
+          </a:prstGeom>
+          <a:solidFill>
+            <a:srgbClr val="E5399A"/>
+          </a:solidFill>
+          <a:ln>
+            <a:noFill/>
+          </a:ln>
+        </p:spPr>
+        <p:txBody>
+          <a:bodyPr anchor="ctr" wrap="square">
+            <a:normAutofit/>
+          </a:bodyPr>
+          <a:lstStyle/>
+          <a:p>
+            <a:pPr algn="ctr">
+              <a:lnSpc>
+                <a:spcPct val="100000"/>
+              </a:lnSpc>
+            </a:pPr>
+            <a:r>
+              <a:rPr lang="en-US" sz="800" b="1" dirty="0">
+                <a:solidFill>
+                  <a:srgbClr val="FFFFFF"/>
+                </a:solidFill>
+                <a:latin typeface="Arial"/>
+                <a:ea typeface="Arial"/>
+                <a:cs typeface="Arial"/>
+              </a:rPr>
+              <a:t>PERSONAS  ·  Commuter · Farmer · Health</a:t>
+            </a:r>
+          </a:p>
+        </p:txBody>
+      </p:sp>
+      <p:sp>
+        <p:nvSpPr>
+          <p:cNvPr id="15382" name="panel"/>
+          <p:cNvSpPr>
+            <a:spLocks noChangeAspect="0"/>
+          </p:cNvSpPr>
+          <p:nvPr/>
+        </p:nvSpPr>
+        <p:spPr>
+          <a:xfrm>
+            <a:off x="612648" y="5650992"/>
+            <a:ext cx="10954512" cy="640080"/>
           </a:xfrm>
           <a:prstGeom prst="roundRect">
             <a:avLst/>
           </a:prstGeom>
           <a:solidFill>
-            <a:srgbClr val="EAF1F8"/>
-          </a:solidFill>
-          <a:ln w="12700">
-            <a:solidFill>
-              <a:srgbClr val="4F81BD"/>
-            </a:solidFill>
-          </a:ln>
-        </p:spPr>
-        <p:txBody>
-          <a:bodyPr anchor="t" wrap="square">
-            <a:normAutofit/>
-          </a:bodyPr>
-          <a:lstStyle/>
-          <a:p>
-            <a:pPr algn="l" marL="0">
-              <a:lnSpc>
-                <a:spcPct val="100000"/>
-              </a:lnSpc>
-            </a:pPr>
-            <a:r>
-              <a:rPr lang="en-US" sz="1100" b="1" dirty="0">
-                <a:solidFill>
-                  <a:srgbClr val="1A1A1A"/>
-                </a:solidFill>
-                <a:latin typeface="Arial"/>
-                <a:ea typeface="Arial"/>
-                <a:cs typeface="Arial"/>
-              </a:rPr>
-              <a:t>Honest gaps, no guesses</a:t>
-            </a:r>
-          </a:p>
-          <a:p>
-            <a:pPr algn="l" marL="0">
-              <a:lnSpc>
-                <a:spcPct val="100000"/>
-              </a:lnSpc>
-            </a:pPr>
-            <a:r>
-              <a:rPr lang="en-US" sz="1000" dirty="0">
-                <a:solidFill>
-                  <a:srgbClr val="595959"/>
-                </a:solidFill>
-                <a:latin typeface="Arial"/>
-                <a:ea typeface="Arial"/>
-                <a:cs typeface="Arial"/>
-              </a:rPr>
-              <a:t>no data → a gap card, never a zero</a:t>
-            </a:r>
-          </a:p>
-        </p:txBody>
-      </p:sp>
-      <p:sp>
-        <p:nvSpPr>
-          <p:cNvPr id="15379" name="hook"/>
-          <p:cNvSpPr>
-            <a:spLocks noChangeAspect="0"/>
-          </p:cNvSpPr>
-          <p:nvPr/>
-        </p:nvSpPr>
-        <p:spPr>
-          <a:xfrm>
-            <a:off x="612648" y="5486400"/>
-            <a:ext cx="10954512" cy="713232"/>
-          </a:xfrm>
-          <a:prstGeom prst="roundRect">
-            <a:avLst/>
-          </a:prstGeom>
-          <a:solidFill>
-            <a:srgbClr val="EAF1F8"/>
-          </a:solidFill>
-          <a:ln w="12700">
+            <a:srgbClr val="003366"/>
+          </a:solidFill>
+          <a:ln w="19050">
             <a:solidFill>
               <a:srgbClr val="003366"/>
             </a:solidFill>
@@ -6456,7 +6672,7 @@
           </a:bodyPr>
           <a:lstStyle/>
           <a:p>
-            <a:pPr algn="ctr" marL="0">
+            <a:pPr algn="ctr">
               <a:lnSpc>
                 <a:spcPct val="100000"/>
               </a:lnSpc>
@@ -6464,7 +6680,7 @@
             <a:r>
               <a:rPr lang="en-US" sz="1100" b="1" dirty="0">
                 <a:solidFill>
-                  <a:srgbClr val="003366"/>
+                  <a:srgbClr val="FFFFFF"/>
                 </a:solidFill>
                 <a:latin typeface="Arial"/>
                 <a:ea typeface="Arial"/>
@@ -6579,15 +6795,11 @@
           <a:bodyPr/>
           <a:lstStyle/>
           <a:p>
-            <a:pPr eaLnBrk="1" hangingPunct="1"/>
-            <a:r>
-              <a:rPr lang="en-US" sz="3600" b="1" dirty="0">
-                <a:latin typeface="Times New Roman" panose="02020603050405020304" pitchFamily="18" charset="0"/>
-                <a:ea typeface="ＭＳ Ｐゴシック" pitchFamily="1" charset="-128"/>
-                <a:cs typeface="Times New Roman" panose="02020603050405020304" pitchFamily="18" charset="0"/>
-              </a:rPr>
-              <a:t>TECHNICAL APPROACH</a:t>
-            </a:r>
+            <a:pPr>
+              <a:lnSpc>
+                <a:spcPct val="100000"/>
+              </a:lnSpc>
+            </a:pPr>
           </a:p>
         </p:txBody>
       </p:sp>
@@ -6718,7 +6930,7 @@
         <p:spPr>
           <a:xfrm>
             <a:off x="329773" y="252246"/>
-            <a:ext cx="1251857" cy="807334"/>
+            <a:ext cx="1783080" cy="804672"/>
           </a:xfrm>
           <a:prstGeom prst="ellipse">
             <a:avLst/>
@@ -6744,7 +6956,11 @@
           <a:p>
             <a:pPr algn="ctr"/>
             <a:r>
-              <a:rPr lang="en-US" dirty="0"/>
+              <a:rPr lang="en-US" sz="1100" dirty="0">
+                <a:solidFill>
+                  <a:srgbClr val="003366"/>
+                </a:solidFill>
+              </a:rPr>
               <a:t>Zencoderss</a:t>
             </a:r>
             <a:endParaRPr lang="en-IN" dirty="0"/>
@@ -6783,7 +6999,7 @@
       </p:pic>
       <p:sp>
         <p:nvSpPr>
-          <p:cNvPr id="17412" name="ptr1"/>
+          <p:cNvPr id="17412" name="heading_pill"/>
           <p:cNvSpPr>
             <a:spLocks noChangeAspect="0"/>
           </p:cNvSpPr>
@@ -6791,60 +7007,16 @@
         </p:nvSpPr>
         <p:spPr>
           <a:xfrm>
-            <a:off x="612648" y="1115568"/>
-            <a:ext cx="10972800" cy="256032"/>
-          </a:xfrm>
-          <a:prstGeom prst="rect">
-            <a:avLst/>
-          </a:prstGeom>
-          <a:noFill/>
-          <a:ln>
-            <a:noFill/>
-          </a:ln>
-        </p:spPr>
-        <p:txBody>
-          <a:bodyPr anchor="t" wrap="square">
-            <a:normAutofit/>
-          </a:bodyPr>
-          <a:lstStyle/>
-          <a:p>
-            <a:pPr algn="l" marL="0">
-              <a:lnSpc>
-                <a:spcPct val="100000"/>
-              </a:lnSpc>
-            </a:pPr>
-            <a:r>
-              <a:rPr lang="en-US" sz="1000" b="1" dirty="0">
-                <a:solidFill>
-                  <a:srgbClr val="003366"/>
-                </a:solidFill>
-                <a:latin typeface="Arial"/>
-                <a:ea typeface="Arial"/>
-                <a:cs typeface="Arial"/>
-              </a:rPr>
-              <a:t>Technologies to be used (e.g. programming languages, frameworks, hardware)</a:t>
-            </a:r>
-          </a:p>
-        </p:txBody>
-      </p:sp>
-      <p:sp>
-        <p:nvSpPr>
-          <p:cNvPr id="17413" name="pipe"/>
-          <p:cNvSpPr>
-            <a:spLocks noChangeAspect="0"/>
-          </p:cNvSpPr>
-          <p:nvPr/>
-        </p:nvSpPr>
-        <p:spPr>
-          <a:xfrm>
-            <a:off x="411480" y="1417320"/>
-            <a:ext cx="1627632" cy="1280160"/>
+            <a:off x="3581248" y="164592"/>
+            <a:ext cx="5029200" cy="676656"/>
           </a:xfrm>
           <a:prstGeom prst="roundRect">
-            <a:avLst/>
-          </a:prstGeom>
-          <a:solidFill>
-            <a:srgbClr val="4F81BD"/>
+            <a:avLst>
+              <a:gd name="adj" fmla="val 50000"/>
+            </a:avLst>
+          </a:prstGeom>
+          <a:solidFill>
+            <a:srgbClr val="003366"/>
           </a:solidFill>
           <a:ln>
             <a:noFill/>
@@ -6856,47 +7028,28 @@
           </a:bodyPr>
           <a:lstStyle/>
           <a:p>
-            <a:pPr algn="ctr" marL="0">
-              <a:lnSpc>
-                <a:spcPct val="100000"/>
-              </a:lnSpc>
-            </a:pPr>
-            <a:r>
-              <a:rPr lang="en-US" sz="1200" b="1" dirty="0">
+            <a:pPr algn="ctr">
+              <a:lnSpc>
+                <a:spcPct val="100000"/>
+              </a:lnSpc>
+            </a:pPr>
+            <a:r>
+              <a:rPr lang="en-US" sz="2400" b="1" dirty="0">
                 <a:solidFill>
                   <a:srgbClr val="FFFFFF"/>
                 </a:solidFill>
-                <a:latin typeface="Arial"/>
-                <a:ea typeface="Arial"/>
-                <a:cs typeface="Arial"/>
-              </a:rPr>
-              <a:t>IMD DATA</a:t>
-            </a:r>
-          </a:p>
-          <a:p>
-            <a:pPr algn="ctr" marL="0">
-              <a:lnSpc>
-                <a:spcPct val="100000"/>
-              </a:lnSpc>
-            </a:pPr>
-            <a:r>
-              <a:rPr lang="en-US" sz="1000" dirty="0">
-                <a:solidFill>
-                  <a:srgbClr val="FFFFFF"/>
-                </a:solidFill>
-                <a:latin typeface="Arial"/>
-                <a:ea typeface="Arial"/>
-                <a:cs typeface="Arial"/>
-              </a:rPr>
-              <a:t>28 keyed APIs
-WFS · CAP feed</a:t>
-            </a:r>
-          </a:p>
-        </p:txBody>
-      </p:sp>
-      <p:sp>
-        <p:nvSpPr>
-          <p:cNvPr id="17414" name="arr"/>
+                <a:latin typeface="Arial Black"/>
+                <a:ea typeface="Arial Black"/>
+                <a:cs typeface="Arial Black"/>
+              </a:rPr>
+              <a:t>TECHNICAL APPROACH</a:t>
+            </a:r>
+          </a:p>
+        </p:txBody>
+      </p:sp>
+      <p:sp>
+        <p:nvSpPr>
+          <p:cNvPr id="17413" name="chip"/>
           <p:cNvSpPr>
             <a:spLocks noChangeAspect="0"/>
           </p:cNvSpPr>
@@ -6904,14 +7057,16 @@
         </p:nvSpPr>
         <p:spPr>
           <a:xfrm>
-            <a:off x="2057400" y="1929384"/>
-            <a:ext cx="237744" cy="256032"/>
-          </a:xfrm>
-          <a:prstGeom prst="rightArrow">
-            <a:avLst/>
-          </a:prstGeom>
-          <a:solidFill>
-            <a:srgbClr val="4F81BD"/>
+            <a:off x="612648" y="932688"/>
+            <a:ext cx="6949440" cy="310896"/>
+          </a:xfrm>
+          <a:prstGeom prst="roundRect">
+            <a:avLst>
+              <a:gd name="adj" fmla="val 50000"/>
+            </a:avLst>
+          </a:prstGeom>
+          <a:solidFill>
+            <a:srgbClr val="003366"/>
           </a:solidFill>
           <a:ln>
             <a:noFill/>
@@ -6923,17 +7078,28 @@
           </a:bodyPr>
           <a:lstStyle/>
           <a:p>
-            <a:pPr>
-              <a:lnSpc>
-                <a:spcPct val="100000"/>
-              </a:lnSpc>
-            </a:pPr>
-          </a:p>
-        </p:txBody>
-      </p:sp>
-      <p:sp>
-        <p:nvSpPr>
-          <p:cNvPr id="17415" name="pipe"/>
+            <a:pPr algn="ctr">
+              <a:lnSpc>
+                <a:spcPct val="100000"/>
+              </a:lnSpc>
+            </a:pPr>
+            <a:r>
+              <a:rPr lang="en-US" sz="800" b="1" dirty="0">
+                <a:solidFill>
+                  <a:srgbClr val="FFFFFF"/>
+                </a:solidFill>
+                <a:latin typeface="Arial"/>
+                <a:ea typeface="Arial"/>
+                <a:cs typeface="Arial"/>
+              </a:rPr>
+              <a:t>Technologies to be used (e.g. programming languages, frameworks, hardware)</a:t>
+            </a:r>
+          </a:p>
+        </p:txBody>
+      </p:sp>
+      <p:sp>
+        <p:nvSpPr>
+          <p:cNvPr id="17414" name="pipe"/>
           <p:cNvSpPr>
             <a:spLocks noChangeAspect="0"/>
           </p:cNvSpPr>
@@ -6941,8 +7107,8 @@
         </p:nvSpPr>
         <p:spPr>
           <a:xfrm>
-            <a:off x="2313432" y="1417320"/>
-            <a:ext cx="1627632" cy="1280160"/>
+            <a:off x="384048" y="1389888"/>
+            <a:ext cx="1069848" cy="1280160"/>
           </a:xfrm>
           <a:prstGeom prst="roundRect">
             <a:avLst/>
@@ -6951,6 +7117,112 @@
             <a:srgbClr val="4F81BD"/>
           </a:solidFill>
           <a:ln w="12700">
+            <a:solidFill>
+              <a:srgbClr val="000000"/>
+            </a:solidFill>
+          </a:ln>
+        </p:spPr>
+        <p:txBody>
+          <a:bodyPr anchor="ctr" wrap="square">
+            <a:normAutofit/>
+          </a:bodyPr>
+          <a:lstStyle/>
+          <a:p>
+            <a:pPr algn="ctr">
+              <a:lnSpc>
+                <a:spcPct val="100000"/>
+              </a:lnSpc>
+            </a:pPr>
+            <a:r>
+              <a:rPr lang="en-US" sz="1000" b="1" dirty="0">
+                <a:solidFill>
+                  <a:srgbClr val="FFFFFF"/>
+                </a:solidFill>
+                <a:latin typeface="Arial"/>
+                <a:ea typeface="Arial"/>
+                <a:cs typeface="Arial"/>
+              </a:rPr>
+              <a:t>IMD DATA</a:t>
+            </a:r>
+          </a:p>
+          <a:p>
+            <a:pPr algn="ctr">
+              <a:lnSpc>
+                <a:spcPct val="100000"/>
+              </a:lnSpc>
+            </a:pPr>
+            <a:r>
+              <a:rPr lang="en-US" sz="850" dirty="0">
+                <a:solidFill>
+                  <a:srgbClr val="FFFFFF"/>
+                </a:solidFill>
+                <a:latin typeface="Arial"/>
+                <a:ea typeface="Arial"/>
+                <a:cs typeface="Arial"/>
+              </a:rPr>
+              <a:t>28 keyed APIs
+WFS · CAP feed</a:t>
+            </a:r>
+          </a:p>
+        </p:txBody>
+      </p:sp>
+      <p:sp>
+        <p:nvSpPr>
+          <p:cNvPr id="17415" name="arr"/>
+          <p:cNvSpPr>
+            <a:spLocks noChangeAspect="0"/>
+          </p:cNvSpPr>
+          <p:nvPr/>
+        </p:nvSpPr>
+        <p:spPr>
+          <a:xfrm>
+            <a:off x="1472184" y="1901952"/>
+            <a:ext cx="128016" cy="256032"/>
+          </a:xfrm>
+          <a:prstGeom prst="rightArrow">
+            <a:avLst/>
+          </a:prstGeom>
+          <a:solidFill>
+            <a:srgbClr val="4F81BD"/>
+          </a:solidFill>
+          <a:ln>
+            <a:noFill/>
+          </a:ln>
+        </p:spPr>
+        <p:txBody>
+          <a:bodyPr anchor="ctr" wrap="square">
+            <a:normAutofit/>
+          </a:bodyPr>
+          <a:lstStyle/>
+          <a:p>
+            <a:pPr>
+              <a:lnSpc>
+                <a:spcPct val="100000"/>
+              </a:lnSpc>
+            </a:pPr>
+          </a:p>
+        </p:txBody>
+      </p:sp>
+      <p:sp>
+        <p:nvSpPr>
+          <p:cNvPr id="17416" name="pipe"/>
+          <p:cNvSpPr>
+            <a:spLocks noChangeAspect="0"/>
+          </p:cNvSpPr>
+          <p:nvPr/>
+        </p:nvSpPr>
+        <p:spPr>
+          <a:xfrm>
+            <a:off x="1618488" y="1389888"/>
+            <a:ext cx="1069848" cy="1280160"/>
+          </a:xfrm>
+          <a:prstGeom prst="roundRect">
+            <a:avLst/>
+          </a:prstGeom>
+          <a:solidFill>
+            <a:srgbClr val="4F81BD"/>
+          </a:solidFill>
+          <a:ln w="28575">
             <a:solidFill>
               <a:srgbClr val="F79646"/>
             </a:solidFill>
@@ -6962,13 +7234,13 @@
           </a:bodyPr>
           <a:lstStyle/>
           <a:p>
-            <a:pPr algn="ctr" marL="0">
-              <a:lnSpc>
-                <a:spcPct val="100000"/>
-              </a:lnSpc>
-            </a:pPr>
-            <a:r>
-              <a:rPr lang="en-US" sz="1200" b="1" dirty="0">
+            <a:pPr algn="ctr">
+              <a:lnSpc>
+                <a:spcPct val="100000"/>
+              </a:lnSpc>
+            </a:pPr>
+            <a:r>
+              <a:rPr lang="en-US" sz="1000" b="1" dirty="0">
                 <a:solidFill>
                   <a:srgbClr val="FFFFFF"/>
                 </a:solidFill>
@@ -6980,13 +7252,13 @@
             </a:r>
           </a:p>
           <a:p>
-            <a:pPr algn="ctr" marL="0">
-              <a:lnSpc>
-                <a:spcPct val="100000"/>
-              </a:lnSpc>
-            </a:pPr>
-            <a:r>
-              <a:rPr lang="en-US" sz="1000" dirty="0">
+            <a:pPr algn="ctr">
+              <a:lnSpc>
+                <a:spcPct val="100000"/>
+              </a:lnSpc>
+            </a:pPr>
+            <a:r>
+              <a:rPr lang="en-US" sz="850" dirty="0">
                 <a:solidFill>
                   <a:srgbClr val="FFFFFF"/>
                 </a:solidFill>
@@ -7002,7 +7274,7 @@
       </p:sp>
       <p:sp>
         <p:nvSpPr>
-          <p:cNvPr id="17416" name="arr"/>
+          <p:cNvPr id="17417" name="arr"/>
           <p:cNvSpPr>
             <a:spLocks noChangeAspect="0"/>
           </p:cNvSpPr>
@@ -7010,8 +7282,8 @@
         </p:nvSpPr>
         <p:spPr>
           <a:xfrm>
-            <a:off x="3959352" y="1929384"/>
-            <a:ext cx="237744" cy="256032"/>
+            <a:off x="2706624" y="1901952"/>
+            <a:ext cx="128016" cy="256032"/>
           </a:xfrm>
           <a:prstGeom prst="rightArrow">
             <a:avLst/>
@@ -7039,7 +7311,7 @@
       </p:sp>
       <p:sp>
         <p:nvSpPr>
-          <p:cNvPr id="17417" name="pipe"/>
+          <p:cNvPr id="17418" name="pipe"/>
           <p:cNvSpPr>
             <a:spLocks noChangeAspect="0"/>
           </p:cNvSpPr>
@@ -7047,8 +7319,8 @@
         </p:nvSpPr>
         <p:spPr>
           <a:xfrm>
-            <a:off x="4215384" y="1417320"/>
-            <a:ext cx="1627632" cy="1280160"/>
+            <a:off x="2852928" y="1389888"/>
+            <a:ext cx="1069848" cy="1280160"/>
           </a:xfrm>
           <a:prstGeom prst="roundRect">
             <a:avLst/>
@@ -7056,8 +7328,10 @@
           <a:solidFill>
             <a:srgbClr val="4F81BD"/>
           </a:solidFill>
-          <a:ln>
-            <a:noFill/>
+          <a:ln w="12700">
+            <a:solidFill>
+              <a:srgbClr val="000000"/>
+            </a:solidFill>
           </a:ln>
         </p:spPr>
         <p:txBody>
@@ -7066,13 +7340,13 @@
           </a:bodyPr>
           <a:lstStyle/>
           <a:p>
-            <a:pPr algn="ctr" marL="0">
-              <a:lnSpc>
-                <a:spcPct val="100000"/>
-              </a:lnSpc>
-            </a:pPr>
-            <a:r>
-              <a:rPr lang="en-US" sz="1200" b="1" dirty="0">
+            <a:pPr algn="ctr">
+              <a:lnSpc>
+                <a:spcPct val="100000"/>
+              </a:lnSpc>
+            </a:pPr>
+            <a:r>
+              <a:rPr lang="en-US" sz="1000" b="1" dirty="0">
                 <a:solidFill>
                   <a:srgbClr val="FFFFFF"/>
                 </a:solidFill>
@@ -7084,13 +7358,13 @@
             </a:r>
           </a:p>
           <a:p>
-            <a:pPr algn="ctr" marL="0">
-              <a:lnSpc>
-                <a:spcPct val="100000"/>
-              </a:lnSpc>
-            </a:pPr>
-            <a:r>
-              <a:rPr lang="en-US" sz="1000" dirty="0">
+            <a:pPr algn="ctr">
+              <a:lnSpc>
+                <a:spcPct val="100000"/>
+              </a:lnSpc>
+            </a:pPr>
+            <a:r>
+              <a:rPr lang="en-US" sz="850" dirty="0">
                 <a:solidFill>
                   <a:srgbClr val="FFFFFF"/>
                 </a:solidFill>
@@ -7106,7 +7380,7 @@
       </p:sp>
       <p:sp>
         <p:nvSpPr>
-          <p:cNvPr id="17418" name="arr"/>
+          <p:cNvPr id="17419" name="arr"/>
           <p:cNvSpPr>
             <a:spLocks noChangeAspect="0"/>
           </p:cNvSpPr>
@@ -7114,8 +7388,8 @@
         </p:nvSpPr>
         <p:spPr>
           <a:xfrm>
-            <a:off x="5861304" y="1929384"/>
-            <a:ext cx="237744" cy="256032"/>
+            <a:off x="3941064" y="1901952"/>
+            <a:ext cx="128016" cy="256032"/>
           </a:xfrm>
           <a:prstGeom prst="rightArrow">
             <a:avLst/>
@@ -7143,7 +7417,7 @@
       </p:sp>
       <p:sp>
         <p:nvSpPr>
-          <p:cNvPr id="17419" name="pipe"/>
+          <p:cNvPr id="17420" name="pipe"/>
           <p:cNvSpPr>
             <a:spLocks noChangeAspect="0"/>
           </p:cNvSpPr>
@@ -7151,8 +7425,8 @@
         </p:nvSpPr>
         <p:spPr>
           <a:xfrm>
-            <a:off x="6117336" y="1417320"/>
-            <a:ext cx="1627632" cy="1280160"/>
+            <a:off x="4087368" y="1389888"/>
+            <a:ext cx="1069848" cy="1280160"/>
           </a:xfrm>
           <a:prstGeom prst="roundRect">
             <a:avLst/>
@@ -7160,8 +7434,10 @@
           <a:solidFill>
             <a:srgbClr val="4F81BD"/>
           </a:solidFill>
-          <a:ln>
-            <a:noFill/>
+          <a:ln w="12700">
+            <a:solidFill>
+              <a:srgbClr val="000000"/>
+            </a:solidFill>
           </a:ln>
         </p:spPr>
         <p:txBody>
@@ -7170,13 +7446,13 @@
           </a:bodyPr>
           <a:lstStyle/>
           <a:p>
-            <a:pPr algn="ctr" marL="0">
-              <a:lnSpc>
-                <a:spcPct val="100000"/>
-              </a:lnSpc>
-            </a:pPr>
-            <a:r>
-              <a:rPr lang="en-US" sz="1200" b="1" dirty="0">
+            <a:pPr algn="ctr">
+              <a:lnSpc>
+                <a:spcPct val="100000"/>
+              </a:lnSpc>
+            </a:pPr>
+            <a:r>
+              <a:rPr lang="en-US" sz="800" b="1" dirty="0">
                 <a:solidFill>
                   <a:srgbClr val="FFFFFF"/>
                 </a:solidFill>
@@ -7188,13 +7464,13 @@
             </a:r>
           </a:p>
           <a:p>
-            <a:pPr algn="ctr" marL="0">
-              <a:lnSpc>
-                <a:spcPct val="100000"/>
-              </a:lnSpc>
-            </a:pPr>
-            <a:r>
-              <a:rPr lang="en-US" sz="1000" dirty="0">
+            <a:pPr algn="ctr">
+              <a:lnSpc>
+                <a:spcPct val="100000"/>
+              </a:lnSpc>
+            </a:pPr>
+            <a:r>
+              <a:rPr lang="en-US" sz="850" dirty="0">
                 <a:solidFill>
                   <a:srgbClr val="FFFFFF"/>
                 </a:solidFill>
@@ -7210,7 +7486,7 @@
       </p:sp>
       <p:sp>
         <p:nvSpPr>
-          <p:cNvPr id="17420" name="arr"/>
+          <p:cNvPr id="17421" name="arr"/>
           <p:cNvSpPr>
             <a:spLocks noChangeAspect="0"/>
           </p:cNvSpPr>
@@ -7218,8 +7494,8 @@
         </p:nvSpPr>
         <p:spPr>
           <a:xfrm>
-            <a:off x="7763256" y="1929384"/>
-            <a:ext cx="237744" cy="256032"/>
+            <a:off x="5175504" y="1901952"/>
+            <a:ext cx="128016" cy="256032"/>
           </a:xfrm>
           <a:prstGeom prst="rightArrow">
             <a:avLst/>
@@ -7247,7 +7523,7 @@
       </p:sp>
       <p:sp>
         <p:nvSpPr>
-          <p:cNvPr id="17421" name="pipe"/>
+          <p:cNvPr id="17422" name="pipe"/>
           <p:cNvSpPr>
             <a:spLocks noChangeAspect="0"/>
           </p:cNvSpPr>
@@ -7255,8 +7531,8 @@
         </p:nvSpPr>
         <p:spPr>
           <a:xfrm>
-            <a:off x="8019288" y="1417320"/>
-            <a:ext cx="1627632" cy="1280160"/>
+            <a:off x="5321808" y="1389888"/>
+            <a:ext cx="1069848" cy="1280160"/>
           </a:xfrm>
           <a:prstGeom prst="roundRect">
             <a:avLst/>
@@ -7264,8 +7540,10 @@
           <a:solidFill>
             <a:srgbClr val="4F81BD"/>
           </a:solidFill>
-          <a:ln>
-            <a:noFill/>
+          <a:ln w="12700">
+            <a:solidFill>
+              <a:srgbClr val="000000"/>
+            </a:solidFill>
           </a:ln>
         </p:spPr>
         <p:txBody>
@@ -7274,13 +7552,13 @@
           </a:bodyPr>
           <a:lstStyle/>
           <a:p>
-            <a:pPr algn="ctr" marL="0">
-              <a:lnSpc>
-                <a:spcPct val="100000"/>
-              </a:lnSpc>
-            </a:pPr>
-            <a:r>
-              <a:rPr lang="en-US" sz="1200" b="1" dirty="0">
+            <a:pPr algn="ctr">
+              <a:lnSpc>
+                <a:spcPct val="100000"/>
+              </a:lnSpc>
+            </a:pPr>
+            <a:r>
+              <a:rPr lang="en-US" sz="1000" b="1" dirty="0">
                 <a:solidFill>
                   <a:srgbClr val="FFFFFF"/>
                 </a:solidFill>
@@ -7292,13 +7570,13 @@
             </a:r>
           </a:p>
           <a:p>
-            <a:pPr algn="ctr" marL="0">
-              <a:lnSpc>
-                <a:spcPct val="100000"/>
-              </a:lnSpc>
-            </a:pPr>
-            <a:r>
-              <a:rPr lang="en-US" sz="1000" dirty="0">
+            <a:pPr algn="ctr">
+              <a:lnSpc>
+                <a:spcPct val="100000"/>
+              </a:lnSpc>
+            </a:pPr>
+            <a:r>
+              <a:rPr lang="en-US" sz="850" dirty="0">
                 <a:solidFill>
                   <a:srgbClr val="FFFFFF"/>
                 </a:solidFill>
@@ -7314,7 +7592,7 @@
       </p:sp>
       <p:sp>
         <p:nvSpPr>
-          <p:cNvPr id="17422" name="arr"/>
+          <p:cNvPr id="17423" name="arr"/>
           <p:cNvSpPr>
             <a:spLocks noChangeAspect="0"/>
           </p:cNvSpPr>
@@ -7322,8 +7600,8 @@
         </p:nvSpPr>
         <p:spPr>
           <a:xfrm>
-            <a:off x="9665208" y="1929384"/>
-            <a:ext cx="237744" cy="256032"/>
+            <a:off x="6409944" y="1901952"/>
+            <a:ext cx="128016" cy="256032"/>
           </a:xfrm>
           <a:prstGeom prst="rightArrow">
             <a:avLst/>
@@ -7351,7 +7629,7 @@
       </p:sp>
       <p:sp>
         <p:nvSpPr>
-          <p:cNvPr id="17423" name="pipe"/>
+          <p:cNvPr id="17424" name="pipe"/>
           <p:cNvSpPr>
             <a:spLocks noChangeAspect="0"/>
           </p:cNvSpPr>
@@ -7359,8 +7637,8 @@
         </p:nvSpPr>
         <p:spPr>
           <a:xfrm>
-            <a:off x="9921240" y="1417320"/>
-            <a:ext cx="1627632" cy="1280160"/>
+            <a:off x="6556248" y="1389888"/>
+            <a:ext cx="1069848" cy="1280160"/>
           </a:xfrm>
           <a:prstGeom prst="roundRect">
             <a:avLst/>
@@ -7368,8 +7646,10 @@
           <a:solidFill>
             <a:srgbClr val="003366"/>
           </a:solidFill>
-          <a:ln>
-            <a:noFill/>
+          <a:ln w="12700">
+            <a:solidFill>
+              <a:srgbClr val="000000"/>
+            </a:solidFill>
           </a:ln>
         </p:spPr>
         <p:txBody>
@@ -7378,13 +7658,13 @@
           </a:bodyPr>
           <a:lstStyle/>
           <a:p>
-            <a:pPr algn="ctr" marL="0">
-              <a:lnSpc>
-                <a:spcPct val="100000"/>
-              </a:lnSpc>
-            </a:pPr>
-            <a:r>
-              <a:rPr lang="en-US" sz="1200" b="1" dirty="0">
+            <a:pPr algn="ctr">
+              <a:lnSpc>
+                <a:spcPct val="100000"/>
+              </a:lnSpc>
+            </a:pPr>
+            <a:r>
+              <a:rPr lang="en-US" sz="1000" b="1" dirty="0">
                 <a:solidFill>
                   <a:srgbClr val="FFFFFF"/>
                 </a:solidFill>
@@ -7396,13 +7676,13 @@
             </a:r>
           </a:p>
           <a:p>
-            <a:pPr algn="ctr" marL="0">
-              <a:lnSpc>
-                <a:spcPct val="100000"/>
-              </a:lnSpc>
-            </a:pPr>
-            <a:r>
-              <a:rPr lang="en-US" sz="1000" dirty="0">
+            <a:pPr algn="ctr">
+              <a:lnSpc>
+                <a:spcPct val="100000"/>
+              </a:lnSpc>
+            </a:pPr>
+            <a:r>
+              <a:rPr lang="en-US" sz="850" dirty="0">
                 <a:solidFill>
                   <a:srgbClr val="FFFFFF"/>
                 </a:solidFill>
@@ -7418,7 +7698,7 @@
       </p:sp>
       <p:sp>
         <p:nvSpPr>
-          <p:cNvPr id="17424" name="chip"/>
+          <p:cNvPr id="17425" name="chip"/>
           <p:cNvSpPr>
             <a:spLocks noChangeAspect="0"/>
           </p:cNvSpPr>
@@ -7426,18 +7706,20 @@
         </p:nvSpPr>
         <p:spPr>
           <a:xfrm>
-            <a:off x="411480" y="2788920"/>
-            <a:ext cx="2121408" cy="365760"/>
+            <a:off x="384048" y="2743200"/>
+            <a:ext cx="1371600" cy="347472"/>
           </a:xfrm>
           <a:prstGeom prst="roundRect">
-            <a:avLst/>
-          </a:prstGeom>
-          <a:solidFill>
-            <a:srgbClr val="F2F2F2"/>
-          </a:solidFill>
-          <a:ln w="12700">
+            <a:avLst>
+              <a:gd name="adj" fmla="val 50000"/>
+            </a:avLst>
+          </a:prstGeom>
+          <a:solidFill>
+            <a:srgbClr val="D9EAFB"/>
+          </a:solidFill>
+          <a:ln w="19050">
             <a:solidFill>
-              <a:srgbClr val="BBBBBB"/>
+              <a:srgbClr val="000000"/>
             </a:solidFill>
           </a:ln>
         </p:spPr>
@@ -7447,13 +7729,13 @@
           </a:bodyPr>
           <a:lstStyle/>
           <a:p>
-            <a:pPr algn="ctr" marL="0">
-              <a:lnSpc>
-                <a:spcPct val="100000"/>
-              </a:lnSpc>
-            </a:pPr>
-            <a:r>
-              <a:rPr lang="en-US" sz="1000" dirty="0">
+            <a:pPr algn="ctr">
+              <a:lnSpc>
+                <a:spcPct val="100000"/>
+              </a:lnSpc>
+            </a:pPr>
+            <a:r>
+              <a:rPr lang="en-US" sz="750" b="1" dirty="0">
                 <a:solidFill>
                   <a:srgbClr val="1A1A1A"/>
                 </a:solidFill>
@@ -7468,7 +7750,7 @@
       </p:sp>
       <p:sp>
         <p:nvSpPr>
-          <p:cNvPr id="17425" name="chip"/>
+          <p:cNvPr id="17426" name="chip"/>
           <p:cNvSpPr>
             <a:spLocks noChangeAspect="0"/>
           </p:cNvSpPr>
@@ -7476,18 +7758,20 @@
         </p:nvSpPr>
         <p:spPr>
           <a:xfrm>
-            <a:off x="2642616" y="2788920"/>
-            <a:ext cx="2121408" cy="365760"/>
+            <a:off x="1851660" y="2743200"/>
+            <a:ext cx="1371600" cy="347472"/>
           </a:xfrm>
           <a:prstGeom prst="roundRect">
-            <a:avLst/>
-          </a:prstGeom>
-          <a:solidFill>
-            <a:srgbClr val="F2F2F2"/>
-          </a:solidFill>
-          <a:ln w="12700">
+            <a:avLst>
+              <a:gd name="adj" fmla="val 50000"/>
+            </a:avLst>
+          </a:prstGeom>
+          <a:solidFill>
+            <a:srgbClr val="D9EAFB"/>
+          </a:solidFill>
+          <a:ln w="19050">
             <a:solidFill>
-              <a:srgbClr val="BBBBBB"/>
+              <a:srgbClr val="000000"/>
             </a:solidFill>
           </a:ln>
         </p:spPr>
@@ -7497,13 +7781,13 @@
           </a:bodyPr>
           <a:lstStyle/>
           <a:p>
-            <a:pPr algn="ctr" marL="0">
-              <a:lnSpc>
-                <a:spcPct val="100000"/>
-              </a:lnSpc>
-            </a:pPr>
-            <a:r>
-              <a:rPr lang="en-US" sz="1000" dirty="0">
+            <a:pPr algn="ctr">
+              <a:lnSpc>
+                <a:spcPct val="100000"/>
+              </a:lnSpc>
+            </a:pPr>
+            <a:r>
+              <a:rPr lang="en-US" sz="750" b="1" dirty="0">
                 <a:solidFill>
                   <a:srgbClr val="1A1A1A"/>
                 </a:solidFill>
@@ -7518,7 +7802,7 @@
       </p:sp>
       <p:sp>
         <p:nvSpPr>
-          <p:cNvPr id="17426" name="chip"/>
+          <p:cNvPr id="17427" name="chip"/>
           <p:cNvSpPr>
             <a:spLocks noChangeAspect="0"/>
           </p:cNvSpPr>
@@ -7526,18 +7810,20 @@
         </p:nvSpPr>
         <p:spPr>
           <a:xfrm>
-            <a:off x="4873752" y="2788920"/>
-            <a:ext cx="2121408" cy="365760"/>
+            <a:off x="3319272" y="2743200"/>
+            <a:ext cx="1371600" cy="347472"/>
           </a:xfrm>
           <a:prstGeom prst="roundRect">
-            <a:avLst/>
-          </a:prstGeom>
-          <a:solidFill>
-            <a:srgbClr val="F2F2F2"/>
-          </a:solidFill>
-          <a:ln w="12700">
+            <a:avLst>
+              <a:gd name="adj" fmla="val 50000"/>
+            </a:avLst>
+          </a:prstGeom>
+          <a:solidFill>
+            <a:srgbClr val="D9EAFB"/>
+          </a:solidFill>
+          <a:ln w="19050">
             <a:solidFill>
-              <a:srgbClr val="BBBBBB"/>
+              <a:srgbClr val="000000"/>
             </a:solidFill>
           </a:ln>
         </p:spPr>
@@ -7547,13 +7833,13 @@
           </a:bodyPr>
           <a:lstStyle/>
           <a:p>
-            <a:pPr algn="ctr" marL="0">
-              <a:lnSpc>
-                <a:spcPct val="100000"/>
-              </a:lnSpc>
-            </a:pPr>
-            <a:r>
-              <a:rPr lang="en-US" sz="1000" dirty="0">
+            <a:pPr algn="ctr">
+              <a:lnSpc>
+                <a:spcPct val="100000"/>
+              </a:lnSpc>
+            </a:pPr>
+            <a:r>
+              <a:rPr lang="en-US" sz="750" b="1" dirty="0">
                 <a:solidFill>
                   <a:srgbClr val="1A1A1A"/>
                 </a:solidFill>
@@ -7568,7 +7854,7 @@
       </p:sp>
       <p:sp>
         <p:nvSpPr>
-          <p:cNvPr id="17427" name="chip"/>
+          <p:cNvPr id="17428" name="chip"/>
           <p:cNvSpPr>
             <a:spLocks noChangeAspect="0"/>
           </p:cNvSpPr>
@@ -7576,18 +7862,20 @@
         </p:nvSpPr>
         <p:spPr>
           <a:xfrm>
-            <a:off x="7104888" y="2788920"/>
-            <a:ext cx="2121408" cy="365760"/>
+            <a:off x="4786884" y="2743200"/>
+            <a:ext cx="1371600" cy="347472"/>
           </a:xfrm>
           <a:prstGeom prst="roundRect">
-            <a:avLst/>
-          </a:prstGeom>
-          <a:solidFill>
-            <a:srgbClr val="F2F2F2"/>
-          </a:solidFill>
-          <a:ln w="12700">
+            <a:avLst>
+              <a:gd name="adj" fmla="val 50000"/>
+            </a:avLst>
+          </a:prstGeom>
+          <a:solidFill>
+            <a:srgbClr val="D9EAFB"/>
+          </a:solidFill>
+          <a:ln w="19050">
             <a:solidFill>
-              <a:srgbClr val="BBBBBB"/>
+              <a:srgbClr val="000000"/>
             </a:solidFill>
           </a:ln>
         </p:spPr>
@@ -7597,13 +7885,13 @@
           </a:bodyPr>
           <a:lstStyle/>
           <a:p>
-            <a:pPr algn="ctr" marL="0">
-              <a:lnSpc>
-                <a:spcPct val="100000"/>
-              </a:lnSpc>
-            </a:pPr>
-            <a:r>
-              <a:rPr lang="en-US" sz="1000" dirty="0">
+            <a:pPr algn="ctr">
+              <a:lnSpc>
+                <a:spcPct val="100000"/>
+              </a:lnSpc>
+            </a:pPr>
+            <a:r>
+              <a:rPr lang="en-US" sz="750" b="1" dirty="0">
                 <a:solidFill>
                   <a:srgbClr val="1A1A1A"/>
                 </a:solidFill>
@@ -7618,7 +7906,7 @@
       </p:sp>
       <p:sp>
         <p:nvSpPr>
-          <p:cNvPr id="17428" name="chip"/>
+          <p:cNvPr id="17429" name="chip"/>
           <p:cNvSpPr>
             <a:spLocks noChangeAspect="0"/>
           </p:cNvSpPr>
@@ -7626,18 +7914,20 @@
         </p:nvSpPr>
         <p:spPr>
           <a:xfrm>
-            <a:off x="9336024" y="2788920"/>
-            <a:ext cx="2121408" cy="365760"/>
+            <a:off x="6254496" y="2743200"/>
+            <a:ext cx="1371600" cy="347472"/>
           </a:xfrm>
           <a:prstGeom prst="roundRect">
-            <a:avLst/>
-          </a:prstGeom>
-          <a:solidFill>
-            <a:srgbClr val="F2F2F2"/>
-          </a:solidFill>
-          <a:ln w="12700">
+            <a:avLst>
+              <a:gd name="adj" fmla="val 50000"/>
+            </a:avLst>
+          </a:prstGeom>
+          <a:solidFill>
+            <a:srgbClr val="D9EAFB"/>
+          </a:solidFill>
+          <a:ln w="19050">
             <a:solidFill>
-              <a:srgbClr val="BBBBBB"/>
+              <a:srgbClr val="000000"/>
             </a:solidFill>
           </a:ln>
         </p:spPr>
@@ -7647,13 +7937,13 @@
           </a:bodyPr>
           <a:lstStyle/>
           <a:p>
-            <a:pPr algn="ctr" marL="0">
-              <a:lnSpc>
-                <a:spcPct val="100000"/>
-              </a:lnSpc>
-            </a:pPr>
-            <a:r>
-              <a:rPr lang="en-US" sz="1000" dirty="0">
+            <a:pPr algn="ctr">
+              <a:lnSpc>
+                <a:spcPct val="100000"/>
+              </a:lnSpc>
+            </a:pPr>
+            <a:r>
+              <a:rPr lang="en-US" sz="750" b="1" dirty="0">
                 <a:solidFill>
                   <a:srgbClr val="1A1A1A"/>
                 </a:solidFill>
@@ -7668,7 +7958,7 @@
       </p:sp>
       <p:sp>
         <p:nvSpPr>
-          <p:cNvPr id="17429" name="ptr2"/>
+          <p:cNvPr id="17430" name="chip"/>
           <p:cNvSpPr>
             <a:spLocks noChangeAspect="0"/>
           </p:cNvSpPr>
@@ -7676,57 +7966,13 @@
         </p:nvSpPr>
         <p:spPr>
           <a:xfrm>
-            <a:off x="612648" y="3246120"/>
-            <a:ext cx="6949440" cy="274320"/>
-          </a:xfrm>
-          <a:prstGeom prst="rect">
-            <a:avLst/>
-          </a:prstGeom>
-          <a:noFill/>
-          <a:ln>
-            <a:noFill/>
-          </a:ln>
-        </p:spPr>
-        <p:txBody>
-          <a:bodyPr anchor="t" wrap="square">
-            <a:normAutofit/>
-          </a:bodyPr>
-          <a:lstStyle/>
-          <a:p>
-            <a:pPr algn="l" marL="0">
-              <a:lnSpc>
-                <a:spcPct val="100000"/>
-              </a:lnSpc>
-            </a:pPr>
-            <a:r>
-              <a:rPr lang="en-US" sz="1000" b="1" dirty="0">
-                <a:solidFill>
-                  <a:srgbClr val="003366"/>
-                </a:solidFill>
-                <a:latin typeface="Arial"/>
-                <a:ea typeface="Arial"/>
-                <a:cs typeface="Arial"/>
-              </a:rPr>
-              <a:t>Methodology and process for implementation (Flow Charts/Images/ working prototype)</a:t>
-            </a:r>
-          </a:p>
-        </p:txBody>
-      </p:sp>
-      <p:sp>
-        <p:nvSpPr>
-          <p:cNvPr id="17430" name="stage"/>
-          <p:cNvSpPr>
-            <a:spLocks noChangeAspect="0"/>
-          </p:cNvSpPr>
-          <p:nvPr/>
-        </p:nvSpPr>
-        <p:spPr>
-          <a:xfrm>
-            <a:off x="612648" y="3566160"/>
-            <a:ext cx="2103120" cy="914400"/>
+            <a:off x="612648" y="3182112"/>
+            <a:ext cx="6949440" cy="310896"/>
           </a:xfrm>
           <a:prstGeom prst="roundRect">
-            <a:avLst/>
+            <a:avLst>
+              <a:gd name="adj" fmla="val 50000"/>
+            </a:avLst>
           </a:prstGeom>
           <a:solidFill>
             <a:srgbClr val="003366"/>
@@ -7741,13 +7987,13 @@
           </a:bodyPr>
           <a:lstStyle/>
           <a:p>
-            <a:pPr algn="ctr" marL="0">
-              <a:lnSpc>
-                <a:spcPct val="100000"/>
-              </a:lnSpc>
-            </a:pPr>
-            <a:r>
-              <a:rPr lang="en-US" sz="1100" b="1" dirty="0">
+            <a:pPr algn="ctr">
+              <a:lnSpc>
+                <a:spcPct val="100000"/>
+              </a:lnSpc>
+            </a:pPr>
+            <a:r>
+              <a:rPr lang="en-US" sz="800" b="1" dirty="0">
                 <a:solidFill>
                   <a:srgbClr val="FFFFFF"/>
                 </a:solidFill>
@@ -7755,33 +8001,14 @@
                 <a:ea typeface="Arial"/>
                 <a:cs typeface="Arial"/>
               </a:rPr>
-              <a:t>Mock today</a:t>
-            </a:r>
-          </a:p>
-          <a:p>
-            <a:pPr algn="ctr" marL="0">
-              <a:lnSpc>
-                <a:spcPct val="100000"/>
-              </a:lnSpc>
-            </a:pPr>
-            <a:r>
-              <a:rPr lang="en-US" sz="900" dirty="0">
-                <a:solidFill>
-                  <a:srgbClr val="FFFFFF"/>
-                </a:solidFill>
-                <a:latin typeface="Arial"/>
-                <a:ea typeface="Arial"/>
-                <a:cs typeface="Arial"/>
-              </a:rPr>
-              <a:t>real captures
-32 tests green</a:t>
-            </a:r>
-          </a:p>
-        </p:txBody>
-      </p:sp>
-      <p:sp>
-        <p:nvSpPr>
-          <p:cNvPr id="17431" name="arr"/>
+              <a:t>Methodology and process for implementation (Flow Charts/Images/ working prototype)</a:t>
+            </a:r>
+          </a:p>
+        </p:txBody>
+      </p:sp>
+      <p:sp>
+        <p:nvSpPr>
+          <p:cNvPr id="17431" name="stage"/>
           <p:cNvSpPr>
             <a:spLocks noChangeAspect="0"/>
           </p:cNvSpPr>
@@ -7789,17 +8016,19 @@
         </p:nvSpPr>
         <p:spPr>
           <a:xfrm>
-            <a:off x="2734056" y="3895344"/>
-            <a:ext cx="310896" cy="256032"/>
-          </a:xfrm>
-          <a:prstGeom prst="rightArrow">
+            <a:off x="612648" y="3566160"/>
+            <a:ext cx="2103120" cy="868680"/>
+          </a:xfrm>
+          <a:prstGeom prst="roundRect">
             <a:avLst/>
           </a:prstGeom>
           <a:solidFill>
-            <a:srgbClr val="9BBB59"/>
-          </a:solidFill>
-          <a:ln>
-            <a:noFill/>
+            <a:srgbClr val="003366"/>
+          </a:solidFill>
+          <a:ln w="12700">
+            <a:solidFill>
+              <a:srgbClr val="000000"/>
+            </a:solidFill>
           </a:ln>
         </p:spPr>
         <p:txBody>
@@ -7808,17 +8037,47 @@
           </a:bodyPr>
           <a:lstStyle/>
           <a:p>
-            <a:pPr>
-              <a:lnSpc>
-                <a:spcPct val="100000"/>
-              </a:lnSpc>
-            </a:pPr>
-          </a:p>
-        </p:txBody>
-      </p:sp>
-      <p:sp>
-        <p:nvSpPr>
-          <p:cNvPr id="17432" name="stage"/>
+            <a:pPr algn="ctr">
+              <a:lnSpc>
+                <a:spcPct val="100000"/>
+              </a:lnSpc>
+            </a:pPr>
+            <a:r>
+              <a:rPr lang="en-US" sz="1100" b="1" dirty="0">
+                <a:solidFill>
+                  <a:srgbClr val="FFFFFF"/>
+                </a:solidFill>
+                <a:latin typeface="Arial"/>
+                <a:ea typeface="Arial"/>
+                <a:cs typeface="Arial"/>
+              </a:rPr>
+              <a:t>Mock today</a:t>
+            </a:r>
+          </a:p>
+          <a:p>
+            <a:pPr algn="ctr">
+              <a:lnSpc>
+                <a:spcPct val="100000"/>
+              </a:lnSpc>
+            </a:pPr>
+            <a:r>
+              <a:rPr lang="en-US" sz="900" dirty="0">
+                <a:solidFill>
+                  <a:srgbClr val="FFFFFF"/>
+                </a:solidFill>
+                <a:latin typeface="Arial"/>
+                <a:ea typeface="Arial"/>
+                <a:cs typeface="Arial"/>
+              </a:rPr>
+              <a:t>real captures
+32 tests green</a:t>
+            </a:r>
+          </a:p>
+        </p:txBody>
+      </p:sp>
+      <p:sp>
+        <p:nvSpPr>
+          <p:cNvPr id="17432" name="arr"/>
           <p:cNvSpPr>
             <a:spLocks noChangeAspect="0"/>
           </p:cNvSpPr>
@@ -7826,14 +8085,14 @@
         </p:nvSpPr>
         <p:spPr>
           <a:xfrm>
-            <a:off x="3063240" y="3566160"/>
-            <a:ext cx="2103120" cy="914400"/>
-          </a:xfrm>
-          <a:prstGeom prst="roundRect">
+            <a:off x="2734056" y="3877056"/>
+            <a:ext cx="310896" cy="256032"/>
+          </a:xfrm>
+          <a:prstGeom prst="rightArrow">
             <a:avLst/>
           </a:prstGeom>
           <a:solidFill>
-            <a:srgbClr val="4F81BD"/>
+            <a:srgbClr val="5AAA46"/>
           </a:solidFill>
           <a:ln>
             <a:noFill/>
@@ -7845,47 +8104,17 @@
           </a:bodyPr>
           <a:lstStyle/>
           <a:p>
-            <a:pPr algn="ctr" marL="0">
-              <a:lnSpc>
-                <a:spcPct val="100000"/>
-              </a:lnSpc>
-            </a:pPr>
-            <a:r>
-              <a:rPr lang="en-US" sz="1100" b="1" dirty="0">
-                <a:solidFill>
-                  <a:srgbClr val="FFFFFF"/>
-                </a:solidFill>
-                <a:latin typeface="Arial"/>
-                <a:ea typeface="Arial"/>
-                <a:cs typeface="Arial"/>
-              </a:rPr>
-              <a:t>Live pipeline</a:t>
-            </a:r>
-          </a:p>
-          <a:p>
-            <a:pPr algn="ctr" marL="0">
-              <a:lnSpc>
-                <a:spcPct val="100000"/>
-              </a:lnSpc>
-            </a:pPr>
-            <a:r>
-              <a:rPr lang="en-US" sz="900" dirty="0">
-                <a:solidFill>
-                  <a:srgbClr val="FFFFFF"/>
-                </a:solidFill>
-                <a:latin typeface="Arial"/>
-                <a:ea typeface="Arial"/>
-                <a:cs typeface="Arial"/>
-              </a:rPr>
-              <a:t>keyed APIs
-static IP + JWT</a:t>
-            </a:r>
-          </a:p>
-        </p:txBody>
-      </p:sp>
-      <p:sp>
-        <p:nvSpPr>
-          <p:cNvPr id="17433" name="arr"/>
+            <a:pPr>
+              <a:lnSpc>
+                <a:spcPct val="100000"/>
+              </a:lnSpc>
+            </a:pPr>
+          </a:p>
+        </p:txBody>
+      </p:sp>
+      <p:sp>
+        <p:nvSpPr>
+          <p:cNvPr id="17433" name="stage"/>
           <p:cNvSpPr>
             <a:spLocks noChangeAspect="0"/>
           </p:cNvSpPr>
@@ -7893,17 +8122,19 @@
         </p:nvSpPr>
         <p:spPr>
           <a:xfrm>
-            <a:off x="5184648" y="3895344"/>
-            <a:ext cx="310896" cy="256032"/>
-          </a:xfrm>
-          <a:prstGeom prst="rightArrow">
+            <a:off x="3063240" y="3566160"/>
+            <a:ext cx="2103120" cy="868680"/>
+          </a:xfrm>
+          <a:prstGeom prst="roundRect">
             <a:avLst/>
           </a:prstGeom>
           <a:solidFill>
-            <a:srgbClr val="9BBB59"/>
-          </a:solidFill>
-          <a:ln>
-            <a:noFill/>
+            <a:srgbClr val="4F81BD"/>
+          </a:solidFill>
+          <a:ln w="12700">
+            <a:solidFill>
+              <a:srgbClr val="000000"/>
+            </a:solidFill>
           </a:ln>
         </p:spPr>
         <p:txBody>
@@ -7912,17 +8143,47 @@
           </a:bodyPr>
           <a:lstStyle/>
           <a:p>
-            <a:pPr>
-              <a:lnSpc>
-                <a:spcPct val="100000"/>
-              </a:lnSpc>
-            </a:pPr>
-          </a:p>
-        </p:txBody>
-      </p:sp>
-      <p:sp>
-        <p:nvSpPr>
-          <p:cNvPr id="17434" name="stage"/>
+            <a:pPr algn="ctr">
+              <a:lnSpc>
+                <a:spcPct val="100000"/>
+              </a:lnSpc>
+            </a:pPr>
+            <a:r>
+              <a:rPr lang="en-US" sz="1100" b="1" dirty="0">
+                <a:solidFill>
+                  <a:srgbClr val="FFFFFF"/>
+                </a:solidFill>
+                <a:latin typeface="Arial"/>
+                <a:ea typeface="Arial"/>
+                <a:cs typeface="Arial"/>
+              </a:rPr>
+              <a:t>Live pipeline</a:t>
+            </a:r>
+          </a:p>
+          <a:p>
+            <a:pPr algn="ctr">
+              <a:lnSpc>
+                <a:spcPct val="100000"/>
+              </a:lnSpc>
+            </a:pPr>
+            <a:r>
+              <a:rPr lang="en-US" sz="900" dirty="0">
+                <a:solidFill>
+                  <a:srgbClr val="FFFFFF"/>
+                </a:solidFill>
+                <a:latin typeface="Arial"/>
+                <a:ea typeface="Arial"/>
+                <a:cs typeface="Arial"/>
+              </a:rPr>
+              <a:t>keyed APIs
+static IP + JWT</a:t>
+            </a:r>
+          </a:p>
+        </p:txBody>
+      </p:sp>
+      <p:sp>
+        <p:nvSpPr>
+          <p:cNvPr id="17434" name="arr"/>
           <p:cNvSpPr>
             <a:spLocks noChangeAspect="0"/>
           </p:cNvSpPr>
@@ -7930,14 +8191,14 @@
         </p:nvSpPr>
         <p:spPr>
           <a:xfrm>
-            <a:off x="5513832" y="3566160"/>
-            <a:ext cx="2103120" cy="914400"/>
-          </a:xfrm>
-          <a:prstGeom prst="roundRect">
+            <a:off x="5184648" y="3877056"/>
+            <a:ext cx="310896" cy="256032"/>
+          </a:xfrm>
+          <a:prstGeom prst="rightArrow">
             <a:avLst/>
           </a:prstGeom>
           <a:solidFill>
-            <a:srgbClr val="4F81BD"/>
+            <a:srgbClr val="5AAA46"/>
           </a:solidFill>
           <a:ln>
             <a:noFill/>
@@ -7949,47 +8210,17 @@
           </a:bodyPr>
           <a:lstStyle/>
           <a:p>
-            <a:pPr algn="ctr" marL="0">
-              <a:lnSpc>
-                <a:spcPct val="100000"/>
-              </a:lnSpc>
-            </a:pPr>
-            <a:r>
-              <a:rPr lang="en-US" sz="1100" b="1" dirty="0">
-                <a:solidFill>
-                  <a:srgbClr val="FFFFFF"/>
-                </a:solidFill>
-                <a:latin typeface="Arial"/>
-                <a:ea typeface="Arial"/>
-                <a:cs typeface="Arial"/>
-              </a:rPr>
-              <a:t>Finale</a:t>
-            </a:r>
-          </a:p>
-          <a:p>
-            <a:pPr algn="ctr" marL="0">
-              <a:lnSpc>
-                <a:spcPct val="100000"/>
-              </a:lnSpc>
-            </a:pPr>
-            <a:r>
-              <a:rPr lang="en-US" sz="900" dirty="0">
-                <a:solidFill>
-                  <a:srgbClr val="FFFFFF"/>
-                </a:solidFill>
-                <a:latin typeface="Arial"/>
-                <a:ea typeface="Arial"/>
-                <a:cs typeface="Arial"/>
-              </a:rPr>
-              <a:t>3 personas · push
-labelled adapters</a:t>
-            </a:r>
-          </a:p>
-        </p:txBody>
-      </p:sp>
-      <p:sp>
-        <p:nvSpPr>
-          <p:cNvPr id="17435" name="replay"/>
+            <a:pPr>
+              <a:lnSpc>
+                <a:spcPct val="100000"/>
+              </a:lnSpc>
+            </a:pPr>
+          </a:p>
+        </p:txBody>
+      </p:sp>
+      <p:sp>
+        <p:nvSpPr>
+          <p:cNvPr id="17435" name="stage"/>
           <p:cNvSpPr>
             <a:spLocks noChangeAspect="0"/>
           </p:cNvSpPr>
@@ -7997,18 +8228,18 @@
         </p:nvSpPr>
         <p:spPr>
           <a:xfrm>
-            <a:off x="612648" y="4617720"/>
-            <a:ext cx="3657600" cy="868680"/>
+            <a:off x="5513832" y="3566160"/>
+            <a:ext cx="2103120" cy="868680"/>
           </a:xfrm>
           <a:prstGeom prst="roundRect">
             <a:avLst/>
           </a:prstGeom>
           <a:solidFill>
-            <a:srgbClr val="EAF1F8"/>
+            <a:srgbClr val="4F81BD"/>
           </a:solidFill>
           <a:ln w="12700">
             <a:solidFill>
-              <a:srgbClr val="003366"/>
+              <a:srgbClr val="000000"/>
             </a:solidFill>
           </a:ln>
         </p:spPr>
@@ -8018,28 +8249,47 @@
           </a:bodyPr>
           <a:lstStyle/>
           <a:p>
-            <a:pPr algn="ctr" marL="0">
-              <a:lnSpc>
-                <a:spcPct val="100000"/>
-              </a:lnSpc>
-            </a:pPr>
-            <a:r>
-              <a:rPr lang="en-US" sz="1000" b="1" dirty="0">
-                <a:solidFill>
-                  <a:srgbClr val="003366"/>
-                </a:solidFill>
-                <a:latin typeface="Arial"/>
-                <a:ea typeface="Arial"/>
-                <a:cs typeface="Arial"/>
-              </a:rPr>
-              <a:t>REPLAY  logged inputs → rule chain → byte-identical card ↺</a:t>
-            </a:r>
-          </a:p>
-        </p:txBody>
-      </p:sp>
-      <p:sp>
-        <p:nvSpPr>
-          <p:cNvPr id="17436" name="ainote"/>
+            <a:pPr algn="ctr">
+              <a:lnSpc>
+                <a:spcPct val="100000"/>
+              </a:lnSpc>
+            </a:pPr>
+            <a:r>
+              <a:rPr lang="en-US" sz="1100" b="1" dirty="0">
+                <a:solidFill>
+                  <a:srgbClr val="FFFFFF"/>
+                </a:solidFill>
+                <a:latin typeface="Arial"/>
+                <a:ea typeface="Arial"/>
+                <a:cs typeface="Arial"/>
+              </a:rPr>
+              <a:t>Finale</a:t>
+            </a:r>
+          </a:p>
+          <a:p>
+            <a:pPr algn="ctr">
+              <a:lnSpc>
+                <a:spcPct val="100000"/>
+              </a:lnSpc>
+            </a:pPr>
+            <a:r>
+              <a:rPr lang="en-US" sz="900" dirty="0">
+                <a:solidFill>
+                  <a:srgbClr val="FFFFFF"/>
+                </a:solidFill>
+                <a:latin typeface="Arial"/>
+                <a:ea typeface="Arial"/>
+                <a:cs typeface="Arial"/>
+              </a:rPr>
+              <a:t>3 personas · push
+labelled adapters</a:t>
+            </a:r>
+          </a:p>
+        </p:txBody>
+      </p:sp>
+      <p:sp>
+        <p:nvSpPr>
+          <p:cNvPr id="17436" name="panel"/>
           <p:cNvSpPr>
             <a:spLocks noChangeAspect="0"/>
           </p:cNvSpPr>
@@ -8047,18 +8297,18 @@
         </p:nvSpPr>
         <p:spPr>
           <a:xfrm>
-            <a:off x="4389120" y="4617720"/>
-            <a:ext cx="3172968" cy="868680"/>
+            <a:off x="612648" y="4617720"/>
+            <a:ext cx="3566160" cy="1417320"/>
           </a:xfrm>
           <a:prstGeom prst="roundRect">
             <a:avLst/>
           </a:prstGeom>
           <a:solidFill>
-            <a:srgbClr val="EAF1F8"/>
-          </a:solidFill>
-          <a:ln w="12700">
+            <a:srgbClr val="F6E43B"/>
+          </a:solidFill>
+          <a:ln w="19050">
             <a:solidFill>
-              <a:srgbClr val="9BBB59"/>
+              <a:srgbClr val="000000"/>
             </a:solidFill>
           </a:ln>
         </p:spPr>
@@ -8068,7 +8318,25 @@
           </a:bodyPr>
           <a:lstStyle/>
           <a:p>
-            <a:pPr algn="ctr" marL="0">
+            <a:pPr algn="ctr">
+              <a:lnSpc>
+                <a:spcPct val="100000"/>
+              </a:lnSpc>
+            </a:pPr>
+            <a:r>
+              <a:rPr lang="en-US" sz="1100" b="1" dirty="0">
+                <a:solidFill>
+                  <a:srgbClr val="003366"/>
+                </a:solidFill>
+                <a:latin typeface="Arial"/>
+                <a:ea typeface="Arial"/>
+                <a:cs typeface="Arial"/>
+              </a:rPr>
+              <a:t>REPLAY</a:t>
+            </a:r>
+          </a:p>
+          <a:p>
+            <a:pPr algn="ctr">
               <a:lnSpc>
                 <a:spcPct val="100000"/>
               </a:lnSpc>
@@ -8082,14 +8350,14 @@
                 <a:ea typeface="Arial"/>
                 <a:cs typeface="Arial"/>
               </a:rPr>
-              <a:t>AI only where justified: grounded bot + template fallback. No model invents weather.</a:t>
-            </a:r>
-          </a:p>
-        </p:txBody>
-      </p:sp>
-      <p:sp>
-        <p:nvSpPr>
-          <p:cNvPr id="17437" name="protohead"/>
+              <a:t>logged inputs → rule chain → byte-identical card ↺</a:t>
+            </a:r>
+          </a:p>
+        </p:txBody>
+      </p:sp>
+      <p:sp>
+        <p:nvSpPr>
+          <p:cNvPr id="17437" name="panel"/>
           <p:cNvSpPr>
             <a:spLocks noChangeAspect="0"/>
           </p:cNvSpPr>
@@ -8097,45 +8365,117 @@
         </p:nvSpPr>
         <p:spPr>
           <a:xfrm>
-            <a:off x="7863840" y="3246120"/>
-            <a:ext cx="3703320" cy="274320"/>
-          </a:xfrm>
-          <a:prstGeom prst="rect">
+            <a:off x="4361688" y="4617720"/>
+            <a:ext cx="3246120" cy="1417320"/>
+          </a:xfrm>
+          <a:prstGeom prst="roundRect">
             <a:avLst/>
           </a:prstGeom>
-          <a:noFill/>
+          <a:solidFill>
+            <a:srgbClr val="D9EAFB"/>
+          </a:solidFill>
+          <a:ln w="19050">
+            <a:solidFill>
+              <a:srgbClr val="000000"/>
+            </a:solidFill>
+          </a:ln>
+        </p:spPr>
+        <p:txBody>
+          <a:bodyPr anchor="ctr" wrap="square">
+            <a:normAutofit/>
+          </a:bodyPr>
+          <a:lstStyle/>
+          <a:p>
+            <a:pPr algn="ctr">
+              <a:lnSpc>
+                <a:spcPct val="100000"/>
+              </a:lnSpc>
+            </a:pPr>
+            <a:r>
+              <a:rPr lang="en-US" sz="1100" b="1" dirty="0">
+                <a:solidFill>
+                  <a:srgbClr val="003366"/>
+                </a:solidFill>
+                <a:latin typeface="Arial"/>
+                <a:ea typeface="Arial"/>
+                <a:cs typeface="Arial"/>
+              </a:rPr>
+              <a:t>AI only where justified</a:t>
+            </a:r>
+          </a:p>
+          <a:p>
+            <a:pPr algn="ctr">
+              <a:lnSpc>
+                <a:spcPct val="100000"/>
+              </a:lnSpc>
+            </a:pPr>
+            <a:r>
+              <a:rPr lang="en-US" sz="1000" dirty="0">
+                <a:solidFill>
+                  <a:srgbClr val="1A1A1A"/>
+                </a:solidFill>
+                <a:latin typeface="Arial"/>
+                <a:ea typeface="Arial"/>
+                <a:cs typeface="Arial"/>
+              </a:rPr>
+              <a:t>grounded bot + template fallback. No model invents weather.</a:t>
+            </a:r>
+          </a:p>
+        </p:txBody>
+      </p:sp>
+      <p:sp>
+        <p:nvSpPr>
+          <p:cNvPr id="17438" name="chip"/>
+          <p:cNvSpPr>
+            <a:spLocks noChangeAspect="0"/>
+          </p:cNvSpPr>
+          <p:nvPr/>
+        </p:nvSpPr>
+        <p:spPr>
+          <a:xfrm>
+            <a:off x="7863840" y="932688"/>
+            <a:ext cx="3703320" cy="310896"/>
+          </a:xfrm>
+          <a:prstGeom prst="roundRect">
+            <a:avLst>
+              <a:gd name="adj" fmla="val 50000"/>
+            </a:avLst>
+          </a:prstGeom>
+          <a:solidFill>
+            <a:srgbClr val="2E9E4F"/>
+          </a:solidFill>
           <a:ln>
             <a:noFill/>
           </a:ln>
         </p:spPr>
         <p:txBody>
-          <a:bodyPr anchor="t" wrap="square">
+          <a:bodyPr anchor="ctr" wrap="square">
             <a:normAutofit/>
           </a:bodyPr>
           <a:lstStyle/>
           <a:p>
-            <a:pPr algn="ctr" marL="0">
-              <a:lnSpc>
-                <a:spcPct val="100000"/>
-              </a:lnSpc>
-            </a:pPr>
-            <a:r>
-              <a:rPr lang="en-US" sz="1000" b="1" dirty="0">
-                <a:solidFill>
-                  <a:srgbClr val="003366"/>
-                </a:solidFill>
-                <a:latin typeface="Arial"/>
-                <a:ea typeface="Arial"/>
-                <a:cs typeface="Arial"/>
-              </a:rPr>
-              <a:t>Working prototype (illustrative screenshot)</a:t>
+            <a:pPr algn="ctr">
+              <a:lnSpc>
+                <a:spcPct val="100000"/>
+              </a:lnSpc>
+            </a:pPr>
+            <a:r>
+              <a:rPr lang="en-US" sz="800" b="1" dirty="0">
+                <a:solidFill>
+                  <a:srgbClr val="FFFFFF"/>
+                </a:solidFill>
+                <a:latin typeface="Arial"/>
+                <a:ea typeface="Arial"/>
+                <a:cs typeface="Arial"/>
+              </a:rPr>
+              <a:t>WORKING PROTOTYPE · ASSISTANT DESIGN PREVIEW</a:t>
             </a:r>
           </a:p>
         </p:txBody>
       </p:sp>
       <p:pic>
         <p:nvPicPr>
-          <p:cNvPr id="17438" name="shot-proto"/>
+          <p:cNvPr id="17439" name="shot-proto"/>
           <p:cNvPicPr/>
         </p:nvPicPr>
         <p:blipFill>
@@ -8146,21 +8486,100 @@
         </p:blipFill>
         <p:spPr>
           <a:xfrm>
-            <a:off x="8732520" y="3566160"/>
-            <a:ext cx="1234440" cy="2377440"/>
+            <a:off x="8229600" y="1389888"/>
+            <a:ext cx="1463040" cy="3163824"/>
           </a:xfrm>
           <a:prstGeom prst="roundRect">
             <a:avLst/>
           </a:prstGeom>
           <a:noFill/>
+          <a:ln w="19050">
+            <a:solidFill>
+              <a:srgbClr val="000000"/>
+            </a:solidFill>
+          </a:ln>
+        </p:spPr>
+      </p:pic>
+      <p:pic>
+        <p:nvPicPr>
+          <p:cNvPr id="17440" name="shot-ai"/>
+          <p:cNvPicPr/>
+        </p:nvPicPr>
+        <p:blipFill>
+          <a:blip r:embed="rId5"/>
+          <a:stretch>
+            <a:fillRect/>
+          </a:stretch>
+        </p:blipFill>
+        <p:spPr>
+          <a:xfrm>
+            <a:off x="9829800" y="1389888"/>
+            <a:ext cx="1344168" cy="3154680"/>
+          </a:xfrm>
+          <a:prstGeom prst="roundRect">
+            <a:avLst/>
+          </a:prstGeom>
+          <a:noFill/>
+          <a:ln w="19050">
+            <a:solidFill>
+              <a:srgbClr val="000000"/>
+            </a:solidFill>
+          </a:ln>
+        </p:spPr>
+      </p:pic>
+      <p:sp>
+        <p:nvSpPr>
+          <p:cNvPr id="17441" name="chip"/>
+          <p:cNvSpPr>
+            <a:spLocks noChangeAspect="0"/>
+          </p:cNvSpPr>
+          <p:nvPr/>
+        </p:nvSpPr>
+        <p:spPr>
+          <a:xfrm>
+            <a:off x="8229600" y="4626864"/>
+            <a:ext cx="1463040" cy="292608"/>
+          </a:xfrm>
+          <a:prstGeom prst="roundRect">
+            <a:avLst>
+              <a:gd name="adj" fmla="val 50000"/>
+            </a:avLst>
+          </a:prstGeom>
+          <a:solidFill>
+            <a:srgbClr val="F6E43B"/>
+          </a:solidFill>
           <a:ln>
             <a:noFill/>
           </a:ln>
         </p:spPr>
-      </p:pic>
-      <p:sp>
-        <p:nvSpPr>
-          <p:cNvPr id="17439" name="protocap"/>
+        <p:txBody>
+          <a:bodyPr anchor="ctr" wrap="square">
+            <a:normAutofit/>
+          </a:bodyPr>
+          <a:lstStyle/>
+          <a:p>
+            <a:pPr algn="ctr">
+              <a:lnSpc>
+                <a:spcPct val="100000"/>
+              </a:lnSpc>
+            </a:pPr>
+            <a:r>
+              <a:rPr lang="en-US" sz="650" b="1" dirty="0">
+                <a:solidFill>
+                  <a:srgbClr val="000000"/>
+                </a:solidFill>
+                <a:latin typeface="Arial"/>
+                <a:ea typeface="Arial"/>
+                <a:cs typeface="Arial"/>
+              </a:rPr>
+              <a:t>BYTE-IDENTICAL REPLAY</a:t>
+            </a:r>
+          </a:p>
+        </p:txBody>
+      </p:sp>
+      <p:sp>
+        <p:nvSpPr>
+          <p:cNvPr id="17442" name="chip"/>
           <p:cNvSpPr>
             <a:spLocks noChangeAspect="0"/>
           </p:cNvSpPr>
@@ -8168,38 +8587,92 @@
         </p:nvSpPr>
         <p:spPr>
           <a:xfrm>
-            <a:off x="7863840" y="5961888"/>
-            <a:ext cx="3703320" cy="256032"/>
-          </a:xfrm>
-          <a:prstGeom prst="rect">
-            <a:avLst/>
-          </a:prstGeom>
-          <a:noFill/>
+            <a:off x="9829800" y="4626864"/>
+            <a:ext cx="1344168" cy="292608"/>
+          </a:xfrm>
+          <a:prstGeom prst="roundRect">
+            <a:avLst>
+              <a:gd name="adj" fmla="val 50000"/>
+            </a:avLst>
+          </a:prstGeom>
+          <a:solidFill>
+            <a:srgbClr val="F6E43B"/>
+          </a:solidFill>
           <a:ln>
             <a:noFill/>
           </a:ln>
         </p:spPr>
         <p:txBody>
-          <a:bodyPr anchor="t" wrap="square">
+          <a:bodyPr anchor="ctr" wrap="square">
             <a:normAutofit/>
           </a:bodyPr>
           <a:lstStyle/>
           <a:p>
-            <a:pPr algn="ctr" marL="0">
-              <a:lnSpc>
-                <a:spcPct val="100000"/>
-              </a:lnSpc>
-            </a:pPr>
-            <a:r>
-              <a:rPr lang="en-US" sz="900" dirty="0">
-                <a:solidFill>
-                  <a:srgbClr val="595959"/>
-                </a:solidFill>
-                <a:latin typeface="Arial"/>
-                <a:ea typeface="Arial"/>
-                <a:cs typeface="Arial"/>
-              </a:rPr>
-              <a:t>replay reproduces this card byte-identically</a:t>
+            <a:pPr algn="ctr">
+              <a:lnSpc>
+                <a:spcPct val="100000"/>
+              </a:lnSpc>
+            </a:pPr>
+            <a:r>
+              <a:rPr lang="en-US" sz="650" b="1" dirty="0">
+                <a:solidFill>
+                  <a:srgbClr val="000000"/>
+                </a:solidFill>
+                <a:latin typeface="Arial"/>
+                <a:ea typeface="Arial"/>
+                <a:cs typeface="Arial"/>
+              </a:rPr>
+              <a:t>MAUSAM[AI] · DESIGN</a:t>
+            </a:r>
+          </a:p>
+        </p:txBody>
+      </p:sp>
+      <p:sp>
+        <p:nvSpPr>
+          <p:cNvPr id="17443" name="panel"/>
+          <p:cNvSpPr>
+            <a:spLocks noChangeAspect="0"/>
+          </p:cNvSpPr>
+          <p:nvPr/>
+        </p:nvSpPr>
+        <p:spPr>
+          <a:xfrm>
+            <a:off x="7863840" y="5047488"/>
+            <a:ext cx="3703320" cy="987552"/>
+          </a:xfrm>
+          <a:prstGeom prst="roundRect">
+            <a:avLst/>
+          </a:prstGeom>
+          <a:solidFill>
+            <a:srgbClr val="D9EAFB"/>
+          </a:solidFill>
+          <a:ln w="19050">
+            <a:solidFill>
+              <a:srgbClr val="000000"/>
+            </a:solidFill>
+          </a:ln>
+        </p:spPr>
+        <p:txBody>
+          <a:bodyPr anchor="ctr" wrap="square">
+            <a:normAutofit/>
+          </a:bodyPr>
+          <a:lstStyle/>
+          <a:p>
+            <a:pPr algn="ctr">
+              <a:lnSpc>
+                <a:spcPct val="100000"/>
+              </a:lnSpc>
+            </a:pPr>
+            <a:r>
+              <a:rPr lang="en-US" sz="950" dirty="0">
+                <a:solidFill>
+                  <a:srgbClr val="1A1A1A"/>
+                </a:solidFill>
+                <a:latin typeface="Arial"/>
+                <a:ea typeface="Arial"/>
+                <a:cs typeface="Arial"/>
+              </a:rPr>
+              <a:t>Mock runs offline on captured IMD payloads; the keyed gateway is the Day-1 critical path.</a:t>
             </a:r>
           </a:p>
         </p:txBody>
@@ -8323,15 +8796,11 @@
           <a:bodyPr/>
           <a:lstStyle/>
           <a:p>
-            <a:pPr eaLnBrk="1" hangingPunct="1"/>
-            <a:r>
-              <a:rPr lang="en-US" sz="3600" b="1" dirty="0">
-                <a:latin typeface="Times New Roman" panose="02020603050405020304" pitchFamily="18" charset="0"/>
-                <a:ea typeface="ＭＳ Ｐゴシック" pitchFamily="1" charset="-128"/>
-                <a:cs typeface="Times New Roman" panose="02020603050405020304" pitchFamily="18" charset="0"/>
-              </a:rPr>
-              <a:t>FEASIBILITY AND VIABILITY</a:t>
-            </a:r>
+            <a:pPr>
+              <a:lnSpc>
+                <a:spcPct val="100000"/>
+              </a:lnSpc>
+            </a:pPr>
           </a:p>
         </p:txBody>
       </p:sp>
@@ -8545,7 +9014,7 @@
         <p:spPr>
           <a:xfrm>
             <a:off x="329773" y="252246"/>
-            <a:ext cx="1251857" cy="807334"/>
+            <a:ext cx="1783080" cy="804672"/>
           </a:xfrm>
           <a:prstGeom prst="ellipse">
             <a:avLst/>
@@ -8571,7 +9040,11 @@
           <a:p>
             <a:pPr algn="ctr"/>
             <a:r>
-              <a:rPr lang="en-US" dirty="0"/>
+              <a:rPr lang="en-US" sz="1100" dirty="0">
+                <a:solidFill>
+                  <a:srgbClr val="003366"/>
+                </a:solidFill>
+              </a:rPr>
               <a:t>Zencoderss</a:t>
             </a:r>
             <a:endParaRPr lang="en-IN" dirty="0"/>
@@ -8610,7 +9083,7 @@
       </p:pic>
       <p:sp>
         <p:nvSpPr>
-          <p:cNvPr id="17412" name="feas"/>
+          <p:cNvPr id="17412" name="heading_pill"/>
           <p:cNvSpPr>
             <a:spLocks noChangeAspect="0"/>
           </p:cNvSpPr>
@@ -8618,8 +9091,108 @@
         </p:nvSpPr>
         <p:spPr>
           <a:xfrm>
-            <a:off x="612648" y="1115568"/>
-            <a:ext cx="10972800" cy="530352"/>
+            <a:off x="2781148" y="164592"/>
+            <a:ext cx="6629400" cy="676656"/>
+          </a:xfrm>
+          <a:prstGeom prst="roundRect">
+            <a:avLst>
+              <a:gd name="adj" fmla="val 50000"/>
+            </a:avLst>
+          </a:prstGeom>
+          <a:solidFill>
+            <a:srgbClr val="2E9E4F"/>
+          </a:solidFill>
+          <a:ln>
+            <a:noFill/>
+          </a:ln>
+        </p:spPr>
+        <p:txBody>
+          <a:bodyPr anchor="ctr" wrap="square">
+            <a:normAutofit/>
+          </a:bodyPr>
+          <a:lstStyle/>
+          <a:p>
+            <a:pPr algn="ctr">
+              <a:lnSpc>
+                <a:spcPct val="100000"/>
+              </a:lnSpc>
+            </a:pPr>
+            <a:r>
+              <a:rPr lang="en-US" sz="2400" b="1" dirty="0">
+                <a:solidFill>
+                  <a:srgbClr val="FFFFFF"/>
+                </a:solidFill>
+                <a:latin typeface="Arial Black"/>
+                <a:ea typeface="Arial Black"/>
+                <a:cs typeface="Arial Black"/>
+              </a:rPr>
+              <a:t>FEASIBILITY AND VIABILITY</a:t>
+            </a:r>
+          </a:p>
+        </p:txBody>
+      </p:sp>
+      <p:sp>
+        <p:nvSpPr>
+          <p:cNvPr id="17413" name="chip"/>
+          <p:cNvSpPr>
+            <a:spLocks noChangeAspect="0"/>
+          </p:cNvSpPr>
+          <p:nvPr/>
+        </p:nvSpPr>
+        <p:spPr>
+          <a:xfrm>
+            <a:off x="612648" y="932688"/>
+            <a:ext cx="4297680" cy="310896"/>
+          </a:xfrm>
+          <a:prstGeom prst="roundRect">
+            <a:avLst>
+              <a:gd name="adj" fmla="val 50000"/>
+            </a:avLst>
+          </a:prstGeom>
+          <a:solidFill>
+            <a:srgbClr val="003366"/>
+          </a:solidFill>
+          <a:ln>
+            <a:noFill/>
+          </a:ln>
+        </p:spPr>
+        <p:txBody>
+          <a:bodyPr anchor="ctr" wrap="square">
+            <a:normAutofit/>
+          </a:bodyPr>
+          <a:lstStyle/>
+          <a:p>
+            <a:pPr algn="ctr">
+              <a:lnSpc>
+                <a:spcPct val="100000"/>
+              </a:lnSpc>
+            </a:pPr>
+            <a:r>
+              <a:rPr lang="en-US" sz="800" b="1" dirty="0">
+                <a:solidFill>
+                  <a:srgbClr val="FFFFFF"/>
+                </a:solidFill>
+                <a:latin typeface="Arial"/>
+                <a:ea typeface="Arial"/>
+                <a:cs typeface="Arial"/>
+              </a:rPr>
+              <a:t>Analysis of the feasibility of the idea</a:t>
+            </a:r>
+          </a:p>
+        </p:txBody>
+      </p:sp>
+      <p:sp>
+        <p:nvSpPr>
+          <p:cNvPr id="17414" name="feas"/>
+          <p:cNvSpPr>
+            <a:spLocks noChangeAspect="0"/>
+          </p:cNvSpPr>
+          <p:nvPr/>
+        </p:nvSpPr>
+        <p:spPr>
+          <a:xfrm>
+            <a:off x="612648" y="1316736"/>
+            <a:ext cx="10954512" cy="292608"/>
           </a:xfrm>
           <a:prstGeom prst="rect">
             <a:avLst/>
@@ -8635,31 +9208,13 @@
           </a:bodyPr>
           <a:lstStyle/>
           <a:p>
-            <a:pPr algn="l" marL="0">
-              <a:lnSpc>
-                <a:spcPct val="100000"/>
-              </a:lnSpc>
-            </a:pPr>
-            <a:r>
-              <a:rPr lang="en-US" sz="1000" b="1" dirty="0">
-                <a:solidFill>
-                  <a:srgbClr val="003366"/>
-                </a:solidFill>
-                <a:latin typeface="Arial"/>
-                <a:ea typeface="Arial"/>
-                <a:cs typeface="Arial"/>
-              </a:rPr>
-              <a:t>Analysis of the feasibility of the idea</a:t>
-            </a:r>
-          </a:p>
-          <a:p>
-            <a:pPr algn="l" marL="0">
-              <a:lnSpc>
-                <a:spcPct val="100000"/>
-              </a:lnSpc>
-            </a:pPr>
-            <a:r>
-              <a:rPr lang="en-US" sz="1200" dirty="0">
+            <a:pPr algn="l">
+              <a:lnSpc>
+                <a:spcPct val="100000"/>
+              </a:lnSpc>
+            </a:pPr>
+            <a:r>
+              <a:rPr lang="en-US" sz="1100" dirty="0">
                 <a:solidFill>
                   <a:srgbClr val="1A1A1A"/>
                 </a:solidFill>
@@ -8667,14 +9222,36 @@
                 <a:ea typeface="Arial"/>
                 <a:cs typeface="Arial"/>
               </a:rPr>
-              <a:t>The mock runs offline on real captured IMD payloads. 32 tests green. Each risk below has a working fallback.</a:t>
-            </a:r>
-          </a:p>
-        </p:txBody>
-      </p:sp>
-      <p:sp>
-        <p:nvSpPr>
-          <p:cNvPr id="17413" name="h1"/>
+              <a:t>The mock runs offline on real captured IMD payloads. </a:t>
+            </a:r>
+            <a:r>
+              <a:rPr lang="en-US" sz="1100" b="1" dirty="0">
+                <a:solidFill>
+                  <a:srgbClr val="2E9E4F"/>
+                </a:solidFill>
+                <a:latin typeface="Arial"/>
+                <a:ea typeface="Arial"/>
+                <a:cs typeface="Arial"/>
+              </a:rPr>
+              <a:t>32 tests green.</a:t>
+            </a:r>
+            <a:r>
+              <a:rPr lang="en-US" sz="1100" dirty="0">
+                <a:solidFill>
+                  <a:srgbClr val="1A1A1A"/>
+                </a:solidFill>
+                <a:latin typeface="Arial"/>
+                <a:ea typeface="Arial"/>
+                <a:cs typeface="Arial"/>
+              </a:rPr>
+              <a:t> Each risk below has a working fallback.</a:t>
+            </a:r>
+          </a:p>
+        </p:txBody>
+      </p:sp>
+      <p:sp>
+        <p:nvSpPr>
+          <p:cNvPr id="17415" name="chip"/>
           <p:cNvSpPr>
             <a:spLocks noChangeAspect="0"/>
           </p:cNvSpPr>
@@ -8682,111 +9259,19 @@
         </p:nvSpPr>
         <p:spPr>
           <a:xfrm>
-            <a:off x="612648" y="1682496"/>
-            <a:ext cx="5349240" cy="292608"/>
-          </a:xfrm>
-          <a:prstGeom prst="rect">
-            <a:avLst/>
-          </a:prstGeom>
-          <a:noFill/>
+            <a:off x="612648" y="1700784"/>
+            <a:ext cx="4480560" cy="310896"/>
+          </a:xfrm>
+          <a:prstGeom prst="roundRect">
+            <a:avLst>
+              <a:gd name="adj" fmla="val 50000"/>
+            </a:avLst>
+          </a:prstGeom>
+          <a:solidFill>
+            <a:srgbClr val="003366"/>
+          </a:solidFill>
           <a:ln>
             <a:noFill/>
-          </a:ln>
-        </p:spPr>
-        <p:txBody>
-          <a:bodyPr anchor="t" wrap="square">
-            <a:normAutofit/>
-          </a:bodyPr>
-          <a:lstStyle/>
-          <a:p>
-            <a:pPr algn="l" marL="0">
-              <a:lnSpc>
-                <a:spcPct val="100000"/>
-              </a:lnSpc>
-            </a:pPr>
-            <a:r>
-              <a:rPr lang="en-US" sz="1000" b="1" dirty="0">
-                <a:solidFill>
-                  <a:srgbClr val="003366"/>
-                </a:solidFill>
-                <a:latin typeface="Arial"/>
-                <a:ea typeface="Arial"/>
-                <a:cs typeface="Arial"/>
-              </a:rPr>
-              <a:t>Potential challenges and risks</a:t>
-            </a:r>
-          </a:p>
-        </p:txBody>
-      </p:sp>
-      <p:sp>
-        <p:nvSpPr>
-          <p:cNvPr id="17414" name="h2"/>
-          <p:cNvSpPr>
-            <a:spLocks noChangeAspect="0"/>
-          </p:cNvSpPr>
-          <p:nvPr/>
-        </p:nvSpPr>
-        <p:spPr>
-          <a:xfrm>
-            <a:off x="6263640" y="1682496"/>
-            <a:ext cx="5303520" cy="292608"/>
-          </a:xfrm>
-          <a:prstGeom prst="rect">
-            <a:avLst/>
-          </a:prstGeom>
-          <a:noFill/>
-          <a:ln>
-            <a:noFill/>
-          </a:ln>
-        </p:spPr>
-        <p:txBody>
-          <a:bodyPr anchor="t" wrap="square">
-            <a:normAutofit/>
-          </a:bodyPr>
-          <a:lstStyle/>
-          <a:p>
-            <a:pPr algn="l" marL="0">
-              <a:lnSpc>
-                <a:spcPct val="100000"/>
-              </a:lnSpc>
-            </a:pPr>
-            <a:r>
-              <a:rPr lang="en-US" sz="1000" b="1" dirty="0">
-                <a:solidFill>
-                  <a:srgbClr val="003366"/>
-                </a:solidFill>
-                <a:latin typeface="Arial"/>
-                <a:ea typeface="Arial"/>
-                <a:cs typeface="Arial"/>
-              </a:rPr>
-              <a:t>Strategies for overcoming these challenges</a:t>
-            </a:r>
-          </a:p>
-        </p:txBody>
-      </p:sp>
-      <p:sp>
-        <p:nvSpPr>
-          <p:cNvPr id="17415" name="ch"/>
-          <p:cNvSpPr>
-            <a:spLocks noChangeAspect="0"/>
-          </p:cNvSpPr>
-          <p:nvPr/>
-        </p:nvSpPr>
-        <p:spPr>
-          <a:xfrm>
-            <a:off x="612648" y="1993392"/>
-            <a:ext cx="5074920" cy="603504"/>
-          </a:xfrm>
-          <a:prstGeom prst="roundRect">
-            <a:avLst/>
-          </a:prstGeom>
-          <a:solidFill>
-            <a:srgbClr val="F2F2F2"/>
-          </a:solidFill>
-          <a:ln w="12700">
-            <a:solidFill>
-              <a:srgbClr val="C0504D"/>
-            </a:solidFill>
           </a:ln>
         </p:spPr>
         <p:txBody>
@@ -8795,28 +9280,28 @@
           </a:bodyPr>
           <a:lstStyle/>
           <a:p>
-            <a:pPr algn="l" marL="0">
-              <a:lnSpc>
-                <a:spcPct val="100000"/>
-              </a:lnSpc>
-            </a:pPr>
-            <a:r>
-              <a:rPr lang="en-US" sz="1100" dirty="0">
-                <a:solidFill>
-                  <a:srgbClr val="1A1A1A"/>
-                </a:solidFill>
-                <a:latin typeface="Arial"/>
-                <a:ea typeface="Arial"/>
-                <a:cs typeface="Arial"/>
-              </a:rPr>
-              <a:t>Keyed API needs a static-IP host</a:t>
-            </a:r>
-          </a:p>
-        </p:txBody>
-      </p:sp>
-      <p:sp>
-        <p:nvSpPr>
-          <p:cNvPr id="17416" name="arr"/>
+            <a:pPr algn="ctr">
+              <a:lnSpc>
+                <a:spcPct val="100000"/>
+              </a:lnSpc>
+            </a:pPr>
+            <a:r>
+              <a:rPr lang="en-US" sz="800" b="1" dirty="0">
+                <a:solidFill>
+                  <a:srgbClr val="FFFFFF"/>
+                </a:solidFill>
+                <a:latin typeface="Arial"/>
+                <a:ea typeface="Arial"/>
+                <a:cs typeface="Arial"/>
+              </a:rPr>
+              <a:t>Potential challenges and risks</a:t>
+            </a:r>
+          </a:p>
+        </p:txBody>
+      </p:sp>
+      <p:sp>
+        <p:nvSpPr>
+          <p:cNvPr id="17416" name="chip"/>
           <p:cNvSpPr>
             <a:spLocks noChangeAspect="0"/>
           </p:cNvSpPr>
@@ -8824,14 +9309,16 @@
         </p:nvSpPr>
         <p:spPr>
           <a:xfrm>
-            <a:off x="5742432" y="2167128"/>
-            <a:ext cx="457200" cy="256032"/>
-          </a:xfrm>
-          <a:prstGeom prst="rightArrow">
-            <a:avLst/>
-          </a:prstGeom>
-          <a:solidFill>
-            <a:srgbClr val="9BBB59"/>
+            <a:off x="6263640" y="1700784"/>
+            <a:ext cx="4846320" cy="310896"/>
+          </a:xfrm>
+          <a:prstGeom prst="roundRect">
+            <a:avLst>
+              <a:gd name="adj" fmla="val 50000"/>
+            </a:avLst>
+          </a:prstGeom>
+          <a:solidFill>
+            <a:srgbClr val="003366"/>
           </a:solidFill>
           <a:ln>
             <a:noFill/>
@@ -8843,17 +9330,28 @@
           </a:bodyPr>
           <a:lstStyle/>
           <a:p>
-            <a:pPr>
-              <a:lnSpc>
-                <a:spcPct val="100000"/>
-              </a:lnSpc>
-            </a:pPr>
-          </a:p>
-        </p:txBody>
-      </p:sp>
-      <p:sp>
-        <p:nvSpPr>
-          <p:cNvPr id="17417" name="fix"/>
+            <a:pPr algn="ctr">
+              <a:lnSpc>
+                <a:spcPct val="100000"/>
+              </a:lnSpc>
+            </a:pPr>
+            <a:r>
+              <a:rPr lang="en-US" sz="800" b="1" dirty="0">
+                <a:solidFill>
+                  <a:srgbClr val="FFFFFF"/>
+                </a:solidFill>
+                <a:latin typeface="Arial"/>
+                <a:ea typeface="Arial"/>
+                <a:cs typeface="Arial"/>
+              </a:rPr>
+              <a:t>Strategies for overcoming these challenges</a:t>
+            </a:r>
+          </a:p>
+        </p:txBody>
+      </p:sp>
+      <p:sp>
+        <p:nvSpPr>
+          <p:cNvPr id="17417" name="panel"/>
           <p:cNvSpPr>
             <a:spLocks noChangeAspect="0"/>
           </p:cNvSpPr>
@@ -8861,18 +9359,18 @@
         </p:nvSpPr>
         <p:spPr>
           <a:xfrm>
-            <a:off x="6263640" y="1993392"/>
-            <a:ext cx="5303520" cy="603504"/>
+            <a:off x="868680" y="2121408"/>
+            <a:ext cx="4892040" cy="603504"/>
           </a:xfrm>
           <a:prstGeom prst="roundRect">
             <a:avLst/>
           </a:prstGeom>
           <a:solidFill>
-            <a:srgbClr val="EAF1F8"/>
-          </a:solidFill>
-          <a:ln w="12700">
+            <a:srgbClr val="FBE1EE"/>
+          </a:solidFill>
+          <a:ln w="19050">
             <a:solidFill>
-              <a:srgbClr val="9BBB59"/>
+              <a:srgbClr val="D92B2B"/>
             </a:solidFill>
           </a:ln>
         </p:spPr>
@@ -8882,13 +9380,13 @@
           </a:bodyPr>
           <a:lstStyle/>
           <a:p>
-            <a:pPr algn="l" marL="0">
-              <a:lnSpc>
-                <a:spcPct val="100000"/>
-              </a:lnSpc>
-            </a:pPr>
-            <a:r>
-              <a:rPr lang="en-US" sz="1100" dirty="0">
+            <a:pPr algn="l">
+              <a:lnSpc>
+                <a:spcPct val="100000"/>
+              </a:lnSpc>
+            </a:pPr>
+            <a:r>
+              <a:rPr lang="en-US" sz="1050" dirty="0">
                 <a:solidFill>
                   <a:srgbClr val="1A1A1A"/>
                 </a:solidFill>
@@ -8896,14 +9394,14 @@
                 <a:ea typeface="Arial"/>
                 <a:cs typeface="Arial"/>
               </a:rPr>
-              <a:t>Run on saved captures + public WFS meanwhile</a:t>
-            </a:r>
-          </a:p>
-        </p:txBody>
-      </p:sp>
-      <p:sp>
-        <p:nvSpPr>
-          <p:cNvPr id="17418" name="ch"/>
+              <a:t>Keyed API needs a static-IP host</a:t>
+            </a:r>
+          </a:p>
+        </p:txBody>
+      </p:sp>
+      <p:sp>
+        <p:nvSpPr>
+          <p:cNvPr id="17418" name="badge"/>
           <p:cNvSpPr>
             <a:spLocks noChangeAspect="0"/>
           </p:cNvSpPr>
@@ -8911,19 +9409,17 @@
         </p:nvSpPr>
         <p:spPr>
           <a:xfrm>
-            <a:off x="612648" y="2706624"/>
-            <a:ext cx="5074920" cy="603504"/>
-          </a:xfrm>
-          <a:prstGeom prst="roundRect">
+            <a:off x="521208" y="2249424"/>
+            <a:ext cx="347472" cy="347472"/>
+          </a:xfrm>
+          <a:prstGeom prst="ellipse">
             <a:avLst/>
           </a:prstGeom>
           <a:solidFill>
-            <a:srgbClr val="F2F2F2"/>
-          </a:solidFill>
-          <a:ln w="12700">
-            <a:solidFill>
-              <a:srgbClr val="C0504D"/>
-            </a:solidFill>
+            <a:srgbClr val="D92B2B"/>
+          </a:solidFill>
+          <a:ln>
+            <a:noFill/>
           </a:ln>
         </p:spPr>
         <p:txBody>
@@ -8932,21 +9428,21 @@
           </a:bodyPr>
           <a:lstStyle/>
           <a:p>
-            <a:pPr algn="l" marL="0">
-              <a:lnSpc>
-                <a:spcPct val="100000"/>
-              </a:lnSpc>
-            </a:pPr>
-            <a:r>
-              <a:rPr lang="en-US" sz="1100" dirty="0">
-                <a:solidFill>
-                  <a:srgbClr val="1A1A1A"/>
-                </a:solidFill>
-                <a:latin typeface="Arial"/>
-                <a:ea typeface="Arial"/>
-                <a:cs typeface="Arial"/>
-              </a:rPr>
-              <a:t>CPCB feed may be unreachable</a:t>
+            <a:pPr algn="ctr">
+              <a:lnSpc>
+                <a:spcPct val="100000"/>
+              </a:lnSpc>
+            </a:pPr>
+            <a:r>
+              <a:rPr lang="en-US" sz="1300" b="1" dirty="0">
+                <a:solidFill>
+                  <a:srgbClr val="FFFFFF"/>
+                </a:solidFill>
+                <a:latin typeface="Arial"/>
+                <a:ea typeface="Arial"/>
+                <a:cs typeface="Arial"/>
+              </a:rPr>
+              <a:t>!</a:t>
             </a:r>
           </a:p>
         </p:txBody>
@@ -8961,14 +9457,14 @@
         </p:nvSpPr>
         <p:spPr>
           <a:xfrm>
-            <a:off x="5742432" y="2880360"/>
-            <a:ext cx="457200" cy="256032"/>
+            <a:off x="5815584" y="2295144"/>
+            <a:ext cx="402336" cy="256032"/>
           </a:xfrm>
           <a:prstGeom prst="rightArrow">
             <a:avLst/>
           </a:prstGeom>
           <a:solidFill>
-            <a:srgbClr val="9BBB59"/>
+            <a:srgbClr val="5AAA46"/>
           </a:solidFill>
           <a:ln>
             <a:noFill/>
@@ -8990,7 +9486,7 @@
       </p:sp>
       <p:sp>
         <p:nvSpPr>
-          <p:cNvPr id="17420" name="fix"/>
+          <p:cNvPr id="17420" name="panel"/>
           <p:cNvSpPr>
             <a:spLocks noChangeAspect="0"/>
           </p:cNvSpPr>
@@ -8998,18 +9494,18 @@
         </p:nvSpPr>
         <p:spPr>
           <a:xfrm>
-            <a:off x="6263640" y="2706624"/>
-            <a:ext cx="5303520" cy="603504"/>
+            <a:off x="6263640" y="2121408"/>
+            <a:ext cx="5257800" cy="603504"/>
           </a:xfrm>
           <a:prstGeom prst="roundRect">
             <a:avLst/>
           </a:prstGeom>
           <a:solidFill>
-            <a:srgbClr val="EAF1F8"/>
-          </a:solidFill>
-          <a:ln w="12700">
+            <a:srgbClr val="D9EAFB"/>
+          </a:solidFill>
+          <a:ln w="19050">
             <a:solidFill>
-              <a:srgbClr val="9BBB59"/>
+              <a:srgbClr val="5AAA46"/>
             </a:solidFill>
           </a:ln>
         </p:spPr>
@@ -9019,13 +9515,13 @@
           </a:bodyPr>
           <a:lstStyle/>
           <a:p>
-            <a:pPr algn="l" marL="0">
-              <a:lnSpc>
-                <a:spcPct val="100000"/>
-              </a:lnSpc>
-            </a:pPr>
-            <a:r>
-              <a:rPr lang="en-US" sz="1100" dirty="0">
+            <a:pPr algn="l">
+              <a:lnSpc>
+                <a:spcPct val="100000"/>
+              </a:lnSpc>
+            </a:pPr>
+            <a:r>
+              <a:rPr lang="en-US" sz="1050" dirty="0">
                 <a:solidFill>
                   <a:srgbClr val="1A1A1A"/>
                 </a:solidFill>
@@ -9033,14 +9529,14 @@
                 <a:ea typeface="Arial"/>
                 <a:cs typeface="Arial"/>
               </a:rPr>
-              <a:t>Labelled mirror fallback, else an honest gap card</a:t>
-            </a:r>
-          </a:p>
-        </p:txBody>
-      </p:sp>
-      <p:sp>
-        <p:nvSpPr>
-          <p:cNvPr id="17421" name="ch"/>
+              <a:t>Run on saved captures + public WFS meanwhile</a:t>
+            </a:r>
+          </a:p>
+        </p:txBody>
+      </p:sp>
+      <p:sp>
+        <p:nvSpPr>
+          <p:cNvPr id="17421" name="badge"/>
           <p:cNvSpPr>
             <a:spLocks noChangeAspect="0"/>
           </p:cNvSpPr>
@@ -9048,19 +9544,17 @@
         </p:nvSpPr>
         <p:spPr>
           <a:xfrm>
-            <a:off x="612648" y="3419856"/>
-            <a:ext cx="5074920" cy="603504"/>
-          </a:xfrm>
-          <a:prstGeom prst="roundRect">
+            <a:off x="5916168" y="2249424"/>
+            <a:ext cx="347472" cy="347472"/>
+          </a:xfrm>
+          <a:prstGeom prst="ellipse">
             <a:avLst/>
           </a:prstGeom>
           <a:solidFill>
-            <a:srgbClr val="F2F2F2"/>
-          </a:solidFill>
-          <a:ln w="12700">
-            <a:solidFill>
-              <a:srgbClr val="C0504D"/>
-            </a:solidFill>
+            <a:srgbClr val="5AAA46"/>
+          </a:solidFill>
+          <a:ln>
+            <a:noFill/>
           </a:ln>
         </p:spPr>
         <p:txBody>
@@ -9069,28 +9563,28 @@
           </a:bodyPr>
           <a:lstStyle/>
           <a:p>
-            <a:pPr algn="l" marL="0">
-              <a:lnSpc>
-                <a:spcPct val="100000"/>
-              </a:lnSpc>
-            </a:pPr>
-            <a:r>
-              <a:rPr lang="en-US" sz="1100" dirty="0">
-                <a:solidFill>
-                  <a:srgbClr val="1A1A1A"/>
-                </a:solidFill>
-                <a:latin typeface="Arial"/>
-                <a:ea typeface="Arial"/>
-                <a:cs typeface="Arial"/>
-              </a:rPr>
-              <a:t>Some IMD fields are undocumented</a:t>
-            </a:r>
-          </a:p>
-        </p:txBody>
-      </p:sp>
-      <p:sp>
-        <p:nvSpPr>
-          <p:cNvPr id="17422" name="arr"/>
+            <a:pPr algn="ctr">
+              <a:lnSpc>
+                <a:spcPct val="100000"/>
+              </a:lnSpc>
+            </a:pPr>
+            <a:r>
+              <a:rPr lang="en-US" sz="1300" b="1" dirty="0">
+                <a:solidFill>
+                  <a:srgbClr val="FFFFFF"/>
+                </a:solidFill>
+                <a:latin typeface="Arial"/>
+                <a:ea typeface="Arial"/>
+                <a:cs typeface="Arial"/>
+              </a:rPr>
+              <a:t>✓</a:t>
+            </a:r>
+          </a:p>
+        </p:txBody>
+      </p:sp>
+      <p:sp>
+        <p:nvSpPr>
+          <p:cNvPr id="17422" name="panel"/>
           <p:cNvSpPr>
             <a:spLocks noChangeAspect="0"/>
           </p:cNvSpPr>
@@ -9098,17 +9592,19 @@
         </p:nvSpPr>
         <p:spPr>
           <a:xfrm>
-            <a:off x="5742432" y="3593592"/>
-            <a:ext cx="457200" cy="256032"/>
-          </a:xfrm>
-          <a:prstGeom prst="rightArrow">
+            <a:off x="868680" y="2834640"/>
+            <a:ext cx="4892040" cy="603504"/>
+          </a:xfrm>
+          <a:prstGeom prst="roundRect">
             <a:avLst/>
           </a:prstGeom>
           <a:solidFill>
-            <a:srgbClr val="9BBB59"/>
-          </a:solidFill>
-          <a:ln>
-            <a:noFill/>
+            <a:srgbClr val="FBE1EE"/>
+          </a:solidFill>
+          <a:ln w="19050">
+            <a:solidFill>
+              <a:srgbClr val="D92B2B"/>
+            </a:solidFill>
           </a:ln>
         </p:spPr>
         <p:txBody>
@@ -9117,17 +9613,28 @@
           </a:bodyPr>
           <a:lstStyle/>
           <a:p>
-            <a:pPr>
-              <a:lnSpc>
-                <a:spcPct val="100000"/>
-              </a:lnSpc>
-            </a:pPr>
-          </a:p>
-        </p:txBody>
-      </p:sp>
-      <p:sp>
-        <p:nvSpPr>
-          <p:cNvPr id="17423" name="fix"/>
+            <a:pPr algn="l">
+              <a:lnSpc>
+                <a:spcPct val="100000"/>
+              </a:lnSpc>
+            </a:pPr>
+            <a:r>
+              <a:rPr lang="en-US" sz="1050" dirty="0">
+                <a:solidFill>
+                  <a:srgbClr val="1A1A1A"/>
+                </a:solidFill>
+                <a:latin typeface="Arial"/>
+                <a:ea typeface="Arial"/>
+                <a:cs typeface="Arial"/>
+              </a:rPr>
+              <a:t>CPCB feed may be unreachable</a:t>
+            </a:r>
+          </a:p>
+        </p:txBody>
+      </p:sp>
+      <p:sp>
+        <p:nvSpPr>
+          <p:cNvPr id="17423" name="badge"/>
           <p:cNvSpPr>
             <a:spLocks noChangeAspect="0"/>
           </p:cNvSpPr>
@@ -9135,19 +9642,17 @@
         </p:nvSpPr>
         <p:spPr>
           <a:xfrm>
-            <a:off x="6263640" y="3419856"/>
-            <a:ext cx="5303520" cy="603504"/>
-          </a:xfrm>
-          <a:prstGeom prst="roundRect">
+            <a:off x="521208" y="2962656"/>
+            <a:ext cx="347472" cy="347472"/>
+          </a:xfrm>
+          <a:prstGeom prst="ellipse">
             <a:avLst/>
           </a:prstGeom>
           <a:solidFill>
-            <a:srgbClr val="EAF1F8"/>
-          </a:solidFill>
-          <a:ln w="12700">
-            <a:solidFill>
-              <a:srgbClr val="9BBB59"/>
-            </a:solidFill>
+            <a:srgbClr val="D92B2B"/>
+          </a:solidFill>
+          <a:ln>
+            <a:noFill/>
           </a:ln>
         </p:spPr>
         <p:txBody>
@@ -9156,28 +9661,28 @@
           </a:bodyPr>
           <a:lstStyle/>
           <a:p>
-            <a:pPr algn="l" marL="0">
-              <a:lnSpc>
-                <a:spcPct val="100000"/>
-              </a:lnSpc>
-            </a:pPr>
-            <a:r>
-              <a:rPr lang="en-US" sz="1100" dirty="0">
-                <a:solidFill>
-                  <a:srgbClr val="1A1A1A"/>
-                </a:solidFill>
-                <a:latin typeface="Arial"/>
-                <a:ea typeface="Arial"/>
-                <a:cs typeface="Arial"/>
-              </a:rPr>
-              <a:t>Documented fallbacks; the screen states its data grain</a:t>
-            </a:r>
-          </a:p>
-        </p:txBody>
-      </p:sp>
-      <p:sp>
-        <p:nvSpPr>
-          <p:cNvPr id="17424" name="ch"/>
+            <a:pPr algn="ctr">
+              <a:lnSpc>
+                <a:spcPct val="100000"/>
+              </a:lnSpc>
+            </a:pPr>
+            <a:r>
+              <a:rPr lang="en-US" sz="1300" b="1" dirty="0">
+                <a:solidFill>
+                  <a:srgbClr val="FFFFFF"/>
+                </a:solidFill>
+                <a:latin typeface="Arial"/>
+                <a:ea typeface="Arial"/>
+                <a:cs typeface="Arial"/>
+              </a:rPr>
+              <a:t>!</a:t>
+            </a:r>
+          </a:p>
+        </p:txBody>
+      </p:sp>
+      <p:sp>
+        <p:nvSpPr>
+          <p:cNvPr id="17424" name="arr"/>
           <p:cNvSpPr>
             <a:spLocks noChangeAspect="0"/>
           </p:cNvSpPr>
@@ -9185,19 +9690,17 @@
         </p:nvSpPr>
         <p:spPr>
           <a:xfrm>
-            <a:off x="612648" y="4133088"/>
-            <a:ext cx="5074920" cy="603504"/>
-          </a:xfrm>
-          <a:prstGeom prst="roundRect">
+            <a:off x="5815584" y="3008376"/>
+            <a:ext cx="402336" cy="256032"/>
+          </a:xfrm>
+          <a:prstGeom prst="rightArrow">
             <a:avLst/>
           </a:prstGeom>
           <a:solidFill>
-            <a:srgbClr val="F2F2F2"/>
-          </a:solidFill>
-          <a:ln w="12700">
-            <a:solidFill>
-              <a:srgbClr val="C0504D"/>
-            </a:solidFill>
+            <a:srgbClr val="5AAA46"/>
+          </a:solidFill>
+          <a:ln>
+            <a:noFill/>
           </a:ln>
         </p:spPr>
         <p:txBody>
@@ -9206,28 +9709,17 @@
           </a:bodyPr>
           <a:lstStyle/>
           <a:p>
-            <a:pPr algn="l" marL="0">
-              <a:lnSpc>
-                <a:spcPct val="100000"/>
-              </a:lnSpc>
-            </a:pPr>
-            <a:r>
-              <a:rPr lang="en-US" sz="1100" dirty="0">
-                <a:solidFill>
-                  <a:srgbClr val="1A1A1A"/>
-                </a:solidFill>
-                <a:latin typeface="Arial"/>
-                <a:ea typeface="Arial"/>
-                <a:cs typeface="Arial"/>
-              </a:rPr>
-              <a:t>iOS limits push alerts</a:t>
-            </a:r>
-          </a:p>
-        </p:txBody>
-      </p:sp>
-      <p:sp>
-        <p:nvSpPr>
-          <p:cNvPr id="17425" name="arr"/>
+            <a:pPr>
+              <a:lnSpc>
+                <a:spcPct val="100000"/>
+              </a:lnSpc>
+            </a:pPr>
+          </a:p>
+        </p:txBody>
+      </p:sp>
+      <p:sp>
+        <p:nvSpPr>
+          <p:cNvPr id="17425" name="panel"/>
           <p:cNvSpPr>
             <a:spLocks noChangeAspect="0"/>
           </p:cNvSpPr>
@@ -9235,17 +9727,19 @@
         </p:nvSpPr>
         <p:spPr>
           <a:xfrm>
-            <a:off x="5742432" y="4306824"/>
-            <a:ext cx="457200" cy="256032"/>
-          </a:xfrm>
-          <a:prstGeom prst="rightArrow">
+            <a:off x="6263640" y="2834640"/>
+            <a:ext cx="5257800" cy="603504"/>
+          </a:xfrm>
+          <a:prstGeom prst="roundRect">
             <a:avLst/>
           </a:prstGeom>
           <a:solidFill>
-            <a:srgbClr val="9BBB59"/>
-          </a:solidFill>
-          <a:ln>
-            <a:noFill/>
+            <a:srgbClr val="D9EAFB"/>
+          </a:solidFill>
+          <a:ln w="19050">
+            <a:solidFill>
+              <a:srgbClr val="5AAA46"/>
+            </a:solidFill>
           </a:ln>
         </p:spPr>
         <p:txBody>
@@ -9254,17 +9748,28 @@
           </a:bodyPr>
           <a:lstStyle/>
           <a:p>
-            <a:pPr>
-              <a:lnSpc>
-                <a:spcPct val="100000"/>
-              </a:lnSpc>
-            </a:pPr>
-          </a:p>
-        </p:txBody>
-      </p:sp>
-      <p:sp>
-        <p:nvSpPr>
-          <p:cNvPr id="17426" name="fix"/>
+            <a:pPr algn="l">
+              <a:lnSpc>
+                <a:spcPct val="100000"/>
+              </a:lnSpc>
+            </a:pPr>
+            <a:r>
+              <a:rPr lang="en-US" sz="1050" dirty="0">
+                <a:solidFill>
+                  <a:srgbClr val="1A1A1A"/>
+                </a:solidFill>
+                <a:latin typeface="Arial"/>
+                <a:ea typeface="Arial"/>
+                <a:cs typeface="Arial"/>
+              </a:rPr>
+              <a:t>Labelled mirror fallback, else an honest gap card</a:t>
+            </a:r>
+          </a:p>
+        </p:txBody>
+      </p:sp>
+      <p:sp>
+        <p:nvSpPr>
+          <p:cNvPr id="17426" name="badge"/>
           <p:cNvSpPr>
             <a:spLocks noChangeAspect="0"/>
           </p:cNvSpPr>
@@ -9272,19 +9777,17 @@
         </p:nvSpPr>
         <p:spPr>
           <a:xfrm>
-            <a:off x="6263640" y="4133088"/>
-            <a:ext cx="5303520" cy="603504"/>
-          </a:xfrm>
-          <a:prstGeom prst="roundRect">
+            <a:off x="5916168" y="2962656"/>
+            <a:ext cx="347472" cy="347472"/>
+          </a:xfrm>
+          <a:prstGeom prst="ellipse">
             <a:avLst/>
           </a:prstGeom>
           <a:solidFill>
-            <a:srgbClr val="EAF1F8"/>
-          </a:solidFill>
-          <a:ln w="12700">
-            <a:solidFill>
-              <a:srgbClr val="9BBB59"/>
-            </a:solidFill>
+            <a:srgbClr val="5AAA46"/>
+          </a:solidFill>
+          <a:ln>
+            <a:noFill/>
           </a:ln>
         </p:spPr>
         <p:txBody>
@@ -9293,28 +9796,28 @@
           </a:bodyPr>
           <a:lstStyle/>
           <a:p>
-            <a:pPr algn="l" marL="0">
-              <a:lnSpc>
-                <a:spcPct val="100000"/>
-              </a:lnSpc>
-            </a:pPr>
-            <a:r>
-              <a:rPr lang="en-US" sz="1100" dirty="0">
-                <a:solidFill>
-                  <a:srgbClr val="1A1A1A"/>
-                </a:solidFill>
-                <a:latin typeface="Arial"/>
-                <a:ea typeface="Arial"/>
-                <a:cs typeface="Arial"/>
-              </a:rPr>
-              <a:t>Demo on Android; the inbox keeps every alert</a:t>
-            </a:r>
-          </a:p>
-        </p:txBody>
-      </p:sp>
-      <p:sp>
-        <p:nvSpPr>
-          <p:cNvPr id="17427" name="tl"/>
+            <a:pPr algn="ctr">
+              <a:lnSpc>
+                <a:spcPct val="100000"/>
+              </a:lnSpc>
+            </a:pPr>
+            <a:r>
+              <a:rPr lang="en-US" sz="1300" b="1" dirty="0">
+                <a:solidFill>
+                  <a:srgbClr val="FFFFFF"/>
+                </a:solidFill>
+                <a:latin typeface="Arial"/>
+                <a:ea typeface="Arial"/>
+                <a:cs typeface="Arial"/>
+              </a:rPr>
+              <a:t>✓</a:t>
+            </a:r>
+          </a:p>
+        </p:txBody>
+      </p:sp>
+      <p:sp>
+        <p:nvSpPr>
+          <p:cNvPr id="17427" name="panel"/>
           <p:cNvSpPr>
             <a:spLocks noChangeAspect="0"/>
           </p:cNvSpPr>
@@ -9322,17 +9825,19 @@
         </p:nvSpPr>
         <p:spPr>
           <a:xfrm>
-            <a:off x="612648" y="4956048"/>
-            <a:ext cx="2542032" cy="566928"/>
+            <a:off x="868680" y="3547872"/>
+            <a:ext cx="4892040" cy="603504"/>
           </a:xfrm>
           <a:prstGeom prst="roundRect">
             <a:avLst/>
           </a:prstGeom>
           <a:solidFill>
-            <a:srgbClr val="F79646"/>
-          </a:solidFill>
-          <a:ln>
-            <a:noFill/>
+            <a:srgbClr val="FBE1EE"/>
+          </a:solidFill>
+          <a:ln w="19050">
+            <a:solidFill>
+              <a:srgbClr val="D92B2B"/>
+            </a:solidFill>
           </a:ln>
         </p:spPr>
         <p:txBody>
@@ -9341,28 +9846,28 @@
           </a:bodyPr>
           <a:lstStyle/>
           <a:p>
-            <a:pPr algn="ctr" marL="0">
-              <a:lnSpc>
-                <a:spcPct val="100000"/>
-              </a:lnSpc>
-            </a:pPr>
-            <a:r>
-              <a:rPr lang="en-US" sz="1000" b="1" dirty="0">
-                <a:solidFill>
-                  <a:srgbClr val="FFFFFF"/>
-                </a:solidFill>
-                <a:latin typeface="Arial"/>
-                <a:ea typeface="Arial"/>
-                <a:cs typeface="Arial"/>
-              </a:rPr>
-              <a:t>Day 1  ·  static-IP host + key registration</a:t>
-            </a:r>
-          </a:p>
-        </p:txBody>
-      </p:sp>
-      <p:sp>
-        <p:nvSpPr>
-          <p:cNvPr id="17428" name="arr"/>
+            <a:pPr algn="l">
+              <a:lnSpc>
+                <a:spcPct val="100000"/>
+              </a:lnSpc>
+            </a:pPr>
+            <a:r>
+              <a:rPr lang="en-US" sz="1050" dirty="0">
+                <a:solidFill>
+                  <a:srgbClr val="1A1A1A"/>
+                </a:solidFill>
+                <a:latin typeface="Arial"/>
+                <a:ea typeface="Arial"/>
+                <a:cs typeface="Arial"/>
+              </a:rPr>
+              <a:t>Some IMD fields are undocumented</a:t>
+            </a:r>
+          </a:p>
+        </p:txBody>
+      </p:sp>
+      <p:sp>
+        <p:nvSpPr>
+          <p:cNvPr id="17428" name="badge"/>
           <p:cNvSpPr>
             <a:spLocks noChangeAspect="0"/>
           </p:cNvSpPr>
@@ -9370,14 +9875,14 @@
         </p:nvSpPr>
         <p:spPr>
           <a:xfrm>
-            <a:off x="3172968" y="5148072"/>
-            <a:ext cx="274320" cy="182880"/>
-          </a:xfrm>
-          <a:prstGeom prst="rightArrow">
+            <a:off x="521208" y="3675888"/>
+            <a:ext cx="347472" cy="347472"/>
+          </a:xfrm>
+          <a:prstGeom prst="ellipse">
             <a:avLst/>
           </a:prstGeom>
           <a:solidFill>
-            <a:srgbClr val="595959"/>
+            <a:srgbClr val="D92B2B"/>
           </a:solidFill>
           <a:ln>
             <a:noFill/>
@@ -9389,17 +9894,28 @@
           </a:bodyPr>
           <a:lstStyle/>
           <a:p>
-            <a:pPr>
-              <a:lnSpc>
-                <a:spcPct val="100000"/>
-              </a:lnSpc>
-            </a:pPr>
-          </a:p>
-        </p:txBody>
-      </p:sp>
-      <p:sp>
-        <p:nvSpPr>
-          <p:cNvPr id="17429" name="tl"/>
+            <a:pPr algn="ctr">
+              <a:lnSpc>
+                <a:spcPct val="100000"/>
+              </a:lnSpc>
+            </a:pPr>
+            <a:r>
+              <a:rPr lang="en-US" sz="1300" b="1" dirty="0">
+                <a:solidFill>
+                  <a:srgbClr val="FFFFFF"/>
+                </a:solidFill>
+                <a:latin typeface="Arial"/>
+                <a:ea typeface="Arial"/>
+                <a:cs typeface="Arial"/>
+              </a:rPr>
+              <a:t>!</a:t>
+            </a:r>
+          </a:p>
+        </p:txBody>
+      </p:sp>
+      <p:sp>
+        <p:nvSpPr>
+          <p:cNvPr id="17429" name="arr"/>
           <p:cNvSpPr>
             <a:spLocks noChangeAspect="0"/>
           </p:cNvSpPr>
@@ -9407,14 +9923,14 @@
         </p:nvSpPr>
         <p:spPr>
           <a:xfrm>
-            <a:off x="3465576" y="4956048"/>
-            <a:ext cx="2542032" cy="566928"/>
-          </a:xfrm>
-          <a:prstGeom prst="roundRect">
+            <a:off x="5815584" y="3721608"/>
+            <a:ext cx="402336" cy="256032"/>
+          </a:xfrm>
+          <a:prstGeom prst="rightArrow">
             <a:avLst/>
           </a:prstGeom>
           <a:solidFill>
-            <a:srgbClr val="4F81BD"/>
+            <a:srgbClr val="5AAA46"/>
           </a:solidFill>
           <a:ln>
             <a:noFill/>
@@ -9426,28 +9942,17 @@
           </a:bodyPr>
           <a:lstStyle/>
           <a:p>
-            <a:pPr algn="ctr" marL="0">
-              <a:lnSpc>
-                <a:spcPct val="100000"/>
-              </a:lnSpc>
-            </a:pPr>
-            <a:r>
-              <a:rPr lang="en-US" sz="1000" b="1" dirty="0">
-                <a:solidFill>
-                  <a:srgbClr val="FFFFFF"/>
-                </a:solidFill>
-                <a:latin typeface="Arial"/>
-                <a:ea typeface="Arial"/>
-                <a:cs typeface="Arial"/>
-              </a:rPr>
-              <a:t>Week 1  ·  captured-payload mock (done)</a:t>
-            </a:r>
-          </a:p>
-        </p:txBody>
-      </p:sp>
-      <p:sp>
-        <p:nvSpPr>
-          <p:cNvPr id="17430" name="arr"/>
+            <a:pPr>
+              <a:lnSpc>
+                <a:spcPct val="100000"/>
+              </a:lnSpc>
+            </a:pPr>
+          </a:p>
+        </p:txBody>
+      </p:sp>
+      <p:sp>
+        <p:nvSpPr>
+          <p:cNvPr id="17430" name="panel"/>
           <p:cNvSpPr>
             <a:spLocks noChangeAspect="0"/>
           </p:cNvSpPr>
@@ -9455,17 +9960,19 @@
         </p:nvSpPr>
         <p:spPr>
           <a:xfrm>
-            <a:off x="6025896" y="5148072"/>
-            <a:ext cx="274320" cy="182880"/>
-          </a:xfrm>
-          <a:prstGeom prst="rightArrow">
+            <a:off x="6263640" y="3547872"/>
+            <a:ext cx="5257800" cy="603504"/>
+          </a:xfrm>
+          <a:prstGeom prst="roundRect">
             <a:avLst/>
           </a:prstGeom>
           <a:solidFill>
-            <a:srgbClr val="595959"/>
-          </a:solidFill>
-          <a:ln>
-            <a:noFill/>
+            <a:srgbClr val="D9EAFB"/>
+          </a:solidFill>
+          <a:ln w="19050">
+            <a:solidFill>
+              <a:srgbClr val="5AAA46"/>
+            </a:solidFill>
           </a:ln>
         </p:spPr>
         <p:txBody>
@@ -9474,17 +9981,28 @@
           </a:bodyPr>
           <a:lstStyle/>
           <a:p>
-            <a:pPr>
-              <a:lnSpc>
-                <a:spcPct val="100000"/>
-              </a:lnSpc>
-            </a:pPr>
-          </a:p>
-        </p:txBody>
-      </p:sp>
-      <p:sp>
-        <p:nvSpPr>
-          <p:cNvPr id="17431" name="tl"/>
+            <a:pPr algn="l">
+              <a:lnSpc>
+                <a:spcPct val="100000"/>
+              </a:lnSpc>
+            </a:pPr>
+            <a:r>
+              <a:rPr lang="en-US" sz="1050" dirty="0">
+                <a:solidFill>
+                  <a:srgbClr val="1A1A1A"/>
+                </a:solidFill>
+                <a:latin typeface="Arial"/>
+                <a:ea typeface="Arial"/>
+                <a:cs typeface="Arial"/>
+              </a:rPr>
+              <a:t>Documented fallbacks; the screen states its data grain</a:t>
+            </a:r>
+          </a:p>
+        </p:txBody>
+      </p:sp>
+      <p:sp>
+        <p:nvSpPr>
+          <p:cNvPr id="17431" name="badge"/>
           <p:cNvSpPr>
             <a:spLocks noChangeAspect="0"/>
           </p:cNvSpPr>
@@ -9492,14 +10010,14 @@
         </p:nvSpPr>
         <p:spPr>
           <a:xfrm>
-            <a:off x="6318504" y="4956048"/>
-            <a:ext cx="2542032" cy="566928"/>
-          </a:xfrm>
-          <a:prstGeom prst="roundRect">
+            <a:off x="5916168" y="3675888"/>
+            <a:ext cx="347472" cy="347472"/>
+          </a:xfrm>
+          <a:prstGeom prst="ellipse">
             <a:avLst/>
           </a:prstGeom>
           <a:solidFill>
-            <a:srgbClr val="4F81BD"/>
+            <a:srgbClr val="5AAA46"/>
           </a:solidFill>
           <a:ln>
             <a:noFill/>
@@ -9511,13 +10029,13 @@
           </a:bodyPr>
           <a:lstStyle/>
           <a:p>
-            <a:pPr algn="ctr" marL="0">
-              <a:lnSpc>
-                <a:spcPct val="100000"/>
-              </a:lnSpc>
-            </a:pPr>
-            <a:r>
-              <a:rPr lang="en-US" sz="1000" b="1" dirty="0">
+            <a:pPr algn="ctr">
+              <a:lnSpc>
+                <a:spcPct val="100000"/>
+              </a:lnSpc>
+            </a:pPr>
+            <a:r>
+              <a:rPr lang="en-US" sz="1300" b="1" dirty="0">
                 <a:solidFill>
                   <a:srgbClr val="FFFFFF"/>
                 </a:solidFill>
@@ -9525,14 +10043,14 @@
                 <a:ea typeface="Arial"/>
                 <a:cs typeface="Arial"/>
               </a:rPr>
-              <a:t>Week 3  ·  live keyed pipeline</a:t>
-            </a:r>
-          </a:p>
-        </p:txBody>
-      </p:sp>
-      <p:sp>
-        <p:nvSpPr>
-          <p:cNvPr id="17432" name="arr"/>
+              <a:t>✓</a:t>
+            </a:r>
+          </a:p>
+        </p:txBody>
+      </p:sp>
+      <p:sp>
+        <p:nvSpPr>
+          <p:cNvPr id="17432" name="panel"/>
           <p:cNvSpPr>
             <a:spLocks noChangeAspect="0"/>
           </p:cNvSpPr>
@@ -9540,17 +10058,19 @@
         </p:nvSpPr>
         <p:spPr>
           <a:xfrm>
-            <a:off x="8878824" y="5148072"/>
-            <a:ext cx="274320" cy="182880"/>
-          </a:xfrm>
-          <a:prstGeom prst="rightArrow">
+            <a:off x="868680" y="4261104"/>
+            <a:ext cx="4892040" cy="603504"/>
+          </a:xfrm>
+          <a:prstGeom prst="roundRect">
             <a:avLst/>
           </a:prstGeom>
           <a:solidFill>
-            <a:srgbClr val="595959"/>
-          </a:solidFill>
-          <a:ln>
-            <a:noFill/>
+            <a:srgbClr val="FBE1EE"/>
+          </a:solidFill>
+          <a:ln w="19050">
+            <a:solidFill>
+              <a:srgbClr val="D92B2B"/>
+            </a:solidFill>
           </a:ln>
         </p:spPr>
         <p:txBody>
@@ -9559,17 +10079,28 @@
           </a:bodyPr>
           <a:lstStyle/>
           <a:p>
-            <a:pPr>
-              <a:lnSpc>
-                <a:spcPct val="100000"/>
-              </a:lnSpc>
-            </a:pPr>
-          </a:p>
-        </p:txBody>
-      </p:sp>
-      <p:sp>
-        <p:nvSpPr>
-          <p:cNvPr id="17433" name="tl"/>
+            <a:pPr algn="l">
+              <a:lnSpc>
+                <a:spcPct val="100000"/>
+              </a:lnSpc>
+            </a:pPr>
+            <a:r>
+              <a:rPr lang="en-US" sz="1050" dirty="0">
+                <a:solidFill>
+                  <a:srgbClr val="1A1A1A"/>
+                </a:solidFill>
+                <a:latin typeface="Arial"/>
+                <a:ea typeface="Arial"/>
+                <a:cs typeface="Arial"/>
+              </a:rPr>
+              <a:t>iOS limits push alerts</a:t>
+            </a:r>
+          </a:p>
+        </p:txBody>
+      </p:sp>
+      <p:sp>
+        <p:nvSpPr>
+          <p:cNvPr id="17433" name="badge"/>
           <p:cNvSpPr>
             <a:spLocks noChangeAspect="0"/>
           </p:cNvSpPr>
@@ -9577,14 +10108,14 @@
         </p:nvSpPr>
         <p:spPr>
           <a:xfrm>
-            <a:off x="9171432" y="4956048"/>
-            <a:ext cx="2542032" cy="566928"/>
-          </a:xfrm>
-          <a:prstGeom prst="roundRect">
+            <a:off x="521208" y="4389120"/>
+            <a:ext cx="347472" cy="347472"/>
+          </a:xfrm>
+          <a:prstGeom prst="ellipse">
             <a:avLst/>
           </a:prstGeom>
           <a:solidFill>
-            <a:srgbClr val="4F81BD"/>
+            <a:srgbClr val="D92B2B"/>
           </a:solidFill>
           <a:ln>
             <a:noFill/>
@@ -9596,13 +10127,13 @@
           </a:bodyPr>
           <a:lstStyle/>
           <a:p>
-            <a:pPr algn="ctr" marL="0">
-              <a:lnSpc>
-                <a:spcPct val="100000"/>
-              </a:lnSpc>
-            </a:pPr>
-            <a:r>
-              <a:rPr lang="en-US" sz="1000" b="1" dirty="0">
+            <a:pPr algn="ctr">
+              <a:lnSpc>
+                <a:spcPct val="100000"/>
+              </a:lnSpc>
+            </a:pPr>
+            <a:r>
+              <a:rPr lang="en-US" sz="1300" b="1" dirty="0">
                 <a:solidFill>
                   <a:srgbClr val="FFFFFF"/>
                 </a:solidFill>
@@ -9610,14 +10141,14 @@
                 <a:ea typeface="Arial"/>
                 <a:cs typeface="Arial"/>
               </a:rPr>
-              <a:t>Finale  ·  demo: 3 personas push + adapters</a:t>
-            </a:r>
-          </a:p>
-        </p:txBody>
-      </p:sp>
-      <p:sp>
-        <p:nvSpPr>
-          <p:cNvPr id="17434" name="viab"/>
+              <a:t>!</a:t>
+            </a:r>
+          </a:p>
+        </p:txBody>
+      </p:sp>
+      <p:sp>
+        <p:nvSpPr>
+          <p:cNvPr id="17434" name="arr"/>
           <p:cNvSpPr>
             <a:spLocks noChangeAspect="0"/>
           </p:cNvSpPr>
@@ -9625,19 +10156,17 @@
         </p:nvSpPr>
         <p:spPr>
           <a:xfrm>
-            <a:off x="612648" y="5596128"/>
-            <a:ext cx="10954512" cy="603504"/>
-          </a:xfrm>
-          <a:prstGeom prst="roundRect">
+            <a:off x="5815584" y="4434840"/>
+            <a:ext cx="402336" cy="256032"/>
+          </a:xfrm>
+          <a:prstGeom prst="rightArrow">
             <a:avLst/>
           </a:prstGeom>
           <a:solidFill>
-            <a:srgbClr val="EAF1F8"/>
-          </a:solidFill>
-          <a:ln w="12700">
-            <a:solidFill>
-              <a:srgbClr val="003366"/>
-            </a:solidFill>
+            <a:srgbClr val="5AAA46"/>
+          </a:solidFill>
+          <a:ln>
+            <a:noFill/>
           </a:ln>
         </p:spPr>
         <p:txBody>
@@ -9646,11 +10175,470 @@
           </a:bodyPr>
           <a:lstStyle/>
           <a:p>
-            <a:pPr algn="ctr" marL="0">
-              <a:lnSpc>
-                <a:spcPct val="100000"/>
-              </a:lnSpc>
-            </a:pPr>
+            <a:pPr>
+              <a:lnSpc>
+                <a:spcPct val="100000"/>
+              </a:lnSpc>
+            </a:pPr>
+          </a:p>
+        </p:txBody>
+      </p:sp>
+      <p:sp>
+        <p:nvSpPr>
+          <p:cNvPr id="17435" name="panel"/>
+          <p:cNvSpPr>
+            <a:spLocks noChangeAspect="0"/>
+          </p:cNvSpPr>
+          <p:nvPr/>
+        </p:nvSpPr>
+        <p:spPr>
+          <a:xfrm>
+            <a:off x="6263640" y="4261104"/>
+            <a:ext cx="5257800" cy="603504"/>
+          </a:xfrm>
+          <a:prstGeom prst="roundRect">
+            <a:avLst/>
+          </a:prstGeom>
+          <a:solidFill>
+            <a:srgbClr val="D9EAFB"/>
+          </a:solidFill>
+          <a:ln w="19050">
+            <a:solidFill>
+              <a:srgbClr val="5AAA46"/>
+            </a:solidFill>
+          </a:ln>
+        </p:spPr>
+        <p:txBody>
+          <a:bodyPr anchor="ctr" wrap="square">
+            <a:normAutofit/>
+          </a:bodyPr>
+          <a:lstStyle/>
+          <a:p>
+            <a:pPr algn="l">
+              <a:lnSpc>
+                <a:spcPct val="100000"/>
+              </a:lnSpc>
+            </a:pPr>
+            <a:r>
+              <a:rPr lang="en-US" sz="1050" dirty="0">
+                <a:solidFill>
+                  <a:srgbClr val="1A1A1A"/>
+                </a:solidFill>
+                <a:latin typeface="Arial"/>
+                <a:ea typeface="Arial"/>
+                <a:cs typeface="Arial"/>
+              </a:rPr>
+              <a:t>Demo on Android; the inbox keeps every alert</a:t>
+            </a:r>
+          </a:p>
+        </p:txBody>
+      </p:sp>
+      <p:sp>
+        <p:nvSpPr>
+          <p:cNvPr id="17436" name="badge"/>
+          <p:cNvSpPr>
+            <a:spLocks noChangeAspect="0"/>
+          </p:cNvSpPr>
+          <p:nvPr/>
+        </p:nvSpPr>
+        <p:spPr>
+          <a:xfrm>
+            <a:off x="5916168" y="4389120"/>
+            <a:ext cx="347472" cy="347472"/>
+          </a:xfrm>
+          <a:prstGeom prst="ellipse">
+            <a:avLst/>
+          </a:prstGeom>
+          <a:solidFill>
+            <a:srgbClr val="5AAA46"/>
+          </a:solidFill>
+          <a:ln>
+            <a:noFill/>
+          </a:ln>
+        </p:spPr>
+        <p:txBody>
+          <a:bodyPr anchor="ctr" wrap="square">
+            <a:normAutofit/>
+          </a:bodyPr>
+          <a:lstStyle/>
+          <a:p>
+            <a:pPr algn="ctr">
+              <a:lnSpc>
+                <a:spcPct val="100000"/>
+              </a:lnSpc>
+            </a:pPr>
+            <a:r>
+              <a:rPr lang="en-US" sz="1300" b="1" dirty="0">
+                <a:solidFill>
+                  <a:srgbClr val="FFFFFF"/>
+                </a:solidFill>
+                <a:latin typeface="Arial"/>
+                <a:ea typeface="Arial"/>
+                <a:cs typeface="Arial"/>
+              </a:rPr>
+              <a:t>✓</a:t>
+            </a:r>
+          </a:p>
+        </p:txBody>
+      </p:sp>
+      <p:sp>
+        <p:nvSpPr>
+          <p:cNvPr id="17437" name="tl"/>
+          <p:cNvSpPr>
+            <a:spLocks noChangeAspect="0"/>
+          </p:cNvSpPr>
+          <p:nvPr/>
+        </p:nvSpPr>
+        <p:spPr>
+          <a:xfrm>
+            <a:off x="612648" y="5102352"/>
+            <a:ext cx="2542032" cy="566928"/>
+          </a:xfrm>
+          <a:prstGeom prst="roundRect">
+            <a:avLst/>
+          </a:prstGeom>
+          <a:solidFill>
+            <a:srgbClr val="D9480F"/>
+          </a:solidFill>
+          <a:ln w="12700">
+            <a:solidFill>
+              <a:srgbClr val="000000"/>
+            </a:solidFill>
+          </a:ln>
+        </p:spPr>
+        <p:txBody>
+          <a:bodyPr anchor="ctr" wrap="square">
+            <a:normAutofit/>
+          </a:bodyPr>
+          <a:lstStyle/>
+          <a:p>
+            <a:pPr algn="ctr">
+              <a:lnSpc>
+                <a:spcPct val="100000"/>
+              </a:lnSpc>
+            </a:pPr>
+            <a:r>
+              <a:rPr lang="en-US" sz="950" b="1" dirty="0">
+                <a:solidFill>
+                  <a:srgbClr val="FFFFFF"/>
+                </a:solidFill>
+                <a:latin typeface="Arial"/>
+                <a:ea typeface="Arial"/>
+                <a:cs typeface="Arial"/>
+              </a:rPr>
+              <a:t>Day 1  ·  static-IP host + key registration</a:t>
+            </a:r>
+          </a:p>
+        </p:txBody>
+      </p:sp>
+      <p:sp>
+        <p:nvSpPr>
+          <p:cNvPr id="17438" name="arr"/>
+          <p:cNvSpPr>
+            <a:spLocks noChangeAspect="0"/>
+          </p:cNvSpPr>
+          <p:nvPr/>
+        </p:nvSpPr>
+        <p:spPr>
+          <a:xfrm>
+            <a:off x="3172968" y="5294376"/>
+            <a:ext cx="274320" cy="182880"/>
+          </a:xfrm>
+          <a:prstGeom prst="rightArrow">
+            <a:avLst/>
+          </a:prstGeom>
+          <a:solidFill>
+            <a:srgbClr val="595959"/>
+          </a:solidFill>
+          <a:ln>
+            <a:noFill/>
+          </a:ln>
+        </p:spPr>
+        <p:txBody>
+          <a:bodyPr anchor="ctr" wrap="square">
+            <a:normAutofit/>
+          </a:bodyPr>
+          <a:lstStyle/>
+          <a:p>
+            <a:pPr>
+              <a:lnSpc>
+                <a:spcPct val="100000"/>
+              </a:lnSpc>
+            </a:pPr>
+          </a:p>
+        </p:txBody>
+      </p:sp>
+      <p:sp>
+        <p:nvSpPr>
+          <p:cNvPr id="17439" name="tl"/>
+          <p:cNvSpPr>
+            <a:spLocks noChangeAspect="0"/>
+          </p:cNvSpPr>
+          <p:nvPr/>
+        </p:nvSpPr>
+        <p:spPr>
+          <a:xfrm>
+            <a:off x="3465576" y="5102352"/>
+            <a:ext cx="2542032" cy="566928"/>
+          </a:xfrm>
+          <a:prstGeom prst="roundRect">
+            <a:avLst/>
+          </a:prstGeom>
+          <a:solidFill>
+            <a:srgbClr val="003366"/>
+          </a:solidFill>
+          <a:ln w="12700">
+            <a:solidFill>
+              <a:srgbClr val="000000"/>
+            </a:solidFill>
+          </a:ln>
+        </p:spPr>
+        <p:txBody>
+          <a:bodyPr anchor="ctr" wrap="square">
+            <a:normAutofit/>
+          </a:bodyPr>
+          <a:lstStyle/>
+          <a:p>
+            <a:pPr algn="ctr">
+              <a:lnSpc>
+                <a:spcPct val="100000"/>
+              </a:lnSpc>
+            </a:pPr>
+            <a:r>
+              <a:rPr lang="en-US" sz="950" b="1" dirty="0">
+                <a:solidFill>
+                  <a:srgbClr val="FFFFFF"/>
+                </a:solidFill>
+                <a:latin typeface="Arial"/>
+                <a:ea typeface="Arial"/>
+                <a:cs typeface="Arial"/>
+              </a:rPr>
+              <a:t>Week 1  ·  captured-payload mock (done)</a:t>
+            </a:r>
+          </a:p>
+        </p:txBody>
+      </p:sp>
+      <p:sp>
+        <p:nvSpPr>
+          <p:cNvPr id="17440" name="arr"/>
+          <p:cNvSpPr>
+            <a:spLocks noChangeAspect="0"/>
+          </p:cNvSpPr>
+          <p:nvPr/>
+        </p:nvSpPr>
+        <p:spPr>
+          <a:xfrm>
+            <a:off x="6025896" y="5294376"/>
+            <a:ext cx="274320" cy="182880"/>
+          </a:xfrm>
+          <a:prstGeom prst="rightArrow">
+            <a:avLst/>
+          </a:prstGeom>
+          <a:solidFill>
+            <a:srgbClr val="595959"/>
+          </a:solidFill>
+          <a:ln>
+            <a:noFill/>
+          </a:ln>
+        </p:spPr>
+        <p:txBody>
+          <a:bodyPr anchor="ctr" wrap="square">
+            <a:normAutofit/>
+          </a:bodyPr>
+          <a:lstStyle/>
+          <a:p>
+            <a:pPr>
+              <a:lnSpc>
+                <a:spcPct val="100000"/>
+              </a:lnSpc>
+            </a:pPr>
+          </a:p>
+        </p:txBody>
+      </p:sp>
+      <p:sp>
+        <p:nvSpPr>
+          <p:cNvPr id="17441" name="tl"/>
+          <p:cNvSpPr>
+            <a:spLocks noChangeAspect="0"/>
+          </p:cNvSpPr>
+          <p:nvPr/>
+        </p:nvSpPr>
+        <p:spPr>
+          <a:xfrm>
+            <a:off x="6318504" y="5102352"/>
+            <a:ext cx="2542032" cy="566928"/>
+          </a:xfrm>
+          <a:prstGeom prst="roundRect">
+            <a:avLst/>
+          </a:prstGeom>
+          <a:solidFill>
+            <a:srgbClr val="003366"/>
+          </a:solidFill>
+          <a:ln w="12700">
+            <a:solidFill>
+              <a:srgbClr val="000000"/>
+            </a:solidFill>
+          </a:ln>
+        </p:spPr>
+        <p:txBody>
+          <a:bodyPr anchor="ctr" wrap="square">
+            <a:normAutofit/>
+          </a:bodyPr>
+          <a:lstStyle/>
+          <a:p>
+            <a:pPr algn="ctr">
+              <a:lnSpc>
+                <a:spcPct val="100000"/>
+              </a:lnSpc>
+            </a:pPr>
+            <a:r>
+              <a:rPr lang="en-US" sz="950" b="1" dirty="0">
+                <a:solidFill>
+                  <a:srgbClr val="FFFFFF"/>
+                </a:solidFill>
+                <a:latin typeface="Arial"/>
+                <a:ea typeface="Arial"/>
+                <a:cs typeface="Arial"/>
+              </a:rPr>
+              <a:t>Week 3  ·  live keyed pipeline</a:t>
+            </a:r>
+          </a:p>
+        </p:txBody>
+      </p:sp>
+      <p:sp>
+        <p:nvSpPr>
+          <p:cNvPr id="17442" name="arr"/>
+          <p:cNvSpPr>
+            <a:spLocks noChangeAspect="0"/>
+          </p:cNvSpPr>
+          <p:nvPr/>
+        </p:nvSpPr>
+        <p:spPr>
+          <a:xfrm>
+            <a:off x="8878824" y="5294376"/>
+            <a:ext cx="274320" cy="182880"/>
+          </a:xfrm>
+          <a:prstGeom prst="rightArrow">
+            <a:avLst/>
+          </a:prstGeom>
+          <a:solidFill>
+            <a:srgbClr val="595959"/>
+          </a:solidFill>
+          <a:ln>
+            <a:noFill/>
+          </a:ln>
+        </p:spPr>
+        <p:txBody>
+          <a:bodyPr anchor="ctr" wrap="square">
+            <a:normAutofit/>
+          </a:bodyPr>
+          <a:lstStyle/>
+          <a:p>
+            <a:pPr>
+              <a:lnSpc>
+                <a:spcPct val="100000"/>
+              </a:lnSpc>
+            </a:pPr>
+          </a:p>
+        </p:txBody>
+      </p:sp>
+      <p:sp>
+        <p:nvSpPr>
+          <p:cNvPr id="17443" name="tl"/>
+          <p:cNvSpPr>
+            <a:spLocks noChangeAspect="0"/>
+          </p:cNvSpPr>
+          <p:nvPr/>
+        </p:nvSpPr>
+        <p:spPr>
+          <a:xfrm>
+            <a:off x="9171432" y="5102352"/>
+            <a:ext cx="2542032" cy="566928"/>
+          </a:xfrm>
+          <a:prstGeom prst="roundRect">
+            <a:avLst/>
+          </a:prstGeom>
+          <a:solidFill>
+            <a:srgbClr val="003366"/>
+          </a:solidFill>
+          <a:ln w="12700">
+            <a:solidFill>
+              <a:srgbClr val="000000"/>
+            </a:solidFill>
+          </a:ln>
+        </p:spPr>
+        <p:txBody>
+          <a:bodyPr anchor="ctr" wrap="square">
+            <a:normAutofit/>
+          </a:bodyPr>
+          <a:lstStyle/>
+          <a:p>
+            <a:pPr algn="ctr">
+              <a:lnSpc>
+                <a:spcPct val="100000"/>
+              </a:lnSpc>
+            </a:pPr>
+            <a:r>
+              <a:rPr lang="en-US" sz="950" b="1" dirty="0">
+                <a:solidFill>
+                  <a:srgbClr val="FFFFFF"/>
+                </a:solidFill>
+                <a:latin typeface="Arial"/>
+                <a:ea typeface="Arial"/>
+                <a:cs typeface="Arial"/>
+              </a:rPr>
+              <a:t>Finale  ·  demo: 3 personas, push, adapters</a:t>
+            </a:r>
+          </a:p>
+        </p:txBody>
+      </p:sp>
+      <p:sp>
+        <p:nvSpPr>
+          <p:cNvPr id="17444" name="panel"/>
+          <p:cNvSpPr>
+            <a:spLocks noChangeAspect="0"/>
+          </p:cNvSpPr>
+          <p:nvPr/>
+        </p:nvSpPr>
+        <p:spPr>
+          <a:xfrm>
+            <a:off x="612648" y="5760720"/>
+            <a:ext cx="10954512" cy="566928"/>
+          </a:xfrm>
+          <a:prstGeom prst="roundRect">
+            <a:avLst/>
+          </a:prstGeom>
+          <a:solidFill>
+            <a:srgbClr val="F6E43B"/>
+          </a:solidFill>
+          <a:ln w="19050">
+            <a:solidFill>
+              <a:srgbClr val="000000"/>
+            </a:solidFill>
+          </a:ln>
+        </p:spPr>
+        <p:txBody>
+          <a:bodyPr anchor="ctr" wrap="square">
+            <a:normAutofit/>
+          </a:bodyPr>
+          <a:lstStyle/>
+          <a:p>
+            <a:pPr algn="ctr">
+              <a:lnSpc>
+                <a:spcPct val="100000"/>
+              </a:lnSpc>
+            </a:pPr>
+            <a:r>
+              <a:rPr lang="en-US" sz="1000" b="1" dirty="0">
+                <a:solidFill>
+                  <a:srgbClr val="D92B2B"/>
+                </a:solidFill>
+                <a:latin typeface="Arial"/>
+                <a:ea typeface="Arial"/>
+                <a:cs typeface="Arial"/>
+              </a:rPr>
+              <a:t>Viability: </a:t>
+            </a:r>
             <a:r>
               <a:rPr lang="en-US" sz="1000" dirty="0">
                 <a:solidFill>
@@ -9660,7 +10648,7 @@
                 <a:ea typeface="Arial"/>
                 <a:cs typeface="Arial"/>
               </a:rPr>
-              <a:t>Viability: one container on a static-IP VM · one IMD API account (2 DEV + 2 PROD keys, attribution ledger on request) · no paid services · IMD data with attribution; CPCB/CAMS labelled adapters.</a:t>
+              <a:t>one container on a static-IP VM · one IMD API account (2 DEV + 2 PROD keys, attribution ledger on request) · no paid services · IMD data with attribution; CPCB/CAMS labelled adapters.</a:t>
             </a:r>
           </a:p>
         </p:txBody>
@@ -9789,15 +10777,11 @@
           <a:bodyPr/>
           <a:lstStyle/>
           <a:p>
-            <a:pPr eaLnBrk="1" hangingPunct="1"/>
-            <a:r>
-              <a:rPr lang="en-US" sz="3600" b="1" dirty="0">
-                <a:latin typeface="Times New Roman" panose="02020603050405020304" pitchFamily="18" charset="0"/>
-                <a:ea typeface="ＭＳ Ｐゴシック" pitchFamily="1" charset="-128"/>
-                <a:cs typeface="Times New Roman" panose="02020603050405020304" pitchFamily="18" charset="0"/>
-              </a:rPr>
-              <a:t>IMPACT AND BENEFITS</a:t>
-            </a:r>
+            <a:pPr>
+              <a:lnSpc>
+                <a:spcPct val="100000"/>
+              </a:lnSpc>
+            </a:pPr>
           </a:p>
         </p:txBody>
       </p:sp>
@@ -10011,7 +10995,7 @@
         <p:spPr>
           <a:xfrm>
             <a:off x="329773" y="252246"/>
-            <a:ext cx="1251857" cy="807334"/>
+            <a:ext cx="1783080" cy="804672"/>
           </a:xfrm>
           <a:prstGeom prst="ellipse">
             <a:avLst/>
@@ -10037,7 +11021,11 @@
           <a:p>
             <a:pPr algn="ctr"/>
             <a:r>
-              <a:rPr lang="en-US" dirty="0"/>
+              <a:rPr lang="en-US" sz="1100" dirty="0">
+                <a:solidFill>
+                  <a:srgbClr val="003366"/>
+                </a:solidFill>
+              </a:rPr>
               <a:t>Zencoderss</a:t>
             </a:r>
             <a:endParaRPr lang="en-IN" dirty="0"/>
@@ -10076,7 +11064,7 @@
       </p:pic>
       <p:sp>
         <p:nvSpPr>
-          <p:cNvPr id="17412" name="imp"/>
+          <p:cNvPr id="17412" name="heading_pill"/>
           <p:cNvSpPr>
             <a:spLocks noChangeAspect="0"/>
           </p:cNvSpPr>
@@ -10084,15 +11072,119 @@
         </p:nvSpPr>
         <p:spPr>
           <a:xfrm>
-            <a:off x="612648" y="1115568"/>
-            <a:ext cx="8229600" cy="320040"/>
-          </a:xfrm>
-          <a:prstGeom prst="rect">
-            <a:avLst/>
-          </a:prstGeom>
-          <a:noFill/>
+            <a:off x="3466948" y="164592"/>
+            <a:ext cx="5257800" cy="676656"/>
+          </a:xfrm>
+          <a:prstGeom prst="roundRect">
+            <a:avLst>
+              <a:gd name="adj" fmla="val 50000"/>
+            </a:avLst>
+          </a:prstGeom>
+          <a:solidFill>
+            <a:srgbClr val="003366"/>
+          </a:solidFill>
           <a:ln>
             <a:noFill/>
+          </a:ln>
+        </p:spPr>
+        <p:txBody>
+          <a:bodyPr anchor="ctr" wrap="square">
+            <a:normAutofit/>
+          </a:bodyPr>
+          <a:lstStyle/>
+          <a:p>
+            <a:pPr algn="ctr">
+              <a:lnSpc>
+                <a:spcPct val="100000"/>
+              </a:lnSpc>
+            </a:pPr>
+            <a:r>
+              <a:rPr lang="en-US" sz="2400" b="1" dirty="0">
+                <a:solidFill>
+                  <a:srgbClr val="FFFFFF"/>
+                </a:solidFill>
+                <a:latin typeface="Arial Black"/>
+                <a:ea typeface="Arial Black"/>
+                <a:cs typeface="Arial Black"/>
+              </a:rPr>
+              <a:t>IMPACT AND BENEFITS</a:t>
+            </a:r>
+          </a:p>
+        </p:txBody>
+      </p:sp>
+      <p:sp>
+        <p:nvSpPr>
+          <p:cNvPr id="17413" name="chip"/>
+          <p:cNvSpPr>
+            <a:spLocks noChangeAspect="0"/>
+          </p:cNvSpPr>
+          <p:nvPr/>
+        </p:nvSpPr>
+        <p:spPr>
+          <a:xfrm>
+            <a:off x="612648" y="932688"/>
+            <a:ext cx="4663440" cy="310896"/>
+          </a:xfrm>
+          <a:prstGeom prst="roundRect">
+            <a:avLst>
+              <a:gd name="adj" fmla="val 50000"/>
+            </a:avLst>
+          </a:prstGeom>
+          <a:solidFill>
+            <a:srgbClr val="003366"/>
+          </a:solidFill>
+          <a:ln>
+            <a:noFill/>
+          </a:ln>
+        </p:spPr>
+        <p:txBody>
+          <a:bodyPr anchor="ctr" wrap="square">
+            <a:normAutofit/>
+          </a:bodyPr>
+          <a:lstStyle/>
+          <a:p>
+            <a:pPr algn="ctr">
+              <a:lnSpc>
+                <a:spcPct val="100000"/>
+              </a:lnSpc>
+            </a:pPr>
+            <a:r>
+              <a:rPr lang="en-US" sz="800" b="1" dirty="0">
+                <a:solidFill>
+                  <a:srgbClr val="FFFFFF"/>
+                </a:solidFill>
+                <a:latin typeface="Arial"/>
+                <a:ea typeface="Arial"/>
+                <a:cs typeface="Arial"/>
+              </a:rPr>
+              <a:t>Potential impact on the target audience</a:t>
+            </a:r>
+          </a:p>
+        </p:txBody>
+      </p:sp>
+      <p:sp>
+        <p:nvSpPr>
+          <p:cNvPr id="17414" name="panel"/>
+          <p:cNvSpPr>
+            <a:spLocks noChangeAspect="0"/>
+          </p:cNvSpPr>
+          <p:nvPr/>
+        </p:nvSpPr>
+        <p:spPr>
+          <a:xfrm>
+            <a:off x="612648" y="1335024"/>
+            <a:ext cx="7086600" cy="2377440"/>
+          </a:xfrm>
+          <a:prstGeom prst="roundRect">
+            <a:avLst/>
+          </a:prstGeom>
+          <a:solidFill>
+            <a:srgbClr val="D9EAFB"/>
+          </a:solidFill>
+          <a:ln w="19050">
+            <a:solidFill>
+              <a:srgbClr val="000000"/>
+            </a:solidFill>
           </a:ln>
         </p:spPr>
         <p:txBody>
@@ -10101,28 +11193,17 @@
           </a:bodyPr>
           <a:lstStyle/>
           <a:p>
-            <a:pPr algn="l" marL="0">
-              <a:lnSpc>
-                <a:spcPct val="100000"/>
-              </a:lnSpc>
-            </a:pPr>
-            <a:r>
-              <a:rPr lang="en-US" sz="1000" b="1" dirty="0">
-                <a:solidFill>
-                  <a:srgbClr val="003366"/>
-                </a:solidFill>
-                <a:latin typeface="Arial"/>
-                <a:ea typeface="Arial"/>
-                <a:cs typeface="Arial"/>
-              </a:rPr>
-              <a:t>Potential impact on the target audience</a:t>
-            </a:r>
-          </a:p>
-        </p:txBody>
-      </p:sp>
-      <p:sp>
-        <p:nvSpPr>
-          <p:cNvPr id="17413" name="per"/>
+            <a:pPr>
+              <a:lnSpc>
+                <a:spcPct val="100000"/>
+              </a:lnSpc>
+            </a:pPr>
+          </a:p>
+        </p:txBody>
+      </p:sp>
+      <p:sp>
+        <p:nvSpPr>
+          <p:cNvPr id="17415" name="chip"/>
           <p:cNvSpPr>
             <a:spLocks noChangeAspect="0"/>
           </p:cNvSpPr>
@@ -10130,11 +11211,13 @@
         </p:nvSpPr>
         <p:spPr>
           <a:xfrm>
-            <a:off x="612648" y="1481328"/>
-            <a:ext cx="1828800" cy="868680"/>
+            <a:off x="777240" y="1481328"/>
+            <a:ext cx="1417320" cy="640080"/>
           </a:xfrm>
           <a:prstGeom prst="roundRect">
-            <a:avLst/>
+            <a:avLst>
+              <a:gd name="adj" fmla="val 50000"/>
+            </a:avLst>
           </a:prstGeom>
           <a:solidFill>
             <a:srgbClr val="003366"/>
@@ -10149,13 +11232,13 @@
           </a:bodyPr>
           <a:lstStyle/>
           <a:p>
-            <a:pPr algn="ctr" marL="0">
-              <a:lnSpc>
-                <a:spcPct val="100000"/>
-              </a:lnSpc>
-            </a:pPr>
-            <a:r>
-              <a:rPr lang="en-US" sz="1200" b="1" dirty="0">
+            <a:pPr algn="ctr">
+              <a:lnSpc>
+                <a:spcPct val="100000"/>
+              </a:lnSpc>
+            </a:pPr>
+            <a:r>
+              <a:rPr lang="en-US" sz="1100" b="1" dirty="0">
                 <a:solidFill>
                   <a:srgbClr val="FFFFFF"/>
                 </a:solidFill>
@@ -10170,7 +11253,7 @@
       </p:sp>
       <p:sp>
         <p:nvSpPr>
-          <p:cNvPr id="17414" name="arr"/>
+          <p:cNvPr id="17416" name="arr"/>
           <p:cNvSpPr>
             <a:spLocks noChangeAspect="0"/>
           </p:cNvSpPr>
@@ -10178,14 +11261,14 @@
         </p:nvSpPr>
         <p:spPr>
           <a:xfrm>
-            <a:off x="2496312" y="1783080"/>
-            <a:ext cx="365760" cy="256032"/>
+            <a:off x="2286000" y="1673352"/>
+            <a:ext cx="347472" cy="256032"/>
           </a:xfrm>
           <a:prstGeom prst="rightArrow">
             <a:avLst/>
           </a:prstGeom>
           <a:solidFill>
-            <a:srgbClr val="F79646"/>
+            <a:srgbClr val="F26522"/>
           </a:solidFill>
           <a:ln>
             <a:noFill/>
@@ -10207,7 +11290,7 @@
       </p:sp>
       <p:sp>
         <p:nvSpPr>
-          <p:cNvPr id="17415" name="act"/>
+          <p:cNvPr id="17417" name="panel"/>
           <p:cNvSpPr>
             <a:spLocks noChangeAspect="0"/>
           </p:cNvSpPr>
@@ -10215,8 +11298,8 @@
         </p:nvSpPr>
         <p:spPr>
           <a:xfrm>
-            <a:off x="2916936" y="1481328"/>
-            <a:ext cx="2834640" cy="868680"/>
+            <a:off x="2724912" y="1481328"/>
+            <a:ext cx="2331720" cy="640080"/>
           </a:xfrm>
           <a:prstGeom prst="roundRect">
             <a:avLst/>
@@ -10224,9 +11307,9 @@
           <a:solidFill>
             <a:srgbClr val="FFFFFF"/>
           </a:solidFill>
-          <a:ln w="12700">
+          <a:ln w="19050">
             <a:solidFill>
-              <a:srgbClr val="4F81BD"/>
+              <a:srgbClr val="000000"/>
             </a:solidFill>
           </a:ln>
         </p:spPr>
@@ -10236,13 +11319,13 @@
           </a:bodyPr>
           <a:lstStyle/>
           <a:p>
-            <a:pPr algn="ctr" marL="0">
-              <a:lnSpc>
-                <a:spcPct val="100000"/>
-              </a:lnSpc>
-            </a:pPr>
-            <a:r>
-              <a:rPr lang="en-US" sz="1100" dirty="0">
+            <a:pPr algn="ctr">
+              <a:lnSpc>
+                <a:spcPct val="100000"/>
+              </a:lnSpc>
+            </a:pPr>
+            <a:r>
+              <a:rPr lang="en-US" sz="950" dirty="0">
                 <a:solidFill>
                   <a:srgbClr val="1A1A1A"/>
                 </a:solidFill>
@@ -10257,7 +11340,7 @@
       </p:sp>
       <p:sp>
         <p:nvSpPr>
-          <p:cNvPr id="17416" name="arr"/>
+          <p:cNvPr id="17418" name="arr"/>
           <p:cNvSpPr>
             <a:spLocks noChangeAspect="0"/>
           </p:cNvSpPr>
@@ -10265,14 +11348,14 @@
         </p:nvSpPr>
         <p:spPr>
           <a:xfrm>
-            <a:off x="5806440" y="1783080"/>
-            <a:ext cx="365760" cy="256032"/>
+            <a:off x="5138928" y="1673352"/>
+            <a:ext cx="347472" cy="256032"/>
           </a:xfrm>
           <a:prstGeom prst="rightArrow">
             <a:avLst/>
           </a:prstGeom>
           <a:solidFill>
-            <a:srgbClr val="F79646"/>
+            <a:srgbClr val="F26522"/>
           </a:solidFill>
           <a:ln>
             <a:noFill/>
@@ -10294,7 +11377,7 @@
       </p:sp>
       <p:sp>
         <p:nvSpPr>
-          <p:cNvPr id="17417" name="meas"/>
+          <p:cNvPr id="17419" name="panel"/>
           <p:cNvSpPr>
             <a:spLocks noChangeAspect="0"/>
           </p:cNvSpPr>
@@ -10302,18 +11385,18 @@
         </p:nvSpPr>
         <p:spPr>
           <a:xfrm>
-            <a:off x="6227064" y="1481328"/>
-            <a:ext cx="2560320" cy="868680"/>
+            <a:off x="5577840" y="1481328"/>
+            <a:ext cx="1965960" cy="640080"/>
           </a:xfrm>
           <a:prstGeom prst="roundRect">
             <a:avLst/>
           </a:prstGeom>
           <a:solidFill>
-            <a:srgbClr val="EAF1F8"/>
-          </a:solidFill>
-          <a:ln w="12700">
+            <a:srgbClr val="FFFFFF"/>
+          </a:solidFill>
+          <a:ln w="19050">
             <a:solidFill>
-              <a:srgbClr val="9BBB59"/>
+              <a:srgbClr val="5AAA46"/>
             </a:solidFill>
           </a:ln>
         </p:spPr>
@@ -10323,13 +11406,13 @@
           </a:bodyPr>
           <a:lstStyle/>
           <a:p>
-            <a:pPr algn="ctr" marL="0">
-              <a:lnSpc>
-                <a:spcPct val="100000"/>
-              </a:lnSpc>
-            </a:pPr>
-            <a:r>
-              <a:rPr lang="en-US" sz="900" b="1" dirty="0">
+            <a:pPr algn="ctr">
+              <a:lnSpc>
+                <a:spcPct val="100000"/>
+              </a:lnSpc>
+            </a:pPr>
+            <a:r>
+              <a:rPr lang="en-US" sz="750" b="1" dirty="0">
                 <a:solidFill>
                   <a:srgbClr val="595959"/>
                 </a:solidFill>
@@ -10341,13 +11424,13 @@
             </a:r>
           </a:p>
           <a:p>
-            <a:pPr algn="ctr" marL="0">
-              <a:lnSpc>
-                <a:spcPct val="100000"/>
-              </a:lnSpc>
-            </a:pPr>
-            <a:r>
-              <a:rPr lang="en-US" sz="1000" dirty="0">
+            <a:pPr algn="ctr">
+              <a:lnSpc>
+                <a:spcPct val="100000"/>
+              </a:lnSpc>
+            </a:pPr>
+            <a:r>
+              <a:rPr lang="en-US" sz="900" dirty="0">
                 <a:solidFill>
                   <a:srgbClr val="1A1A1A"/>
                 </a:solidFill>
@@ -10362,7 +11445,7 @@
       </p:sp>
       <p:sp>
         <p:nvSpPr>
-          <p:cNvPr id="17418" name="per"/>
+          <p:cNvPr id="17420" name="chip"/>
           <p:cNvSpPr>
             <a:spLocks noChangeAspect="0"/>
           </p:cNvSpPr>
@@ -10370,11 +11453,13 @@
         </p:nvSpPr>
         <p:spPr>
           <a:xfrm>
-            <a:off x="612648" y="2468880"/>
-            <a:ext cx="1828800" cy="868680"/>
+            <a:off x="777240" y="2231136"/>
+            <a:ext cx="1417320" cy="640080"/>
           </a:xfrm>
           <a:prstGeom prst="roundRect">
-            <a:avLst/>
+            <a:avLst>
+              <a:gd name="adj" fmla="val 50000"/>
+            </a:avLst>
           </a:prstGeom>
           <a:solidFill>
             <a:srgbClr val="003366"/>
@@ -10389,13 +11474,13 @@
           </a:bodyPr>
           <a:lstStyle/>
           <a:p>
-            <a:pPr algn="ctr" marL="0">
-              <a:lnSpc>
-                <a:spcPct val="100000"/>
-              </a:lnSpc>
-            </a:pPr>
-            <a:r>
-              <a:rPr lang="en-US" sz="1200" b="1" dirty="0">
+            <a:pPr algn="ctr">
+              <a:lnSpc>
+                <a:spcPct val="100000"/>
+              </a:lnSpc>
+            </a:pPr>
+            <a:r>
+              <a:rPr lang="en-US" sz="1100" b="1" dirty="0">
                 <a:solidFill>
                   <a:srgbClr val="FFFFFF"/>
                 </a:solidFill>
@@ -10410,7 +11495,7 @@
       </p:sp>
       <p:sp>
         <p:nvSpPr>
-          <p:cNvPr id="17419" name="arr"/>
+          <p:cNvPr id="17421" name="arr"/>
           <p:cNvSpPr>
             <a:spLocks noChangeAspect="0"/>
           </p:cNvSpPr>
@@ -10418,14 +11503,14 @@
         </p:nvSpPr>
         <p:spPr>
           <a:xfrm>
-            <a:off x="2496312" y="2770632"/>
-            <a:ext cx="365760" cy="256032"/>
+            <a:off x="2286000" y="2423160"/>
+            <a:ext cx="347472" cy="256032"/>
           </a:xfrm>
           <a:prstGeom prst="rightArrow">
             <a:avLst/>
           </a:prstGeom>
           <a:solidFill>
-            <a:srgbClr val="F79646"/>
+            <a:srgbClr val="F26522"/>
           </a:solidFill>
           <a:ln>
             <a:noFill/>
@@ -10447,7 +11532,7 @@
       </p:sp>
       <p:sp>
         <p:nvSpPr>
-          <p:cNvPr id="17420" name="act"/>
+          <p:cNvPr id="17422" name="panel"/>
           <p:cNvSpPr>
             <a:spLocks noChangeAspect="0"/>
           </p:cNvSpPr>
@@ -10455,8 +11540,8 @@
         </p:nvSpPr>
         <p:spPr>
           <a:xfrm>
-            <a:off x="2916936" y="2468880"/>
-            <a:ext cx="2834640" cy="868680"/>
+            <a:off x="2724912" y="2231136"/>
+            <a:ext cx="2331720" cy="640080"/>
           </a:xfrm>
           <a:prstGeom prst="roundRect">
             <a:avLst/>
@@ -10464,9 +11549,9 @@
           <a:solidFill>
             <a:srgbClr val="FFFFFF"/>
           </a:solidFill>
-          <a:ln w="12700">
+          <a:ln w="19050">
             <a:solidFill>
-              <a:srgbClr val="4F81BD"/>
+              <a:srgbClr val="000000"/>
             </a:solidFill>
           </a:ln>
         </p:spPr>
@@ -10476,13 +11561,13 @@
           </a:bodyPr>
           <a:lstStyle/>
           <a:p>
-            <a:pPr algn="ctr" marL="0">
-              <a:lnSpc>
-                <a:spcPct val="100000"/>
-              </a:lnSpc>
-            </a:pPr>
-            <a:r>
-              <a:rPr lang="en-US" sz="1100" dirty="0">
+            <a:pPr algn="ctr">
+              <a:lnSpc>
+                <a:spcPct val="100000"/>
+              </a:lnSpc>
+            </a:pPr>
+            <a:r>
+              <a:rPr lang="en-US" sz="950" dirty="0">
                 <a:solidFill>
                   <a:srgbClr val="1A1A1A"/>
                 </a:solidFill>
@@ -10498,7 +11583,7 @@
       </p:sp>
       <p:sp>
         <p:nvSpPr>
-          <p:cNvPr id="17421" name="arr"/>
+          <p:cNvPr id="17423" name="arr"/>
           <p:cNvSpPr>
             <a:spLocks noChangeAspect="0"/>
           </p:cNvSpPr>
@@ -10506,14 +11591,14 @@
         </p:nvSpPr>
         <p:spPr>
           <a:xfrm>
-            <a:off x="5806440" y="2770632"/>
-            <a:ext cx="365760" cy="256032"/>
+            <a:off x="5138928" y="2423160"/>
+            <a:ext cx="347472" cy="256032"/>
           </a:xfrm>
           <a:prstGeom prst="rightArrow">
             <a:avLst/>
           </a:prstGeom>
           <a:solidFill>
-            <a:srgbClr val="F79646"/>
+            <a:srgbClr val="F26522"/>
           </a:solidFill>
           <a:ln>
             <a:noFill/>
@@ -10535,7 +11620,7 @@
       </p:sp>
       <p:sp>
         <p:nvSpPr>
-          <p:cNvPr id="17422" name="meas"/>
+          <p:cNvPr id="17424" name="panel"/>
           <p:cNvSpPr>
             <a:spLocks noChangeAspect="0"/>
           </p:cNvSpPr>
@@ -10543,18 +11628,18 @@
         </p:nvSpPr>
         <p:spPr>
           <a:xfrm>
-            <a:off x="6227064" y="2468880"/>
-            <a:ext cx="2560320" cy="868680"/>
+            <a:off x="5577840" y="2231136"/>
+            <a:ext cx="1965960" cy="640080"/>
           </a:xfrm>
           <a:prstGeom prst="roundRect">
             <a:avLst/>
           </a:prstGeom>
           <a:solidFill>
-            <a:srgbClr val="EAF1F8"/>
-          </a:solidFill>
-          <a:ln w="12700">
+            <a:srgbClr val="FFFFFF"/>
+          </a:solidFill>
+          <a:ln w="19050">
             <a:solidFill>
-              <a:srgbClr val="9BBB59"/>
+              <a:srgbClr val="5AAA46"/>
             </a:solidFill>
           </a:ln>
         </p:spPr>
@@ -10564,13 +11649,13 @@
           </a:bodyPr>
           <a:lstStyle/>
           <a:p>
-            <a:pPr algn="ctr" marL="0">
-              <a:lnSpc>
-                <a:spcPct val="100000"/>
-              </a:lnSpc>
-            </a:pPr>
-            <a:r>
-              <a:rPr lang="en-US" sz="900" b="1" dirty="0">
+            <a:pPr algn="ctr">
+              <a:lnSpc>
+                <a:spcPct val="100000"/>
+              </a:lnSpc>
+            </a:pPr>
+            <a:r>
+              <a:rPr lang="en-US" sz="750" b="1" dirty="0">
                 <a:solidFill>
                   <a:srgbClr val="595959"/>
                 </a:solidFill>
@@ -10582,13 +11667,13 @@
             </a:r>
           </a:p>
           <a:p>
-            <a:pPr algn="ctr" marL="0">
-              <a:lnSpc>
-                <a:spcPct val="100000"/>
-              </a:lnSpc>
-            </a:pPr>
-            <a:r>
-              <a:rPr lang="en-US" sz="1000" dirty="0">
+            <a:pPr algn="ctr">
+              <a:lnSpc>
+                <a:spcPct val="100000"/>
+              </a:lnSpc>
+            </a:pPr>
+            <a:r>
+              <a:rPr lang="en-US" sz="900" dirty="0">
                 <a:solidFill>
                   <a:srgbClr val="1A1A1A"/>
                 </a:solidFill>
@@ -10603,7 +11688,7 @@
       </p:sp>
       <p:sp>
         <p:nvSpPr>
-          <p:cNvPr id="17423" name="per"/>
+          <p:cNvPr id="17425" name="chip"/>
           <p:cNvSpPr>
             <a:spLocks noChangeAspect="0"/>
           </p:cNvSpPr>
@@ -10611,11 +11696,13 @@
         </p:nvSpPr>
         <p:spPr>
           <a:xfrm>
-            <a:off x="612648" y="3456432"/>
-            <a:ext cx="1828800" cy="868680"/>
+            <a:off x="777240" y="2980944"/>
+            <a:ext cx="1417320" cy="640080"/>
           </a:xfrm>
           <a:prstGeom prst="roundRect">
-            <a:avLst/>
+            <a:avLst>
+              <a:gd name="adj" fmla="val 50000"/>
+            </a:avLst>
           </a:prstGeom>
           <a:solidFill>
             <a:srgbClr val="003366"/>
@@ -10630,13 +11717,13 @@
           </a:bodyPr>
           <a:lstStyle/>
           <a:p>
-            <a:pPr algn="ctr" marL="0">
-              <a:lnSpc>
-                <a:spcPct val="100000"/>
-              </a:lnSpc>
-            </a:pPr>
-            <a:r>
-              <a:rPr lang="en-US" sz="1200" b="1" dirty="0">
+            <a:pPr algn="ctr">
+              <a:lnSpc>
+                <a:spcPct val="100000"/>
+              </a:lnSpc>
+            </a:pPr>
+            <a:r>
+              <a:rPr lang="en-US" sz="1100" b="1" dirty="0">
                 <a:solidFill>
                   <a:srgbClr val="FFFFFF"/>
                 </a:solidFill>
@@ -10651,7 +11738,7 @@
       </p:sp>
       <p:sp>
         <p:nvSpPr>
-          <p:cNvPr id="17424" name="arr"/>
+          <p:cNvPr id="17426" name="arr"/>
           <p:cNvSpPr>
             <a:spLocks noChangeAspect="0"/>
           </p:cNvSpPr>
@@ -10659,14 +11746,14 @@
         </p:nvSpPr>
         <p:spPr>
           <a:xfrm>
-            <a:off x="2496312" y="3758184"/>
-            <a:ext cx="365760" cy="256032"/>
+            <a:off x="2286000" y="3172968"/>
+            <a:ext cx="347472" cy="256032"/>
           </a:xfrm>
           <a:prstGeom prst="rightArrow">
             <a:avLst/>
           </a:prstGeom>
           <a:solidFill>
-            <a:srgbClr val="F79646"/>
+            <a:srgbClr val="F26522"/>
           </a:solidFill>
           <a:ln>
             <a:noFill/>
@@ -10688,7 +11775,7 @@
       </p:sp>
       <p:sp>
         <p:nvSpPr>
-          <p:cNvPr id="17425" name="act"/>
+          <p:cNvPr id="17427" name="panel"/>
           <p:cNvSpPr>
             <a:spLocks noChangeAspect="0"/>
           </p:cNvSpPr>
@@ -10696,8 +11783,8 @@
         </p:nvSpPr>
         <p:spPr>
           <a:xfrm>
-            <a:off x="2916936" y="3456432"/>
-            <a:ext cx="2834640" cy="868680"/>
+            <a:off x="2724912" y="2980944"/>
+            <a:ext cx="2331720" cy="640080"/>
           </a:xfrm>
           <a:prstGeom prst="roundRect">
             <a:avLst/>
@@ -10705,9 +11792,9 @@
           <a:solidFill>
             <a:srgbClr val="FFFFFF"/>
           </a:solidFill>
-          <a:ln w="12700">
+          <a:ln w="19050">
             <a:solidFill>
-              <a:srgbClr val="4F81BD"/>
+              <a:srgbClr val="000000"/>
             </a:solidFill>
           </a:ln>
         </p:spPr>
@@ -10717,13 +11804,13 @@
           </a:bodyPr>
           <a:lstStyle/>
           <a:p>
-            <a:pPr algn="ctr" marL="0">
-              <a:lnSpc>
-                <a:spcPct val="100000"/>
-              </a:lnSpc>
-            </a:pPr>
-            <a:r>
-              <a:rPr lang="en-US" sz="1100" dirty="0">
+            <a:pPr algn="ctr">
+              <a:lnSpc>
+                <a:spcPct val="100000"/>
+              </a:lnSpc>
+            </a:pPr>
+            <a:r>
+              <a:rPr lang="en-US" sz="950" dirty="0">
                 <a:solidFill>
                   <a:srgbClr val="1A1A1A"/>
                 </a:solidFill>
@@ -10739,7 +11826,7 @@
       </p:sp>
       <p:sp>
         <p:nvSpPr>
-          <p:cNvPr id="17426" name="arr"/>
+          <p:cNvPr id="17428" name="arr"/>
           <p:cNvSpPr>
             <a:spLocks noChangeAspect="0"/>
           </p:cNvSpPr>
@@ -10747,14 +11834,14 @@
         </p:nvSpPr>
         <p:spPr>
           <a:xfrm>
-            <a:off x="5806440" y="3758184"/>
-            <a:ext cx="365760" cy="256032"/>
+            <a:off x="5138928" y="3172968"/>
+            <a:ext cx="347472" cy="256032"/>
           </a:xfrm>
           <a:prstGeom prst="rightArrow">
             <a:avLst/>
           </a:prstGeom>
           <a:solidFill>
-            <a:srgbClr val="F79646"/>
+            <a:srgbClr val="F26522"/>
           </a:solidFill>
           <a:ln>
             <a:noFill/>
@@ -10776,7 +11863,7 @@
       </p:sp>
       <p:sp>
         <p:nvSpPr>
-          <p:cNvPr id="17427" name="meas"/>
+          <p:cNvPr id="17429" name="panel"/>
           <p:cNvSpPr>
             <a:spLocks noChangeAspect="0"/>
           </p:cNvSpPr>
@@ -10784,18 +11871,18 @@
         </p:nvSpPr>
         <p:spPr>
           <a:xfrm>
-            <a:off x="6227064" y="3456432"/>
-            <a:ext cx="2560320" cy="868680"/>
+            <a:off x="5577840" y="2980944"/>
+            <a:ext cx="1965960" cy="640080"/>
           </a:xfrm>
           <a:prstGeom prst="roundRect">
             <a:avLst/>
           </a:prstGeom>
           <a:solidFill>
-            <a:srgbClr val="EAF1F8"/>
-          </a:solidFill>
-          <a:ln w="12700">
+            <a:srgbClr val="FFFFFF"/>
+          </a:solidFill>
+          <a:ln w="19050">
             <a:solidFill>
-              <a:srgbClr val="9BBB59"/>
+              <a:srgbClr val="5AAA46"/>
             </a:solidFill>
           </a:ln>
         </p:spPr>
@@ -10805,13 +11892,13 @@
           </a:bodyPr>
           <a:lstStyle/>
           <a:p>
-            <a:pPr algn="ctr" marL="0">
-              <a:lnSpc>
-                <a:spcPct val="100000"/>
-              </a:lnSpc>
-            </a:pPr>
-            <a:r>
-              <a:rPr lang="en-US" sz="900" b="1" dirty="0">
+            <a:pPr algn="ctr">
+              <a:lnSpc>
+                <a:spcPct val="100000"/>
+              </a:lnSpc>
+            </a:pPr>
+            <a:r>
+              <a:rPr lang="en-US" sz="750" b="1" dirty="0">
                 <a:solidFill>
                   <a:srgbClr val="595959"/>
                 </a:solidFill>
@@ -10823,13 +11910,13 @@
             </a:r>
           </a:p>
           <a:p>
-            <a:pPr algn="ctr" marL="0">
-              <a:lnSpc>
-                <a:spcPct val="100000"/>
-              </a:lnSpc>
-            </a:pPr>
-            <a:r>
-              <a:rPr lang="en-US" sz="1000" dirty="0">
+            <a:pPr algn="ctr">
+              <a:lnSpc>
+                <a:spcPct val="100000"/>
+              </a:lnSpc>
+            </a:pPr>
+            <a:r>
+              <a:rPr lang="en-US" sz="900" dirty="0">
                 <a:solidFill>
                   <a:srgbClr val="1A1A1A"/>
                 </a:solidFill>
@@ -10838,13 +11925,310 @@
                 <a:cs typeface="Arial"/>
               </a:rPr>
               <a:t>% reading the gap as a gap</a:t>
+            </a:r>
+          </a:p>
+        </p:txBody>
+      </p:sp>
+      <p:sp>
+        <p:nvSpPr>
+          <p:cNvPr id="17430" name="chip"/>
+          <p:cNvSpPr>
+            <a:spLocks noChangeAspect="0"/>
+          </p:cNvSpPr>
+          <p:nvPr/>
+        </p:nvSpPr>
+        <p:spPr>
+          <a:xfrm>
+            <a:off x="612648" y="3877056"/>
+            <a:ext cx="7086600" cy="310896"/>
+          </a:xfrm>
+          <a:prstGeom prst="roundRect">
+            <a:avLst>
+              <a:gd name="adj" fmla="val 50000"/>
+            </a:avLst>
+          </a:prstGeom>
+          <a:solidFill>
+            <a:srgbClr val="003366"/>
+          </a:solidFill>
+          <a:ln>
+            <a:noFill/>
+          </a:ln>
+        </p:spPr>
+        <p:txBody>
+          <a:bodyPr anchor="ctr" wrap="square">
+            <a:normAutofit/>
+          </a:bodyPr>
+          <a:lstStyle/>
+          <a:p>
+            <a:pPr algn="ctr">
+              <a:lnSpc>
+                <a:spcPct val="100000"/>
+              </a:lnSpc>
+            </a:pPr>
+            <a:r>
+              <a:rPr lang="en-US" sz="800" b="1" dirty="0">
+                <a:solidFill>
+                  <a:srgbClr val="FFFFFF"/>
+                </a:solidFill>
+                <a:latin typeface="Arial"/>
+                <a:ea typeface="Arial"/>
+                <a:cs typeface="Arial"/>
+              </a:rPr>
+              <a:t>Benefits of the solution (social, economic, environmental, etc.)</a:t>
+            </a:r>
+          </a:p>
+        </p:txBody>
+      </p:sp>
+      <p:sp>
+        <p:nvSpPr>
+          <p:cNvPr id="17431" name="panel"/>
+          <p:cNvSpPr>
+            <a:spLocks noChangeAspect="0"/>
+          </p:cNvSpPr>
+          <p:nvPr/>
+        </p:nvSpPr>
+        <p:spPr>
+          <a:xfrm>
+            <a:off x="612648" y="4279392"/>
+            <a:ext cx="7086600" cy="2048256"/>
+          </a:xfrm>
+          <a:prstGeom prst="roundRect">
+            <a:avLst/>
+          </a:prstGeom>
+          <a:solidFill>
+            <a:srgbClr val="FBE1EE"/>
+          </a:solidFill>
+          <a:ln w="19050">
+            <a:solidFill>
+              <a:srgbClr val="000000"/>
+            </a:solidFill>
+          </a:ln>
+        </p:spPr>
+        <p:txBody>
+          <a:bodyPr anchor="t" wrap="square">
+            <a:normAutofit/>
+          </a:bodyPr>
+          <a:lstStyle/>
+          <a:p>
+            <a:pPr algn="l">
+              <a:lnSpc>
+                <a:spcPct val="100000"/>
+              </a:lnSpc>
+              <a:spcAft>
+                <a:spcPts val="1200"/>
+              </a:spcAft>
+            </a:pPr>
+            <a:r>
+              <a:rPr lang="en-US" sz="1100" b="1" dirty="0">
+                <a:solidFill>
+                  <a:srgbClr val="E5399A"/>
+                </a:solidFill>
+                <a:latin typeface="Arial"/>
+                <a:ea typeface="Arial"/>
+                <a:cs typeface="Arial"/>
+              </a:rPr>
+              <a:t>●  </a:t>
+            </a:r>
+            <a:r>
+              <a:rPr lang="en-US" sz="1100" b="1" dirty="0">
+                <a:solidFill>
+                  <a:srgbClr val="D92B2B"/>
+                </a:solidFill>
+                <a:latin typeface="Arial"/>
+                <a:ea typeface="Arial"/>
+                <a:cs typeface="Arial"/>
+              </a:rPr>
+              <a:t>Earlier action: </a:t>
+            </a:r>
+            <a:r>
+              <a:rPr lang="en-US" sz="1100" dirty="0">
+                <a:solidFill>
+                  <a:srgbClr val="1A1A1A"/>
+                </a:solidFill>
+                <a:latin typeface="Arial"/>
+                <a:ea typeface="Arial"/>
+                <a:cs typeface="Arial"/>
+              </a:rPr>
+              <a:t>each card states what to do and how fast.</a:t>
+            </a:r>
+          </a:p>
+          <a:p>
+            <a:pPr algn="l">
+              <a:lnSpc>
+                <a:spcPct val="100000"/>
+              </a:lnSpc>
+              <a:spcAft>
+                <a:spcPts val="1200"/>
+              </a:spcAft>
+            </a:pPr>
+            <a:r>
+              <a:rPr lang="en-US" sz="1100" b="1" dirty="0">
+                <a:solidFill>
+                  <a:srgbClr val="E5399A"/>
+                </a:solidFill>
+                <a:latin typeface="Arial"/>
+                <a:ea typeface="Arial"/>
+                <a:cs typeface="Arial"/>
+              </a:rPr>
+              <a:t>●  </a:t>
+            </a:r>
+            <a:r>
+              <a:rPr lang="en-US" sz="1100" b="1" dirty="0">
+                <a:solidFill>
+                  <a:srgbClr val="D92B2B"/>
+                </a:solidFill>
+                <a:latin typeface="Arial"/>
+                <a:ea typeface="Arial"/>
+                <a:cs typeface="Arial"/>
+              </a:rPr>
+              <a:t>Traceable trust: </a:t>
+            </a:r>
+            <a:r>
+              <a:rPr lang="en-US" sz="1100" dirty="0">
+                <a:solidFill>
+                  <a:srgbClr val="1A1A1A"/>
+                </a:solidFill>
+                <a:latin typeface="Arial"/>
+                <a:ea typeface="Arial"/>
+                <a:cs typeface="Arial"/>
+              </a:rPr>
+              <a:t>every reading names source, station and age.</a:t>
+            </a:r>
+          </a:p>
+          <a:p>
+            <a:pPr algn="l">
+              <a:lnSpc>
+                <a:spcPct val="100000"/>
+              </a:lnSpc>
+              <a:spcAft>
+                <a:spcPts val="1200"/>
+              </a:spcAft>
+            </a:pPr>
+            <a:r>
+              <a:rPr lang="en-US" sz="1100" b="1" dirty="0">
+                <a:solidFill>
+                  <a:srgbClr val="E5399A"/>
+                </a:solidFill>
+                <a:latin typeface="Arial"/>
+                <a:ea typeface="Arial"/>
+                <a:cs typeface="Arial"/>
+              </a:rPr>
+              <a:t>●  </a:t>
+            </a:r>
+            <a:r>
+              <a:rPr lang="en-US" sz="1100" b="1" dirty="0">
+                <a:solidFill>
+                  <a:srgbClr val="D92B2B"/>
+                </a:solidFill>
+                <a:latin typeface="Arial"/>
+                <a:ea typeface="Arial"/>
+                <a:cs typeface="Arial"/>
+              </a:rPr>
+              <a:t>Works offline: </a:t>
+            </a:r>
+            <a:r>
+              <a:rPr lang="en-US" sz="1100" dirty="0">
+                <a:solidFill>
+                  <a:srgbClr val="1A1A1A"/>
+                </a:solidFill>
+                <a:latin typeface="Arial"/>
+                <a:ea typeface="Arial"/>
+                <a:cs typeface="Arial"/>
+              </a:rPr>
+              <a:t>the home shell keeps the last forecast.</a:t>
+            </a:r>
+          </a:p>
+          <a:p>
+            <a:pPr algn="l">
+              <a:lnSpc>
+                <a:spcPct val="100000"/>
+              </a:lnSpc>
+              <a:spcAft>
+                <a:spcPts val="1200"/>
+              </a:spcAft>
+            </a:pPr>
+            <a:r>
+              <a:rPr lang="en-US" sz="1100" b="1" dirty="0">
+                <a:solidFill>
+                  <a:srgbClr val="E5399A"/>
+                </a:solidFill>
+                <a:latin typeface="Arial"/>
+                <a:ea typeface="Arial"/>
+                <a:cs typeface="Arial"/>
+              </a:rPr>
+              <a:t>●  </a:t>
+            </a:r>
+            <a:r>
+              <a:rPr lang="en-US" sz="1100" b="1" dirty="0">
+                <a:solidFill>
+                  <a:srgbClr val="D92B2B"/>
+                </a:solidFill>
+                <a:latin typeface="Arial"/>
+                <a:ea typeface="Arial"/>
+                <a:cs typeface="Arial"/>
+              </a:rPr>
+              <a:t>Hindi + English: </a:t>
+            </a:r>
+            <a:r>
+              <a:rPr lang="en-US" sz="1100" dirty="0">
+                <a:solidFill>
+                  <a:srgbClr val="1A1A1A"/>
+                </a:solidFill>
+                <a:latin typeface="Arial"/>
+                <a:ea typeface="Arial"/>
+                <a:cs typeface="Arial"/>
+              </a:rPr>
+              <a:t>warning text is human-reviewed, never raw machine translation.</a:t>
+            </a:r>
+          </a:p>
+          <a:p>
+            <a:pPr algn="l">
+              <a:lnSpc>
+                <a:spcPct val="100000"/>
+              </a:lnSpc>
+              <a:spcAft>
+                <a:spcPts val="1200"/>
+              </a:spcAft>
+            </a:pPr>
+            <a:r>
+              <a:rPr lang="en-US" sz="1100" b="1" dirty="0">
+                <a:solidFill>
+                  <a:srgbClr val="E5399A"/>
+                </a:solidFill>
+                <a:latin typeface="Arial"/>
+                <a:ea typeface="Arial"/>
+                <a:cs typeface="Arial"/>
+              </a:rPr>
+              <a:t>●  </a:t>
+            </a:r>
+            <a:r>
+              <a:rPr lang="en-US" sz="1100" b="1" dirty="0">
+                <a:solidFill>
+                  <a:srgbClr val="D92B2B"/>
+                </a:solidFill>
+                <a:latin typeface="Arial"/>
+                <a:ea typeface="Arial"/>
+                <a:cs typeface="Arial"/>
+              </a:rPr>
+              <a:t>Honest gaps: </a:t>
+            </a:r>
+            <a:r>
+              <a:rPr lang="en-US" sz="1100" dirty="0">
+                <a:solidFill>
+                  <a:srgbClr val="1A1A1A"/>
+                </a:solidFill>
+                <a:latin typeface="Arial"/>
+                <a:ea typeface="Arial"/>
+                <a:cs typeface="Arial"/>
+              </a:rPr>
+              <a:t>missing data shows as a gap, never a fake zero.</a:t>
             </a:r>
           </a:p>
         </p:txBody>
       </p:sp>
       <p:pic>
         <p:nvPicPr>
-          <p:cNvPr id="17428" name="shot-hi"/>
+          <p:cNvPr id="17432" name="shot-hi"/>
           <p:cNvPicPr/>
         </p:nvPicPr>
         <p:blipFill>
@@ -10855,68 +12239,73 @@
         </p:blipFill>
         <p:spPr>
           <a:xfrm>
-            <a:off x="9098280" y="1481328"/>
-            <a:ext cx="1554480" cy="3017520"/>
+            <a:off x="8915400" y="1335024"/>
+            <a:ext cx="1645920" cy="3566160"/>
           </a:xfrm>
           <a:prstGeom prst="roundRect">
             <a:avLst/>
           </a:prstGeom>
           <a:noFill/>
+          <a:ln w="19050">
+            <a:solidFill>
+              <a:srgbClr val="000000"/>
+            </a:solidFill>
+          </a:ln>
+        </p:spPr>
+      </p:pic>
+      <p:sp>
+        <p:nvSpPr>
+          <p:cNvPr id="17433" name="chip"/>
+          <p:cNvSpPr>
+            <a:spLocks noChangeAspect="0"/>
+          </p:cNvSpPr>
+          <p:nvPr/>
+        </p:nvSpPr>
+        <p:spPr>
+          <a:xfrm>
+            <a:off x="7909560" y="4992624"/>
+            <a:ext cx="3657600" cy="292608"/>
+          </a:xfrm>
+          <a:prstGeom prst="roundRect">
+            <a:avLst>
+              <a:gd name="adj" fmla="val 50000"/>
+            </a:avLst>
+          </a:prstGeom>
+          <a:solidFill>
+            <a:srgbClr val="F6E43B"/>
+          </a:solidFill>
           <a:ln>
             <a:noFill/>
           </a:ln>
         </p:spPr>
-      </p:pic>
-      <p:sp>
-        <p:nvSpPr>
-          <p:cNvPr id="17429" name="hicap"/>
-          <p:cNvSpPr>
-            <a:spLocks noChangeAspect="0"/>
-          </p:cNvSpPr>
-          <p:nvPr/>
-        </p:nvSpPr>
-        <p:spPr>
-          <a:xfrm>
-            <a:off x="8915400" y="4526280"/>
-            <a:ext cx="1920240" cy="457200"/>
-          </a:xfrm>
-          <a:prstGeom prst="rect">
-            <a:avLst/>
-          </a:prstGeom>
-          <a:noFill/>
-          <a:ln>
-            <a:noFill/>
-          </a:ln>
-        </p:spPr>
-        <p:txBody>
-          <a:bodyPr anchor="t" wrap="square">
+        <p:txBody>
+          <a:bodyPr anchor="ctr" wrap="square">
             <a:normAutofit/>
           </a:bodyPr>
           <a:lstStyle/>
           <a:p>
-            <a:pPr algn="ctr" marL="0">
-              <a:lnSpc>
-                <a:spcPct val="100000"/>
-              </a:lnSpc>
-            </a:pPr>
-            <a:r>
-              <a:rPr lang="en-US" sz="900" dirty="0">
-                <a:solidFill>
-                  <a:srgbClr val="595959"/>
-                </a:solidFill>
-                <a:latin typeface="Arial"/>
-                <a:ea typeface="Arial"/>
-                <a:cs typeface="Arial"/>
-              </a:rPr>
-              <a:t>Hindi onboarding +
-offline shell (illustrative)</a:t>
-            </a:r>
-          </a:p>
-        </p:txBody>
-      </p:sp>
-      <p:sp>
-        <p:nvSpPr>
-          <p:cNvPr id="17430" name="ben"/>
+            <a:pPr algn="ctr">
+              <a:lnSpc>
+                <a:spcPct val="100000"/>
+              </a:lnSpc>
+            </a:pPr>
+            <a:r>
+              <a:rPr lang="en-US" sz="750" b="1" dirty="0">
+                <a:solidFill>
+                  <a:srgbClr val="000000"/>
+                </a:solidFill>
+                <a:latin typeface="Arial"/>
+                <a:ea typeface="Arial"/>
+                <a:cs typeface="Arial"/>
+              </a:rPr>
+              <a:t>HINDI ONBOARDING · OFFLINE SHELL</a:t>
+            </a:r>
+          </a:p>
+        </p:txBody>
+      </p:sp>
+      <p:sp>
+        <p:nvSpPr>
+          <p:cNvPr id="17434" name="panel"/>
           <p:cNvSpPr>
             <a:spLocks noChangeAspect="0"/>
           </p:cNvSpPr>
@@ -10924,56 +12313,42 @@
         </p:nvSpPr>
         <p:spPr>
           <a:xfrm>
-            <a:off x="612648" y="5074920"/>
-            <a:ext cx="10954512" cy="1051560"/>
-          </a:xfrm>
-          <a:prstGeom prst="rect">
+            <a:off x="7909560" y="5376672"/>
+            <a:ext cx="3657600" cy="950976"/>
+          </a:xfrm>
+          <a:prstGeom prst="roundRect">
             <a:avLst/>
           </a:prstGeom>
-          <a:noFill/>
-          <a:ln>
-            <a:noFill/>
-          </a:ln>
-        </p:spPr>
-        <p:txBody>
-          <a:bodyPr anchor="t" wrap="square">
+          <a:solidFill>
+            <a:srgbClr val="003366"/>
+          </a:solidFill>
+          <a:ln w="19050">
+            <a:solidFill>
+              <a:srgbClr val="003366"/>
+            </a:solidFill>
+          </a:ln>
+        </p:spPr>
+        <p:txBody>
+          <a:bodyPr anchor="ctr" wrap="square">
             <a:normAutofit/>
           </a:bodyPr>
           <a:lstStyle/>
           <a:p>
-            <a:pPr algn="l" marL="0">
-              <a:lnSpc>
-                <a:spcPct val="100000"/>
-              </a:lnSpc>
-            </a:pPr>
-            <a:r>
-              <a:rPr lang="en-US" sz="1000" b="1" dirty="0">
-                <a:solidFill>
-                  <a:srgbClr val="003366"/>
-                </a:solidFill>
-                <a:latin typeface="Arial"/>
-                <a:ea typeface="Arial"/>
-                <a:cs typeface="Arial"/>
-              </a:rPr>
-              <a:t>Benefits of the solution (social, economic, environmental, etc.)</a:t>
-            </a:r>
-          </a:p>
-          <a:p>
-            <a:pPr algn="l" marL="0">
-              <a:lnSpc>
-                <a:spcPct val="100000"/>
-              </a:lnSpc>
-            </a:pPr>
-            <a:r>
-              <a:rPr lang="en-US" sz="1100" dirty="0">
-                <a:solidFill>
-                  <a:srgbClr val="1A1A1A"/>
-                </a:solidFill>
-                <a:latin typeface="Arial"/>
-                <a:ea typeface="Arial"/>
-                <a:cs typeface="Arial"/>
-              </a:rPr>
-              <a:t>Warning text is human-reviewed, never raw machine translation. No invented statistics: impact is measured in the pilot — can users state the action, how fast, does every card replay.</a:t>
+            <a:pPr algn="ctr">
+              <a:lnSpc>
+                <a:spcPct val="100000"/>
+              </a:lnSpc>
+            </a:pPr>
+            <a:r>
+              <a:rPr lang="en-US" sz="1100" b="1" dirty="0">
+                <a:solidFill>
+                  <a:srgbClr val="FFFFFF"/>
+                </a:solidFill>
+                <a:latin typeface="Arial"/>
+                <a:ea typeface="Arial"/>
+                <a:cs typeface="Arial"/>
+              </a:rPr>
+              <a:t>No invented statistics. Impact is measured in the pilot.</a:t>
             </a:r>
           </a:p>
         </p:txBody>
@@ -11102,15 +12477,11 @@
           <a:bodyPr/>
           <a:lstStyle/>
           <a:p>
-            <a:pPr eaLnBrk="1" hangingPunct="1"/>
-            <a:r>
-              <a:rPr lang="en-US" sz="3600" b="1" dirty="274320">
-                <a:latin typeface="Times New Roman" panose="02020603050405020304" pitchFamily="18" charset="0"/>
-                <a:ea typeface="ＭＳ Ｐゴシック" pitchFamily="1" charset="-128"/>
-                <a:cs typeface="Times New Roman" panose="02020603050405020304" pitchFamily="18" charset="0"/>
-              </a:rPr>
-              <a:t>RESEARCH  AND REFERENCES</a:t>
-            </a:r>
+            <a:pPr>
+              <a:lnSpc>
+                <a:spcPct val="100000"/>
+              </a:lnSpc>
+            </a:pPr>
           </a:p>
         </p:txBody>
       </p:sp>
@@ -11125,7 +12496,7 @@
         <p:spPr bwMode="auto">
           <a:xfrm>
             <a:off x="11841480" y="6035040"/>
-            <a:ext cx="9385300" cy="523220"/>
+            <a:ext cx="100" cy="100"/>
           </a:xfrm>
           <a:prstGeom prst="rect">
             <a:avLst/>
@@ -11144,47 +12515,11 @@
           </a:bodyPr>
           <a:lstStyle/>
           <a:p>
-            <a:pPr marL="342900" marR="0" lvl="0" indent="-342900" algn="just" defTabSz="457200" rtl="0" eaLnBrk="1" fontAlgn="base" latinLnBrk="0" hangingPunct="1">
-              <a:lnSpc>
-                <a:spcPct val="100000"/>
-              </a:lnSpc>
-              <a:spcBef>
-                <a:spcPct val="0"/>
-              </a:spcBef>
-              <a:spcAft>
-                <a:spcPct val="0"/>
-              </a:spcAft>
-              <a:buClrTx/>
-              <a:buSzTx/>
-              <a:buFont typeface="Arial" panose="020B0604020202020204" pitchFamily="34" charset="0"/>
-              <a:buChar char="•"/>
-              <a:tabLst/>
-              <a:defRPr/>
-            </a:pPr>
-            <a:r>
-              <a:rPr lang="en-US" sz="2800" noProof="0" dirty="0">
-                <a:solidFill>
-                  <a:prstClr val="black"/>
-                </a:solidFill>
-                <a:latin typeface="Arial" pitchFamily="34" charset="0"/>
-                <a:cs typeface="Arial" pitchFamily="34" charset="0"/>
-              </a:rPr>
-              <a:t>Details / Links of the reference and research work</a:t>
-            </a:r>
-            <a:endParaRPr kumimoji="0" lang="en-US" sz="2800" b="0" i="0" u="none" strike="noStrike" kern="1200" cap="none" spc="0" normalizeH="0" baseline="0" noProof="0" dirty="0">
-              <a:ln>
-                <a:noFill/>
-              </a:ln>
-              <a:solidFill>
-                <a:prstClr val="black"/>
-              </a:solidFill>
-              <a:effectLst/>
-              <a:uLnTx/>
-              <a:uFillTx/>
-              <a:latin typeface="Arial" pitchFamily="34" charset="0"/>
-              <a:ea typeface="ＭＳ Ｐゴシック" pitchFamily="1" charset="-128"/>
-              <a:cs typeface="Arial" pitchFamily="34" charset="0"/>
-            </a:endParaRPr>
+            <a:pPr>
+              <a:lnSpc>
+                <a:spcPct val="100000"/>
+              </a:lnSpc>
+            </a:pPr>
           </a:p>
         </p:txBody>
       </p:sp>
@@ -11360,7 +12695,7 @@
         <p:spPr>
           <a:xfrm>
             <a:off x="329773" y="252246"/>
-            <a:ext cx="1251857" cy="807334"/>
+            <a:ext cx="1783080" cy="804672"/>
           </a:xfrm>
           <a:prstGeom prst="ellipse">
             <a:avLst/>
@@ -11386,7 +12721,11 @@
           <a:p>
             <a:pPr algn="ctr"/>
             <a:r>
-              <a:rPr lang="en-US" dirty="0"/>
+              <a:rPr lang="en-US" sz="1100" dirty="0">
+                <a:solidFill>
+                  <a:srgbClr val="003366"/>
+                </a:solidFill>
+              </a:rPr>
               <a:t>Zencoderss</a:t>
             </a:r>
             <a:endParaRPr lang="en-IN" dirty="0"/>
@@ -11425,7 +12764,7 @@
       </p:pic>
       <p:sp>
         <p:nvSpPr>
-          <p:cNvPr id="17412" name="tile"/>
+          <p:cNvPr id="17412" name="heading_pill"/>
           <p:cNvSpPr>
             <a:spLocks noChangeAspect="0"/>
           </p:cNvSpPr>
@@ -11433,14 +12772,16 @@
         </p:nvSpPr>
         <p:spPr>
           <a:xfrm>
-            <a:off x="612648" y="960120"/>
-            <a:ext cx="2121408" cy="658368"/>
+            <a:off x="2895448" y="164592"/>
+            <a:ext cx="6400800" cy="676656"/>
           </a:xfrm>
           <a:prstGeom prst="roundRect">
-            <a:avLst/>
-          </a:prstGeom>
-          <a:solidFill>
-            <a:srgbClr val="003366"/>
+            <a:avLst>
+              <a:gd name="adj" fmla="val 50000"/>
+            </a:avLst>
+          </a:prstGeom>
+          <a:solidFill>
+            <a:srgbClr val="2E9E4F"/>
           </a:solidFill>
           <a:ln>
             <a:noFill/>
@@ -11452,46 +12793,28 @@
           </a:bodyPr>
           <a:lstStyle/>
           <a:p>
-            <a:pPr algn="ctr" marL="0">
-              <a:lnSpc>
-                <a:spcPct val="100000"/>
-              </a:lnSpc>
-            </a:pPr>
-            <a:r>
-              <a:rPr lang="en-US" sz="1100" b="1" dirty="0">
+            <a:pPr algn="ctr">
+              <a:lnSpc>
+                <a:spcPct val="100000"/>
+              </a:lnSpc>
+            </a:pPr>
+            <a:r>
+              <a:rPr lang="en-US" sz="2400" b="1" dirty="0">
                 <a:solidFill>
                   <a:srgbClr val="FFFFFF"/>
                 </a:solidFill>
-                <a:latin typeface="Arial"/>
-                <a:ea typeface="Arial"/>
-                <a:cs typeface="Arial"/>
-              </a:rPr>
-              <a:t>IMD</a:t>
-            </a:r>
-          </a:p>
-          <a:p>
-            <a:pPr algn="ctr" marL="0">
-              <a:lnSpc>
-                <a:spcPct val="100000"/>
-              </a:lnSpc>
-            </a:pPr>
-            <a:r>
-              <a:rPr lang="en-US" sz="900" dirty="0">
-                <a:solidFill>
-                  <a:srgbClr val="FFFFFF"/>
-                </a:solidFill>
-                <a:latin typeface="Arial"/>
-                <a:ea typeface="Arial"/>
-                <a:cs typeface="Arial"/>
-              </a:rPr>
-              <a:t>official · keyed API</a:t>
-            </a:r>
-          </a:p>
-        </p:txBody>
-      </p:sp>
-      <p:sp>
-        <p:nvSpPr>
-          <p:cNvPr id="17413" name="tile"/>
+                <a:latin typeface="Arial Black"/>
+                <a:ea typeface="Arial Black"/>
+                <a:cs typeface="Arial Black"/>
+              </a:rPr>
+              <a:t>RESEARCH  AND REFERENCES</a:t>
+            </a:r>
+          </a:p>
+        </p:txBody>
+      </p:sp>
+      <p:sp>
+        <p:nvSpPr>
+          <p:cNvPr id="17413" name="chip"/>
           <p:cNvSpPr>
             <a:spLocks noChangeAspect="0"/>
           </p:cNvSpPr>
@@ -11499,14 +12822,16 @@
         </p:nvSpPr>
         <p:spPr>
           <a:xfrm>
-            <a:off x="2843784" y="960120"/>
-            <a:ext cx="2121408" cy="658368"/>
+            <a:off x="612648" y="932688"/>
+            <a:ext cx="5852160" cy="310896"/>
           </a:xfrm>
           <a:prstGeom prst="roundRect">
-            <a:avLst/>
-          </a:prstGeom>
-          <a:solidFill>
-            <a:srgbClr val="4F81BD"/>
+            <a:avLst>
+              <a:gd name="adj" fmla="val 50000"/>
+            </a:avLst>
+          </a:prstGeom>
+          <a:solidFill>
+            <a:srgbClr val="003366"/>
           </a:solidFill>
           <a:ln>
             <a:noFill/>
@@ -11518,13 +12843,13 @@
           </a:bodyPr>
           <a:lstStyle/>
           <a:p>
-            <a:pPr algn="ctr" marL="0">
-              <a:lnSpc>
-                <a:spcPct val="100000"/>
-              </a:lnSpc>
-            </a:pPr>
-            <a:r>
-              <a:rPr lang="en-US" sz="1100" b="1" dirty="0">
+            <a:pPr algn="ctr">
+              <a:lnSpc>
+                <a:spcPct val="100000"/>
+              </a:lnSpc>
+            </a:pPr>
+            <a:r>
+              <a:rPr lang="en-US" sz="800" b="1" dirty="0">
                 <a:solidFill>
                   <a:srgbClr val="FFFFFF"/>
                 </a:solidFill>
@@ -11532,25 +12857,7 @@
                 <a:ea typeface="Arial"/>
                 <a:cs typeface="Arial"/>
               </a:rPr>
-              <a:t>CPCB</a:t>
-            </a:r>
-          </a:p>
-          <a:p>
-            <a:pPr algn="ctr" marL="0">
-              <a:lnSpc>
-                <a:spcPct val="100000"/>
-              </a:lnSpc>
-            </a:pPr>
-            <a:r>
-              <a:rPr lang="en-US" sz="900" dirty="0">
-                <a:solidFill>
-                  <a:srgbClr val="FFFFFF"/>
-                </a:solidFill>
-                <a:latin typeface="Arial"/>
-                <a:ea typeface="Arial"/>
-                <a:cs typeface="Arial"/>
-              </a:rPr>
-              <a:t>official · labelled adapter</a:t>
+              <a:t>Details / Links of the reference and research work</a:t>
             </a:r>
           </a:p>
         </p:txBody>
@@ -11565,17 +12872,19 @@
         </p:nvSpPr>
         <p:spPr>
           <a:xfrm>
-            <a:off x="5074920" y="960120"/>
+            <a:off x="612648" y="1335024"/>
             <a:ext cx="2121408" cy="658368"/>
           </a:xfrm>
           <a:prstGeom prst="roundRect">
             <a:avLst/>
           </a:prstGeom>
           <a:solidFill>
-            <a:srgbClr val="4F81BD"/>
-          </a:solidFill>
-          <a:ln>
-            <a:noFill/>
+            <a:srgbClr val="003366"/>
+          </a:solidFill>
+          <a:ln w="12700">
+            <a:solidFill>
+              <a:srgbClr val="000000"/>
+            </a:solidFill>
           </a:ln>
         </p:spPr>
         <p:txBody>
@@ -11584,7 +12893,7 @@
           </a:bodyPr>
           <a:lstStyle/>
           <a:p>
-            <a:pPr algn="ctr" marL="0">
+            <a:pPr algn="ctr">
               <a:lnSpc>
                 <a:spcPct val="100000"/>
               </a:lnSpc>
@@ -11598,11 +12907,11 @@
                 <a:ea typeface="Arial"/>
                 <a:cs typeface="Arial"/>
               </a:rPr>
-              <a:t>Copernicus</a:t>
-            </a:r>
-          </a:p>
-          <a:p>
-            <a:pPr algn="ctr" marL="0">
+              <a:t>IMD</a:t>
+            </a:r>
+          </a:p>
+          <a:p>
+            <a:pPr algn="ctr">
               <a:lnSpc>
                 <a:spcPct val="100000"/>
               </a:lnSpc>
@@ -11616,7 +12925,7 @@
                 <a:ea typeface="Arial"/>
                 <a:cs typeface="Arial"/>
               </a:rPr>
-              <a:t>official · labelled</a:t>
+              <a:t>official · keyed API</a:t>
             </a:r>
           </a:p>
         </p:txBody>
@@ -11631,7 +12940,7 @@
         </p:nvSpPr>
         <p:spPr>
           <a:xfrm>
-            <a:off x="7306056" y="960120"/>
+            <a:off x="2843784" y="1335024"/>
             <a:ext cx="2121408" cy="658368"/>
           </a:xfrm>
           <a:prstGeom prst="roundRect">
@@ -11640,8 +12949,10 @@
           <a:solidFill>
             <a:srgbClr val="4F81BD"/>
           </a:solidFill>
-          <a:ln>
-            <a:noFill/>
+          <a:ln w="12700">
+            <a:solidFill>
+              <a:srgbClr val="000000"/>
+            </a:solidFill>
           </a:ln>
         </p:spPr>
         <p:txBody>
@@ -11650,7 +12961,7 @@
           </a:bodyPr>
           <a:lstStyle/>
           <a:p>
-            <a:pPr algn="ctr" marL="0">
+            <a:pPr algn="ctr">
               <a:lnSpc>
                 <a:spcPct val="100000"/>
               </a:lnSpc>
@@ -11664,11 +12975,11 @@
                 <a:ea typeface="Arial"/>
                 <a:cs typeface="Arial"/>
               </a:rPr>
-              <a:t>MeitY UX4G</a:t>
-            </a:r>
-          </a:p>
-          <a:p>
-            <a:pPr algn="ctr" marL="0">
+              <a:t>CPCB</a:t>
+            </a:r>
+          </a:p>
+          <a:p>
+            <a:pPr algn="ctr">
               <a:lnSpc>
                 <a:spcPct val="100000"/>
               </a:lnSpc>
@@ -11682,7 +12993,7 @@
                 <a:ea typeface="Arial"/>
                 <a:cs typeface="Arial"/>
               </a:rPr>
-              <a:t>design standard</a:t>
+              <a:t>official · labelled adapter</a:t>
             </a:r>
           </a:p>
         </p:txBody>
@@ -11697,17 +13008,19 @@
         </p:nvSpPr>
         <p:spPr>
           <a:xfrm>
-            <a:off x="9537192" y="960120"/>
+            <a:off x="5074920" y="1335024"/>
             <a:ext cx="2121408" cy="658368"/>
           </a:xfrm>
           <a:prstGeom prst="roundRect">
             <a:avLst/>
           </a:prstGeom>
           <a:solidFill>
-            <a:srgbClr val="003366"/>
-          </a:solidFill>
-          <a:ln>
-            <a:noFill/>
+            <a:srgbClr val="4F81BD"/>
+          </a:solidFill>
+          <a:ln w="12700">
+            <a:solidFill>
+              <a:srgbClr val="000000"/>
+            </a:solidFill>
           </a:ln>
         </p:spPr>
         <p:txBody>
@@ -11716,7 +13029,7 @@
           </a:bodyPr>
           <a:lstStyle/>
           <a:p>
-            <a:pPr algn="ctr" marL="0">
+            <a:pPr algn="ctr">
               <a:lnSpc>
                 <a:spcPct val="100000"/>
               </a:lnSpc>
@@ -11730,11 +13043,11 @@
                 <a:ea typeface="Arial"/>
                 <a:cs typeface="Arial"/>
               </a:rPr>
-              <a:t>Our mock</a:t>
-            </a:r>
-          </a:p>
-          <a:p>
-            <a:pPr algn="ctr" marL="0">
+              <a:t>Copernicus</a:t>
+            </a:r>
+          </a:p>
+          <a:p>
+            <a:pPr algn="ctr">
               <a:lnSpc>
                 <a:spcPct val="100000"/>
               </a:lnSpc>
@@ -11748,14 +13061,14 @@
                 <a:ea typeface="Arial"/>
                 <a:cs typeface="Arial"/>
               </a:rPr>
-              <a:t>32 tests · replay</a:t>
-            </a:r>
-          </a:p>
-        </p:txBody>
-      </p:sp>
-      <p:sp>
-        <p:nvSpPr>
-          <p:cNvPr id="17417" name="ref"/>
+              <a:t>official · labelled</a:t>
+            </a:r>
+          </a:p>
+        </p:txBody>
+      </p:sp>
+      <p:sp>
+        <p:nvSpPr>
+          <p:cNvPr id="17417" name="tile"/>
           <p:cNvSpPr>
             <a:spLocks noChangeAspect="0"/>
           </p:cNvSpPr>
@@ -11763,19 +13076,489 @@
         </p:nvSpPr>
         <p:spPr>
           <a:xfrm>
-            <a:off x="612648" y="1737360"/>
-            <a:ext cx="10954512" cy="566928"/>
+            <a:off x="7306056" y="1335024"/>
+            <a:ext cx="2121408" cy="658368"/>
           </a:xfrm>
           <a:prstGeom prst="roundRect">
             <a:avLst/>
           </a:prstGeom>
           <a:solidFill>
-            <a:srgbClr val="F2F2F2"/>
+            <a:srgbClr val="4F81BD"/>
           </a:solidFill>
           <a:ln w="12700">
             <a:solidFill>
-              <a:srgbClr val="CCCCCC"/>
+              <a:srgbClr val="000000"/>
             </a:solidFill>
+          </a:ln>
+        </p:spPr>
+        <p:txBody>
+          <a:bodyPr anchor="ctr" wrap="square">
+            <a:normAutofit/>
+          </a:bodyPr>
+          <a:lstStyle/>
+          <a:p>
+            <a:pPr algn="ctr">
+              <a:lnSpc>
+                <a:spcPct val="100000"/>
+              </a:lnSpc>
+            </a:pPr>
+            <a:r>
+              <a:rPr lang="en-US" sz="1100" b="1" dirty="0">
+                <a:solidFill>
+                  <a:srgbClr val="FFFFFF"/>
+                </a:solidFill>
+                <a:latin typeface="Arial"/>
+                <a:ea typeface="Arial"/>
+                <a:cs typeface="Arial"/>
+              </a:rPr>
+              <a:t>MeitY UX4G</a:t>
+            </a:r>
+          </a:p>
+          <a:p>
+            <a:pPr algn="ctr">
+              <a:lnSpc>
+                <a:spcPct val="100000"/>
+              </a:lnSpc>
+            </a:pPr>
+            <a:r>
+              <a:rPr lang="en-US" sz="900" dirty="0">
+                <a:solidFill>
+                  <a:srgbClr val="FFFFFF"/>
+                </a:solidFill>
+                <a:latin typeface="Arial"/>
+                <a:ea typeface="Arial"/>
+                <a:cs typeface="Arial"/>
+              </a:rPr>
+              <a:t>design standard</a:t>
+            </a:r>
+          </a:p>
+        </p:txBody>
+      </p:sp>
+      <p:sp>
+        <p:nvSpPr>
+          <p:cNvPr id="17418" name="tile"/>
+          <p:cNvSpPr>
+            <a:spLocks noChangeAspect="0"/>
+          </p:cNvSpPr>
+          <p:nvPr/>
+        </p:nvSpPr>
+        <p:spPr>
+          <a:xfrm>
+            <a:off x="9537192" y="1335024"/>
+            <a:ext cx="2121408" cy="658368"/>
+          </a:xfrm>
+          <a:prstGeom prst="roundRect">
+            <a:avLst/>
+          </a:prstGeom>
+          <a:solidFill>
+            <a:srgbClr val="003366"/>
+          </a:solidFill>
+          <a:ln w="12700">
+            <a:solidFill>
+              <a:srgbClr val="000000"/>
+            </a:solidFill>
+          </a:ln>
+        </p:spPr>
+        <p:txBody>
+          <a:bodyPr anchor="ctr" wrap="square">
+            <a:normAutofit/>
+          </a:bodyPr>
+          <a:lstStyle/>
+          <a:p>
+            <a:pPr algn="ctr">
+              <a:lnSpc>
+                <a:spcPct val="100000"/>
+              </a:lnSpc>
+            </a:pPr>
+            <a:r>
+              <a:rPr lang="en-US" sz="1100" b="1" dirty="0">
+                <a:solidFill>
+                  <a:srgbClr val="FFFFFF"/>
+                </a:solidFill>
+                <a:latin typeface="Arial"/>
+                <a:ea typeface="Arial"/>
+                <a:cs typeface="Arial"/>
+              </a:rPr>
+              <a:t>Our mock</a:t>
+            </a:r>
+          </a:p>
+          <a:p>
+            <a:pPr algn="ctr">
+              <a:lnSpc>
+                <a:spcPct val="100000"/>
+              </a:lnSpc>
+            </a:pPr>
+            <a:r>
+              <a:rPr lang="en-US" sz="900" dirty="0">
+                <a:solidFill>
+                  <a:srgbClr val="FFFFFF"/>
+                </a:solidFill>
+                <a:latin typeface="Arial"/>
+                <a:ea typeface="Arial"/>
+                <a:cs typeface="Arial"/>
+              </a:rPr>
+              <a:t>32 tests · replay</a:t>
+            </a:r>
+          </a:p>
+        </p:txBody>
+      </p:sp>
+      <p:sp>
+        <p:nvSpPr>
+          <p:cNvPr id="17419" name="panel"/>
+          <p:cNvSpPr>
+            <a:spLocks noChangeAspect="0"/>
+          </p:cNvSpPr>
+          <p:nvPr/>
+        </p:nvSpPr>
+        <p:spPr>
+          <a:xfrm>
+            <a:off x="612648" y="2121408"/>
+            <a:ext cx="10954512" cy="2788920"/>
+          </a:xfrm>
+          <a:prstGeom prst="roundRect">
+            <a:avLst/>
+          </a:prstGeom>
+          <a:solidFill>
+            <a:srgbClr val="D9480F"/>
+          </a:solidFill>
+          <a:ln w="28575">
+            <a:solidFill>
+              <a:srgbClr val="000000"/>
+            </a:solidFill>
+          </a:ln>
+        </p:spPr>
+        <p:txBody>
+          <a:bodyPr anchor="ctr" wrap="square">
+            <a:normAutofit/>
+          </a:bodyPr>
+          <a:lstStyle/>
+          <a:p>
+            <a:pPr algn="l">
+              <a:lnSpc>
+                <a:spcPct val="100000"/>
+              </a:lnSpc>
+              <a:spcAft>
+                <a:spcPts val="1400"/>
+              </a:spcAft>
+            </a:pPr>
+            <a:r>
+              <a:rPr lang="en-US" sz="1100" b="1" dirty="0">
+                <a:solidFill>
+                  <a:srgbClr val="FFFFFF"/>
+                </a:solidFill>
+                <a:latin typeface="Arial"/>
+                <a:ea typeface="Arial"/>
+                <a:cs typeface="Arial"/>
+              </a:rPr>
+              <a:t>1.  IMD API reference + portal user guide (key, hourly JWT, static IP)  </a:t>
+            </a:r>
+            <a:r>
+              <a:rPr lang="en-US" sz="1100" b="1" u="sng" dirty="0">
+                <a:solidFill>
+                  <a:srgbClr val="FFE08A"/>
+                </a:solidFill>
+                <a:latin typeface="Arial"/>
+                <a:ea typeface="Arial"/>
+                <a:cs typeface="Arial"/>
+              </a:rPr>
+              <a:t>api.imd.gov.in</a:t>
+            </a:r>
+          </a:p>
+          <a:p>
+            <a:pPr algn="l">
+              <a:lnSpc>
+                <a:spcPct val="100000"/>
+              </a:lnSpc>
+              <a:spcAft>
+                <a:spcPts val="1400"/>
+              </a:spcAft>
+            </a:pPr>
+            <a:r>
+              <a:rPr lang="en-US" sz="1100" b="1" dirty="0">
+                <a:solidFill>
+                  <a:srgbClr val="FFFFFF"/>
+                </a:solidFill>
+                <a:latin typeface="Arial"/>
+                <a:ea typeface="Arial"/>
+                <a:cs typeface="Arial"/>
+              </a:rPr>
+              <a:t>2.  CPCB real-time AQI, GODL  </a:t>
+            </a:r>
+            <a:r>
+              <a:rPr lang="en-US" sz="1100" b="1" u="sng" dirty="0">
+                <a:solidFill>
+                  <a:srgbClr val="FFE08A"/>
+                </a:solidFill>
+                <a:latin typeface="Arial"/>
+                <a:ea typeface="Arial"/>
+                <a:cs typeface="Arial"/>
+              </a:rPr>
+              <a:t>data.gov.in</a:t>
+            </a:r>
+          </a:p>
+          <a:p>
+            <a:pPr algn="l">
+              <a:lnSpc>
+                <a:spcPct val="100000"/>
+              </a:lnSpc>
+              <a:spcAft>
+                <a:spcPts val="1400"/>
+              </a:spcAft>
+            </a:pPr>
+            <a:r>
+              <a:rPr lang="en-US" sz="1100" b="1" dirty="0">
+                <a:solidFill>
+                  <a:srgbClr val="FFFFFF"/>
+                </a:solidFill>
+                <a:latin typeface="Arial"/>
+                <a:ea typeface="Arial"/>
+                <a:cs typeface="Arial"/>
+              </a:rPr>
+              <a:t>3.  Copernicus CAMS atmosphere data store  </a:t>
+            </a:r>
+            <a:r>
+              <a:rPr lang="en-US" sz="1100" b="1" u="sng" dirty="0">
+                <a:solidFill>
+                  <a:srgbClr val="FFE08A"/>
+                </a:solidFill>
+                <a:latin typeface="Arial"/>
+                <a:ea typeface="Arial"/>
+                <a:cs typeface="Arial"/>
+              </a:rPr>
+              <a:t>ads.atmosphere.copernicus.eu</a:t>
+            </a:r>
+          </a:p>
+          <a:p>
+            <a:pPr algn="l">
+              <a:lnSpc>
+                <a:spcPct val="100000"/>
+              </a:lnSpc>
+              <a:spcAft>
+                <a:spcPts val="1400"/>
+              </a:spcAft>
+            </a:pPr>
+            <a:r>
+              <a:rPr lang="en-US" sz="1100" b="1" dirty="0">
+                <a:solidFill>
+                  <a:srgbClr val="FFFFFF"/>
+                </a:solidFill>
+                <a:latin typeface="Arial"/>
+                <a:ea typeface="Arial"/>
+                <a:cs typeface="Arial"/>
+              </a:rPr>
+              <a:t>4.  MeitY UX4G design system + PIB Mausam note (2023)  </a:t>
+            </a:r>
+            <a:r>
+              <a:rPr lang="en-US" sz="1100" b="1" u="sng" dirty="0">
+                <a:solidFill>
+                  <a:srgbClr val="FFE08A"/>
+                </a:solidFill>
+                <a:latin typeface="Arial"/>
+                <a:ea typeface="Arial"/>
+                <a:cs typeface="Arial"/>
+              </a:rPr>
+              <a:t>ux4g.gov.in · pib.gov.in</a:t>
+            </a:r>
+          </a:p>
+          <a:p>
+            <a:pPr algn="l">
+              <a:lnSpc>
+                <a:spcPct val="100000"/>
+              </a:lnSpc>
+              <a:spcAft>
+                <a:spcPts val="1400"/>
+              </a:spcAft>
+            </a:pPr>
+            <a:r>
+              <a:rPr lang="en-US" sz="1100" b="1" dirty="0">
+                <a:solidFill>
+                  <a:srgbClr val="FFFFFF"/>
+                </a:solidFill>
+                <a:latin typeface="Arial"/>
+                <a:ea typeface="Arial"/>
+                <a:cs typeface="Arial"/>
+              </a:rPr>
+              <a:t>5.  Pai, N. et al. (2014), IMD Pune gridded rainfall 0.25°  </a:t>
+            </a:r>
+            <a:r>
+              <a:rPr lang="en-US" sz="1100" b="1" u="sng" dirty="0">
+                <a:solidFill>
+                  <a:srgbClr val="FFE08A"/>
+                </a:solidFill>
+                <a:latin typeface="Arial"/>
+                <a:ea typeface="Arial"/>
+                <a:cs typeface="Arial"/>
+              </a:rPr>
+              <a:t>published dataset</a:t>
+            </a:r>
+          </a:p>
+          <a:p>
+            <a:pPr algn="l">
+              <a:lnSpc>
+                <a:spcPct val="100000"/>
+              </a:lnSpc>
+              <a:spcAft>
+                <a:spcPts val="1400"/>
+              </a:spcAft>
+            </a:pPr>
+            <a:r>
+              <a:rPr lang="en-US" sz="1100" b="1" dirty="0">
+                <a:solidFill>
+                  <a:srgbClr val="FFFFFF"/>
+                </a:solidFill>
+                <a:latin typeface="Arial"/>
+                <a:ea typeface="Arial"/>
+                <a:cs typeface="Arial"/>
+              </a:rPr>
+              <a:t>6.  Mausam app: existing Damini lightning + Meghdoot crop modules  </a:t>
+            </a:r>
+            <a:r>
+              <a:rPr lang="en-US" sz="1100" b="1" u="sng" dirty="0">
+                <a:solidFill>
+                  <a:srgbClr val="FFE08A"/>
+                </a:solidFill>
+                <a:latin typeface="Arial"/>
+                <a:ea typeface="Arial"/>
+                <a:cs typeface="Arial"/>
+              </a:rPr>
+              <a:t>mausam.imd.gov.in</a:t>
+            </a:r>
+          </a:p>
+          <a:p>
+            <a:pPr algn="l">
+              <a:lnSpc>
+                <a:spcPct val="100000"/>
+              </a:lnSpc>
+              <a:spcAft>
+                <a:spcPts val="1400"/>
+              </a:spcAft>
+            </a:pPr>
+            <a:r>
+              <a:rPr lang="en-US" sz="1100" b="1" dirty="0">
+                <a:solidFill>
+                  <a:srgbClr val="FFFFFF"/>
+                </a:solidFill>
+                <a:latin typeface="Arial"/>
+                <a:ea typeface="Arial"/>
+                <a:cs typeface="Arial"/>
+              </a:rPr>
+              <a:t>7.  Working mock, fixtures, replay tests (32 pass)  </a:t>
+            </a:r>
+            <a:r>
+              <a:rPr lang="en-US" sz="1100" b="1" u="sng" dirty="0">
+                <a:solidFill>
+                  <a:srgbClr val="FFE08A"/>
+                </a:solidFill>
+                <a:latin typeface="Arial"/>
+                <a:ea typeface="Arial"/>
+                <a:cs typeface="Arial"/>
+              </a:rPr>
+              <a:t>Mausam/docs/evidence (illustrative)</a:t>
+            </a:r>
+          </a:p>
+          <a:p>
+            <a:pPr algn="l">
+              <a:lnSpc>
+                <a:spcPct val="100000"/>
+              </a:lnSpc>
+              <a:spcAft>
+                <a:spcPts val="1400"/>
+              </a:spcAft>
+            </a:pPr>
+            <a:r>
+              <a:rPr lang="en-US" sz="1100" b="1" dirty="0">
+                <a:solidFill>
+                  <a:srgbClr val="FFFFFF"/>
+                </a:solidFill>
+                <a:latin typeface="Arial"/>
+                <a:ea typeface="Arial"/>
+                <a:cs typeface="Arial"/>
+              </a:rPr>
+              <a:t>8.  Live demo – deployed PWA, guest-first, works offline  </a:t>
+            </a:r>
+            <a:r>
+              <a:rPr lang="en-US" sz="1100" b="1" u="sng" dirty="0">
+                <a:solidFill>
+                  <a:srgbClr val="FFE08A"/>
+                </a:solidFill>
+                <a:latin typeface="Arial"/>
+                <a:ea typeface="Arial"/>
+                <a:cs typeface="Arial"/>
+              </a:rPr>
+              <a:t>mausam-sih26076-devanshdhangar70-7520s-projects.vercel.app/</a:t>
+            </a:r>
+          </a:p>
+        </p:txBody>
+      </p:sp>
+      <p:sp>
+        <p:nvSpPr>
+          <p:cNvPr id="17420" name="chip"/>
+          <p:cNvSpPr>
+            <a:spLocks noChangeAspect="0"/>
+          </p:cNvSpPr>
+          <p:nvPr/>
+        </p:nvSpPr>
+        <p:spPr>
+          <a:xfrm>
+            <a:off x="612648" y="5431536"/>
+            <a:ext cx="2194560" cy="402336"/>
+          </a:xfrm>
+          <a:prstGeom prst="roundRect">
+            <a:avLst>
+              <a:gd name="adj" fmla="val 50000"/>
+            </a:avLst>
+          </a:prstGeom>
+          <a:solidFill>
+            <a:srgbClr val="2E9E4F"/>
+          </a:solidFill>
+          <a:ln>
+            <a:noFill/>
+          </a:ln>
+        </p:spPr>
+        <p:txBody>
+          <a:bodyPr anchor="ctr" wrap="square">
+            <a:normAutofit/>
+          </a:bodyPr>
+          <a:lstStyle/>
+          <a:p>
+            <a:pPr algn="ctr">
+              <a:lnSpc>
+                <a:spcPct val="100000"/>
+              </a:lnSpc>
+            </a:pPr>
+            <a:r>
+              <a:rPr lang="en-US" sz="1200" b="1" dirty="0">
+                <a:solidFill>
+                  <a:srgbClr val="FFFFFF"/>
+                </a:solidFill>
+                <a:latin typeface="Arial"/>
+                <a:ea typeface="Arial"/>
+                <a:cs typeface="Arial"/>
+              </a:rPr>
+              <a:t>REFERENCES</a:t>
+            </a:r>
+          </a:p>
+        </p:txBody>
+      </p:sp>
+      <p:sp>
+        <p:nvSpPr>
+          <p:cNvPr id="17421" name="note"/>
+          <p:cNvSpPr>
+            <a:spLocks noChangeAspect="0"/>
+          </p:cNvSpPr>
+          <p:nvPr/>
+        </p:nvSpPr>
+        <p:spPr>
+          <a:xfrm>
+            <a:off x="3063240" y="5468112"/>
+            <a:ext cx="8503920" cy="365760"/>
+          </a:xfrm>
+          <a:prstGeom prst="rect">
+            <a:avLst/>
+          </a:prstGeom>
+          <a:noFill/>
+          <a:ln>
+            <a:noFill/>
           </a:ln>
         </p:spPr>
         <p:txBody>
@@ -11784,13 +13567,13 @@
           </a:bodyPr>
           <a:lstStyle/>
           <a:p>
-            <a:pPr algn="l" marL="0">
-              <a:lnSpc>
-                <a:spcPct val="100000"/>
-              </a:lnSpc>
-            </a:pPr>
-            <a:r>
-              <a:rPr lang="en-US" sz="1000" dirty="0">
+            <a:pPr algn="l">
+              <a:lnSpc>
+                <a:spcPct val="100000"/>
+              </a:lnSpc>
+            </a:pPr>
+            <a:r>
+              <a:rPr lang="en-US" sz="1050" dirty="0">
                 <a:solidFill>
                   <a:srgbClr val="1A1A1A"/>
                 </a:solidFill>
@@ -11798,384 +13581,7 @@
                 <a:ea typeface="Arial"/>
                 <a:cs typeface="Arial"/>
               </a:rPr>
-              <a:t>1.  IMD API reference + portal user guide (key, hourly JWT, static IP)</a:t>
-            </a:r>
-            <a:r>
-              <a:rPr lang="en-US" sz="1000" dirty="0">
-                <a:solidFill>
-                  <a:srgbClr val="4F81BD"/>
-                </a:solidFill>
-                <a:latin typeface="Arial"/>
-                <a:ea typeface="Arial"/>
-                <a:cs typeface="Arial"/>
-              </a:rPr>
-              <a:t>  api.imd.gov.in</a:t>
-            </a:r>
-          </a:p>
-        </p:txBody>
-      </p:sp>
-      <p:sp>
-        <p:nvSpPr>
-          <p:cNvPr id="17418" name="ref"/>
-          <p:cNvSpPr>
-            <a:spLocks noChangeAspect="0"/>
-          </p:cNvSpPr>
-          <p:nvPr/>
-        </p:nvSpPr>
-        <p:spPr>
-          <a:xfrm>
-            <a:off x="612648" y="2359152"/>
-            <a:ext cx="10954512" cy="566928"/>
-          </a:xfrm>
-          <a:prstGeom prst="roundRect">
-            <a:avLst/>
-          </a:prstGeom>
-          <a:solidFill>
-            <a:srgbClr val="FFFFFF"/>
-          </a:solidFill>
-          <a:ln w="12700">
-            <a:solidFill>
-              <a:srgbClr val="CCCCCC"/>
-            </a:solidFill>
-          </a:ln>
-        </p:spPr>
-        <p:txBody>
-          <a:bodyPr anchor="t" wrap="square">
-            <a:normAutofit/>
-          </a:bodyPr>
-          <a:lstStyle/>
-          <a:p>
-            <a:pPr algn="l" marL="0">
-              <a:lnSpc>
-                <a:spcPct val="100000"/>
-              </a:lnSpc>
-            </a:pPr>
-            <a:r>
-              <a:rPr lang="en-US" sz="1000" dirty="0">
-                <a:solidFill>
-                  <a:srgbClr val="1A1A1A"/>
-                </a:solidFill>
-                <a:latin typeface="Arial"/>
-                <a:ea typeface="Arial"/>
-                <a:cs typeface="Arial"/>
-              </a:rPr>
-              <a:t>2.  CPCB real-time AQI, GODL</a:t>
-            </a:r>
-            <a:r>
-              <a:rPr lang="en-US" sz="1000" dirty="0">
-                <a:solidFill>
-                  <a:srgbClr val="4F81BD"/>
-                </a:solidFill>
-                <a:latin typeface="Arial"/>
-                <a:ea typeface="Arial"/>
-                <a:cs typeface="Arial"/>
-              </a:rPr>
-              <a:t>  data.gov.in</a:t>
-            </a:r>
-          </a:p>
-        </p:txBody>
-      </p:sp>
-      <p:sp>
-        <p:nvSpPr>
-          <p:cNvPr id="17419" name="ref"/>
-          <p:cNvSpPr>
-            <a:spLocks noChangeAspect="0"/>
-          </p:cNvSpPr>
-          <p:nvPr/>
-        </p:nvSpPr>
-        <p:spPr>
-          <a:xfrm>
-            <a:off x="612648" y="2980944"/>
-            <a:ext cx="10954512" cy="566928"/>
-          </a:xfrm>
-          <a:prstGeom prst="roundRect">
-            <a:avLst/>
-          </a:prstGeom>
-          <a:solidFill>
-            <a:srgbClr val="F2F2F2"/>
-          </a:solidFill>
-          <a:ln w="12700">
-            <a:solidFill>
-              <a:srgbClr val="CCCCCC"/>
-            </a:solidFill>
-          </a:ln>
-        </p:spPr>
-        <p:txBody>
-          <a:bodyPr anchor="t" wrap="square">
-            <a:normAutofit/>
-          </a:bodyPr>
-          <a:lstStyle/>
-          <a:p>
-            <a:pPr algn="l" marL="0">
-              <a:lnSpc>
-                <a:spcPct val="100000"/>
-              </a:lnSpc>
-            </a:pPr>
-            <a:r>
-              <a:rPr lang="en-US" sz="1000" dirty="0">
-                <a:solidFill>
-                  <a:srgbClr val="1A1A1A"/>
-                </a:solidFill>
-                <a:latin typeface="Arial"/>
-                <a:ea typeface="Arial"/>
-                <a:cs typeface="Arial"/>
-              </a:rPr>
-              <a:t>3.  Copernicus CAMS atmosphere data store</a:t>
-            </a:r>
-            <a:r>
-              <a:rPr lang="en-US" sz="1000" dirty="0">
-                <a:solidFill>
-                  <a:srgbClr val="4F81BD"/>
-                </a:solidFill>
-                <a:latin typeface="Arial"/>
-                <a:ea typeface="Arial"/>
-                <a:cs typeface="Arial"/>
-              </a:rPr>
-              <a:t>  ads.atmosphere.copernicus.eu</a:t>
-            </a:r>
-          </a:p>
-        </p:txBody>
-      </p:sp>
-      <p:sp>
-        <p:nvSpPr>
-          <p:cNvPr id="17420" name="ref"/>
-          <p:cNvSpPr>
-            <a:spLocks noChangeAspect="0"/>
-          </p:cNvSpPr>
-          <p:nvPr/>
-        </p:nvSpPr>
-        <p:spPr>
-          <a:xfrm>
-            <a:off x="612648" y="3602736"/>
-            <a:ext cx="10954512" cy="566928"/>
-          </a:xfrm>
-          <a:prstGeom prst="roundRect">
-            <a:avLst/>
-          </a:prstGeom>
-          <a:solidFill>
-            <a:srgbClr val="FFFFFF"/>
-          </a:solidFill>
-          <a:ln w="12700">
-            <a:solidFill>
-              <a:srgbClr val="CCCCCC"/>
-            </a:solidFill>
-          </a:ln>
-        </p:spPr>
-        <p:txBody>
-          <a:bodyPr anchor="t" wrap="square">
-            <a:normAutofit/>
-          </a:bodyPr>
-          <a:lstStyle/>
-          <a:p>
-            <a:pPr algn="l" marL="0">
-              <a:lnSpc>
-                <a:spcPct val="100000"/>
-              </a:lnSpc>
-            </a:pPr>
-            <a:r>
-              <a:rPr lang="en-US" sz="1000" dirty="0">
-                <a:solidFill>
-                  <a:srgbClr val="1A1A1A"/>
-                </a:solidFill>
-                <a:latin typeface="Arial"/>
-                <a:ea typeface="Arial"/>
-                <a:cs typeface="Arial"/>
-              </a:rPr>
-              <a:t>4.  MeitY UX4G design system + PIB Mausam note (2023)</a:t>
-            </a:r>
-            <a:r>
-              <a:rPr lang="en-US" sz="1000" dirty="0">
-                <a:solidFill>
-                  <a:srgbClr val="4F81BD"/>
-                </a:solidFill>
-                <a:latin typeface="Arial"/>
-                <a:ea typeface="Arial"/>
-                <a:cs typeface="Arial"/>
-              </a:rPr>
-              <a:t>  ux4g.gov.in · pib.gov.in</a:t>
-            </a:r>
-          </a:p>
-        </p:txBody>
-      </p:sp>
-      <p:sp>
-        <p:nvSpPr>
-          <p:cNvPr id="17421" name="ref"/>
-          <p:cNvSpPr>
-            <a:spLocks noChangeAspect="0"/>
-          </p:cNvSpPr>
-          <p:nvPr/>
-        </p:nvSpPr>
-        <p:spPr>
-          <a:xfrm>
-            <a:off x="612648" y="4224528"/>
-            <a:ext cx="10954512" cy="566928"/>
-          </a:xfrm>
-          <a:prstGeom prst="roundRect">
-            <a:avLst/>
-          </a:prstGeom>
-          <a:solidFill>
-            <a:srgbClr val="F2F2F2"/>
-          </a:solidFill>
-          <a:ln w="12700">
-            <a:solidFill>
-              <a:srgbClr val="CCCCCC"/>
-            </a:solidFill>
-          </a:ln>
-        </p:spPr>
-        <p:txBody>
-          <a:bodyPr anchor="t" wrap="square">
-            <a:normAutofit/>
-          </a:bodyPr>
-          <a:lstStyle/>
-          <a:p>
-            <a:pPr algn="l" marL="0">
-              <a:lnSpc>
-                <a:spcPct val="100000"/>
-              </a:lnSpc>
-            </a:pPr>
-            <a:r>
-              <a:rPr lang="en-US" sz="1000" dirty="0">
-                <a:solidFill>
-                  <a:srgbClr val="1A1A1A"/>
-                </a:solidFill>
-                <a:latin typeface="Arial"/>
-                <a:ea typeface="Arial"/>
-                <a:cs typeface="Arial"/>
-              </a:rPr>
-              <a:t>5.  Pai, N. et al. (2014), IMD Pune gridded rainfall 0.25°</a:t>
-            </a:r>
-            <a:r>
-              <a:rPr lang="en-US" sz="1000" dirty="0">
-                <a:solidFill>
-                  <a:srgbClr val="4F81BD"/>
-                </a:solidFill>
-                <a:latin typeface="Arial"/>
-                <a:ea typeface="Arial"/>
-                <a:cs typeface="Arial"/>
-              </a:rPr>
-              <a:t>  published dataset</a:t>
-            </a:r>
-          </a:p>
-        </p:txBody>
-      </p:sp>
-      <p:sp>
-        <p:nvSpPr>
-          <p:cNvPr id="17422" name="ref"/>
-          <p:cNvSpPr>
-            <a:spLocks noChangeAspect="0"/>
-          </p:cNvSpPr>
-          <p:nvPr/>
-        </p:nvSpPr>
-        <p:spPr>
-          <a:xfrm>
-            <a:off x="612648" y="4846320"/>
-            <a:ext cx="10954512" cy="566928"/>
-          </a:xfrm>
-          <a:prstGeom prst="roundRect">
-            <a:avLst/>
-          </a:prstGeom>
-          <a:solidFill>
-            <a:srgbClr val="FFFFFF"/>
-          </a:solidFill>
-          <a:ln w="12700">
-            <a:solidFill>
-              <a:srgbClr val="CCCCCC"/>
-            </a:solidFill>
-          </a:ln>
-        </p:spPr>
-        <p:txBody>
-          <a:bodyPr anchor="t" wrap="square">
-            <a:normAutofit/>
-          </a:bodyPr>
-          <a:lstStyle/>
-          <a:p>
-            <a:pPr algn="l" marL="0">
-              <a:lnSpc>
-                <a:spcPct val="100000"/>
-              </a:lnSpc>
-            </a:pPr>
-            <a:r>
-              <a:rPr lang="en-US" sz="1000" dirty="0">
-                <a:solidFill>
-                  <a:srgbClr val="1A1A1A"/>
-                </a:solidFill>
-                <a:latin typeface="Arial"/>
-                <a:ea typeface="Arial"/>
-                <a:cs typeface="Arial"/>
-              </a:rPr>
-              <a:t>6.  Mausam app: existing Damini lightning + Meghdoot crop modules</a:t>
-            </a:r>
-            <a:r>
-              <a:rPr lang="en-US" sz="1000" dirty="0">
-                <a:solidFill>
-                  <a:srgbClr val="4F81BD"/>
-                </a:solidFill>
-                <a:latin typeface="Arial"/>
-                <a:ea typeface="Arial"/>
-                <a:cs typeface="Arial"/>
-              </a:rPr>
-              <a:t>  mausam.imd.gov.in</a:t>
-            </a:r>
-          </a:p>
-        </p:txBody>
-      </p:sp>
-      <p:sp>
-        <p:nvSpPr>
-          <p:cNvPr id="17423" name="ref"/>
-          <p:cNvSpPr>
-            <a:spLocks noChangeAspect="0"/>
-          </p:cNvSpPr>
-          <p:nvPr/>
-        </p:nvSpPr>
-        <p:spPr>
-          <a:xfrm>
-            <a:off x="612648" y="5468112"/>
-            <a:ext cx="10954512" cy="566928"/>
-          </a:xfrm>
-          <a:prstGeom prst="roundRect">
-            <a:avLst/>
-          </a:prstGeom>
-          <a:solidFill>
-            <a:srgbClr val="F2F2F2"/>
-          </a:solidFill>
-          <a:ln w="12700">
-            <a:solidFill>
-              <a:srgbClr val="CCCCCC"/>
-            </a:solidFill>
-          </a:ln>
-        </p:spPr>
-        <p:txBody>
-          <a:bodyPr anchor="t" wrap="square">
-            <a:normAutofit/>
-          </a:bodyPr>
-          <a:lstStyle/>
-          <a:p>
-            <a:pPr algn="l" marL="0">
-              <a:lnSpc>
-                <a:spcPct val="100000"/>
-              </a:lnSpc>
-            </a:pPr>
-            <a:r>
-              <a:rPr lang="en-US" sz="1000" dirty="0">
-                <a:solidFill>
-                  <a:srgbClr val="1A1A1A"/>
-                </a:solidFill>
-                <a:latin typeface="Arial"/>
-                <a:ea typeface="Arial"/>
-                <a:cs typeface="Arial"/>
-              </a:rPr>
-              <a:t>7.  Working mock, fixtures, replay tests (32 pass)</a:t>
-            </a:r>
-            <a:r>
-              <a:rPr lang="en-US" sz="1000" dirty="0">
-                <a:solidFill>
-                  <a:srgbClr val="4F81BD"/>
-                </a:solidFill>
-                <a:latin typeface="Arial"/>
-                <a:ea typeface="Arial"/>
-                <a:cs typeface="Arial"/>
-              </a:rPr>
-              <a:t>  submission folder Mausam/docs/evidence (illustrative)</a:t>
+              <a:t>Official, verifiable sources; local mock paths are labelled (illustrative). No fabricated statistics.</a:t>
             </a:r>
           </a:p>
         </p:txBody>
